--- a/docs/ecostats_lectures/lecture_08/08_01_lecture_powerpoint.pptx
+++ b/docs/ecostats_lectures/lecture_08/08_01_lecture_powerpoint.pptx
@@ -12481,6 +12481,30 @@
             <a:r>
               <a:rPr/>
               <a:t>We’re interested in causality. How do we get there?</a:t>
+            </a:r>
+          </a:p>
+          <a:p>
+            <a:pPr lvl="0" indent="0" marL="0">
+              <a:spcBef>
+                <a:spcPts val="3000"/>
+              </a:spcBef>
+              <a:buNone/>
+            </a:pPr>
+            <a:r>
+              <a:rPr b="1"/>
+              <a:t>What type of experiment is this?</a:t>
+            </a:r>
+          </a:p>
+          <a:p>
+            <a:pPr lvl="0" indent="0" marL="0">
+              <a:spcBef>
+                <a:spcPts val="3000"/>
+              </a:spcBef>
+              <a:buNone/>
+            </a:pPr>
+            <a:r>
+              <a:rPr b="1"/>
+              <a:t>What are the potential problems with testing this hypothesis?</a:t>
             </a:r>
           </a:p>
         </p:txBody>

--- a/docs/ecostats_lectures/lecture_08/08_01_lecture_powerpoint.pptx
+++ b/docs/ecostats_lectures/lecture_08/08_01_lecture_powerpoint.pptx
@@ -39,7 +39,6 @@
     <p:sldId id="287" r:id="rId33"/>
     <p:sldId id="288" r:id="rId34"/>
     <p:sldId id="289" r:id="rId35"/>
-    <p:sldId id="290" r:id="rId36"/>
   </p:sldIdLst>
   <p:sldSz cx="9144000" cy="5143500" type="screen16x9"/>
   <p:notesSz cx="6858000" cy="9144000"/>
@@ -3399,1218 +3398,6 @@
         <p:spPr>
           <a:xfrm>
             <a:off x="0" y="0"/>
-            <a:ext cx="9144000" cy="582780"/>
-          </a:xfrm>
-        </p:spPr>
-        <p:txBody>
-          <a:bodyPr/>
-          <a:lstStyle/>
-          <a:p>
-            <a:pPr lvl="0" indent="0" marL="0">
-              <a:buNone/>
-            </a:pPr>
-            <a:r>
-              <a:rPr/>
-              <a:t>Activity 2: Pine Needle Natural Experiment Design</a:t>
-            </a:r>
-          </a:p>
-        </p:txBody>
-      </p:sp>
-      <p:sp>
-        <p:nvSpPr>
-          <p:cNvPr id="3" name="Content Placeholder 2"/>
-          <p:cNvSpPr>
-            <a:spLocks noGrp="1"/>
-          </p:cNvSpPr>
-          <p:nvPr>
-            <p:ph idx="1"/>
-          </p:nvPr>
-        </p:nvSpPr>
-        <p:spPr/>
-        <p:txBody>
-          <a:bodyPr/>
-          <a:lstStyle/>
-          <a:p>
-            <a:pPr lvl="0" indent="0" marL="1270000">
-              <a:buNone/>
-            </a:pPr>
-            <a:r>
-              <a:rPr sz="2000" b="1"/>
-              <a:t>Activity 2: Pine Needle Natural Experiment Design</a:t>
-            </a:r>
-          </a:p>
-          <a:p>
-            <a:pPr lvl="0" indent="0" marL="1270000">
-              <a:buNone/>
-            </a:pPr>
-            <a:r>
-              <a:rPr sz="2000"/>
-              <a:t>Suppose we want to investigate whether wind/sun exposure affects pine needle length across our campus. We decide to pick exposed sheltered locations. What sort of design would we conduct?</a:t>
-            </a:r>
-          </a:p>
-          <a:p>
-            <a:pPr lvl="0" indent="0">
-              <a:buNone/>
-            </a:pPr>
-            <a:r>
-              <a:rPr>
-                <a:solidFill>
-                  <a:srgbClr val="5E5E5E"/>
-                </a:solidFill>
-                <a:latin typeface="Courier"/>
-              </a:rPr>
-              <a:t># Let's simulate some pine needle data from exposed and sheltered locations</a:t>
-            </a:r>
-            <a:br/>
-            <a:r>
-              <a:rPr>
-                <a:solidFill>
-                  <a:srgbClr val="003B4F"/>
-                </a:solidFill>
-                <a:latin typeface="Courier"/>
-              </a:rPr>
-              <a:t>exposed_locations &lt;- </a:t>
-            </a:r>
-            <a:r>
-              <a:rPr>
-                <a:solidFill>
-                  <a:srgbClr val="4758AB"/>
-                </a:solidFill>
-                <a:latin typeface="Courier"/>
-              </a:rPr>
-              <a:t>data.frame</a:t>
-            </a:r>
-            <a:r>
-              <a:rPr>
-                <a:solidFill>
-                  <a:srgbClr val="003B4F"/>
-                </a:solidFill>
-                <a:latin typeface="Courier"/>
-              </a:rPr>
-              <a:t>(</a:t>
-            </a:r>
-            <a:br/>
-            <a:r>
-              <a:rPr>
-                <a:solidFill>
-                  <a:srgbClr val="003B4F"/>
-                </a:solidFill>
-                <a:latin typeface="Courier"/>
-              </a:rPr>
-              <a:t>  </a:t>
-            </a:r>
-            <a:r>
-              <a:rPr>
-                <a:solidFill>
-                  <a:srgbClr val="657422"/>
-                </a:solidFill>
-                <a:latin typeface="Courier"/>
-              </a:rPr>
-              <a:t>location =</a:t>
-            </a:r>
-            <a:r>
-              <a:rPr>
-                <a:solidFill>
-                  <a:srgbClr val="003B4F"/>
-                </a:solidFill>
-                <a:latin typeface="Courier"/>
-              </a:rPr>
-              <a:t> </a:t>
-            </a:r>
-            <a:r>
-              <a:rPr>
-                <a:solidFill>
-                  <a:srgbClr val="4758AB"/>
-                </a:solidFill>
-                <a:latin typeface="Courier"/>
-              </a:rPr>
-              <a:t>paste0</a:t>
-            </a:r>
-            <a:r>
-              <a:rPr>
-                <a:solidFill>
-                  <a:srgbClr val="003B4F"/>
-                </a:solidFill>
-                <a:latin typeface="Courier"/>
-              </a:rPr>
-              <a:t>(</a:t>
-            </a:r>
-            <a:r>
-              <a:rPr>
-                <a:solidFill>
-                  <a:srgbClr val="20794D"/>
-                </a:solidFill>
-                <a:latin typeface="Courier"/>
-              </a:rPr>
-              <a:t>"E"</a:t>
-            </a:r>
-            <a:r>
-              <a:rPr>
-                <a:solidFill>
-                  <a:srgbClr val="003B4F"/>
-                </a:solidFill>
-                <a:latin typeface="Courier"/>
-              </a:rPr>
-              <a:t>, </a:t>
-            </a:r>
-            <a:r>
-              <a:rPr>
-                <a:solidFill>
-                  <a:srgbClr val="AD0000"/>
-                </a:solidFill>
-                <a:latin typeface="Courier"/>
-              </a:rPr>
-              <a:t>1</a:t>
-            </a:r>
-            <a:r>
-              <a:rPr>
-                <a:solidFill>
-                  <a:srgbClr val="5E5E5E"/>
-                </a:solidFill>
-                <a:latin typeface="Courier"/>
-              </a:rPr>
-              <a:t>:</a:t>
-            </a:r>
-            <a:r>
-              <a:rPr>
-                <a:solidFill>
-                  <a:srgbClr val="AD0000"/>
-                </a:solidFill>
-                <a:latin typeface="Courier"/>
-              </a:rPr>
-              <a:t>5</a:t>
-            </a:r>
-            <a:r>
-              <a:rPr>
-                <a:solidFill>
-                  <a:srgbClr val="003B4F"/>
-                </a:solidFill>
-                <a:latin typeface="Courier"/>
-              </a:rPr>
-              <a:t>),</a:t>
-            </a:r>
-            <a:br/>
-            <a:r>
-              <a:rPr>
-                <a:solidFill>
-                  <a:srgbClr val="003B4F"/>
-                </a:solidFill>
-                <a:latin typeface="Courier"/>
-              </a:rPr>
-              <a:t>  </a:t>
-            </a:r>
-            <a:r>
-              <a:rPr>
-                <a:solidFill>
-                  <a:srgbClr val="657422"/>
-                </a:solidFill>
-                <a:latin typeface="Courier"/>
-              </a:rPr>
-              <a:t>sun =</a:t>
-            </a:r>
-            <a:r>
-              <a:rPr>
-                <a:solidFill>
-                  <a:srgbClr val="003B4F"/>
-                </a:solidFill>
-                <a:latin typeface="Courier"/>
-              </a:rPr>
-              <a:t> </a:t>
-            </a:r>
-            <a:r>
-              <a:rPr>
-                <a:solidFill>
-                  <a:srgbClr val="20794D"/>
-                </a:solidFill>
-                <a:latin typeface="Courier"/>
-              </a:rPr>
-              <a:t>"sunny"</a:t>
-            </a:r>
-            <a:r>
-              <a:rPr>
-                <a:solidFill>
-                  <a:srgbClr val="003B4F"/>
-                </a:solidFill>
-                <a:latin typeface="Courier"/>
-              </a:rPr>
-              <a:t>,</a:t>
-            </a:r>
-            <a:br/>
-            <a:r>
-              <a:rPr>
-                <a:solidFill>
-                  <a:srgbClr val="003B4F"/>
-                </a:solidFill>
-                <a:latin typeface="Courier"/>
-              </a:rPr>
-              <a:t>  </a:t>
-            </a:r>
-            <a:r>
-              <a:rPr>
-                <a:solidFill>
-                  <a:srgbClr val="657422"/>
-                </a:solidFill>
-                <a:latin typeface="Courier"/>
-              </a:rPr>
-              <a:t>length_mm =</a:t>
-            </a:r>
-            <a:r>
-              <a:rPr>
-                <a:solidFill>
-                  <a:srgbClr val="003B4F"/>
-                </a:solidFill>
-                <a:latin typeface="Courier"/>
-              </a:rPr>
-              <a:t> </a:t>
-            </a:r>
-            <a:r>
-              <a:rPr>
-                <a:solidFill>
-                  <a:srgbClr val="4758AB"/>
-                </a:solidFill>
-                <a:latin typeface="Courier"/>
-              </a:rPr>
-              <a:t>rnorm</a:t>
-            </a:r>
-            <a:r>
-              <a:rPr>
-                <a:solidFill>
-                  <a:srgbClr val="003B4F"/>
-                </a:solidFill>
-                <a:latin typeface="Courier"/>
-              </a:rPr>
-              <a:t>(</a:t>
-            </a:r>
-            <a:r>
-              <a:rPr>
-                <a:solidFill>
-                  <a:srgbClr val="AD0000"/>
-                </a:solidFill>
-                <a:latin typeface="Courier"/>
-              </a:rPr>
-              <a:t>5</a:t>
-            </a:r>
-            <a:r>
-              <a:rPr>
-                <a:solidFill>
-                  <a:srgbClr val="5E5E5E"/>
-                </a:solidFill>
-                <a:latin typeface="Courier"/>
-              </a:rPr>
-              <a:t>*</a:t>
-            </a:r>
-            <a:r>
-              <a:rPr>
-                <a:solidFill>
-                  <a:srgbClr val="AD0000"/>
-                </a:solidFill>
-                <a:latin typeface="Courier"/>
-              </a:rPr>
-              <a:t>10</a:t>
-            </a:r>
-            <a:r>
-              <a:rPr>
-                <a:solidFill>
-                  <a:srgbClr val="003B4F"/>
-                </a:solidFill>
-                <a:latin typeface="Courier"/>
-              </a:rPr>
-              <a:t>, </a:t>
-            </a:r>
-            <a:r>
-              <a:rPr>
-                <a:solidFill>
-                  <a:srgbClr val="657422"/>
-                </a:solidFill>
-                <a:latin typeface="Courier"/>
-              </a:rPr>
-              <a:t>mean =</a:t>
-            </a:r>
-            <a:r>
-              <a:rPr>
-                <a:solidFill>
-                  <a:srgbClr val="003B4F"/>
-                </a:solidFill>
-                <a:latin typeface="Courier"/>
-              </a:rPr>
-              <a:t> </a:t>
-            </a:r>
-            <a:r>
-              <a:rPr>
-                <a:solidFill>
-                  <a:srgbClr val="AD0000"/>
-                </a:solidFill>
-                <a:latin typeface="Courier"/>
-              </a:rPr>
-              <a:t>75</a:t>
-            </a:r>
-            <a:r>
-              <a:rPr>
-                <a:solidFill>
-                  <a:srgbClr val="003B4F"/>
-                </a:solidFill>
-                <a:latin typeface="Courier"/>
-              </a:rPr>
-              <a:t>, </a:t>
-            </a:r>
-            <a:r>
-              <a:rPr>
-                <a:solidFill>
-                  <a:srgbClr val="657422"/>
-                </a:solidFill>
-                <a:latin typeface="Courier"/>
-              </a:rPr>
-              <a:t>sd =</a:t>
-            </a:r>
-            <a:r>
-              <a:rPr>
-                <a:solidFill>
-                  <a:srgbClr val="003B4F"/>
-                </a:solidFill>
-                <a:latin typeface="Courier"/>
-              </a:rPr>
-              <a:t> </a:t>
-            </a:r>
-            <a:r>
-              <a:rPr>
-                <a:solidFill>
-                  <a:srgbClr val="AD0000"/>
-                </a:solidFill>
-                <a:latin typeface="Courier"/>
-              </a:rPr>
-              <a:t>10</a:t>
-            </a:r>
-            <a:r>
-              <a:rPr>
-                <a:solidFill>
-                  <a:srgbClr val="003B4F"/>
-                </a:solidFill>
-                <a:latin typeface="Courier"/>
-              </a:rPr>
-              <a:t>),</a:t>
-            </a:r>
-            <a:br/>
-            <a:r>
-              <a:rPr>
-                <a:solidFill>
-                  <a:srgbClr val="003B4F"/>
-                </a:solidFill>
-                <a:latin typeface="Courier"/>
-              </a:rPr>
-              <a:t>  </a:t>
-            </a:r>
-            <a:r>
-              <a:rPr>
-                <a:solidFill>
-                  <a:srgbClr val="657422"/>
-                </a:solidFill>
-                <a:latin typeface="Courier"/>
-              </a:rPr>
-              <a:t>tree_id =</a:t>
-            </a:r>
-            <a:r>
-              <a:rPr>
-                <a:solidFill>
-                  <a:srgbClr val="003B4F"/>
-                </a:solidFill>
-                <a:latin typeface="Courier"/>
-              </a:rPr>
-              <a:t> </a:t>
-            </a:r>
-            <a:r>
-              <a:rPr>
-                <a:solidFill>
-                  <a:srgbClr val="4758AB"/>
-                </a:solidFill>
-                <a:latin typeface="Courier"/>
-              </a:rPr>
-              <a:t>rep</a:t>
-            </a:r>
-            <a:r>
-              <a:rPr>
-                <a:solidFill>
-                  <a:srgbClr val="003B4F"/>
-                </a:solidFill>
-                <a:latin typeface="Courier"/>
-              </a:rPr>
-              <a:t>(</a:t>
-            </a:r>
-            <a:r>
-              <a:rPr>
-                <a:solidFill>
-                  <a:srgbClr val="AD0000"/>
-                </a:solidFill>
-                <a:latin typeface="Courier"/>
-              </a:rPr>
-              <a:t>1</a:t>
-            </a:r>
-            <a:r>
-              <a:rPr>
-                <a:solidFill>
-                  <a:srgbClr val="5E5E5E"/>
-                </a:solidFill>
-                <a:latin typeface="Courier"/>
-              </a:rPr>
-              <a:t>:</a:t>
-            </a:r>
-            <a:r>
-              <a:rPr>
-                <a:solidFill>
-                  <a:srgbClr val="AD0000"/>
-                </a:solidFill>
-                <a:latin typeface="Courier"/>
-              </a:rPr>
-              <a:t>5</a:t>
-            </a:r>
-            <a:r>
-              <a:rPr>
-                <a:solidFill>
-                  <a:srgbClr val="003B4F"/>
-                </a:solidFill>
-                <a:latin typeface="Courier"/>
-              </a:rPr>
-              <a:t>, </a:t>
-            </a:r>
-            <a:r>
-              <a:rPr>
-                <a:solidFill>
-                  <a:srgbClr val="657422"/>
-                </a:solidFill>
-                <a:latin typeface="Courier"/>
-              </a:rPr>
-              <a:t>each =</a:t>
-            </a:r>
-            <a:r>
-              <a:rPr>
-                <a:solidFill>
-                  <a:srgbClr val="003B4F"/>
-                </a:solidFill>
-                <a:latin typeface="Courier"/>
-              </a:rPr>
-              <a:t> </a:t>
-            </a:r>
-            <a:r>
-              <a:rPr>
-                <a:solidFill>
-                  <a:srgbClr val="AD0000"/>
-                </a:solidFill>
-                <a:latin typeface="Courier"/>
-              </a:rPr>
-              <a:t>10</a:t>
-            </a:r>
-            <a:r>
-              <a:rPr>
-                <a:solidFill>
-                  <a:srgbClr val="003B4F"/>
-                </a:solidFill>
-                <a:latin typeface="Courier"/>
-              </a:rPr>
-              <a:t>)</a:t>
-            </a:r>
-            <a:br/>
-            <a:r>
-              <a:rPr>
-                <a:solidFill>
-                  <a:srgbClr val="003B4F"/>
-                </a:solidFill>
-                <a:latin typeface="Courier"/>
-              </a:rPr>
-              <a:t>)</a:t>
-            </a:r>
-            <a:br/>
-            <a:br/>
-            <a:r>
-              <a:rPr>
-                <a:solidFill>
-                  <a:srgbClr val="003B4F"/>
-                </a:solidFill>
-                <a:latin typeface="Courier"/>
-              </a:rPr>
-              <a:t>sheltered_locations &lt;- </a:t>
-            </a:r>
-            <a:r>
-              <a:rPr>
-                <a:solidFill>
-                  <a:srgbClr val="4758AB"/>
-                </a:solidFill>
-                <a:latin typeface="Courier"/>
-              </a:rPr>
-              <a:t>data.frame</a:t>
-            </a:r>
-            <a:r>
-              <a:rPr>
-                <a:solidFill>
-                  <a:srgbClr val="003B4F"/>
-                </a:solidFill>
-                <a:latin typeface="Courier"/>
-              </a:rPr>
-              <a:t>(</a:t>
-            </a:r>
-            <a:br/>
-            <a:r>
-              <a:rPr>
-                <a:solidFill>
-                  <a:srgbClr val="003B4F"/>
-                </a:solidFill>
-                <a:latin typeface="Courier"/>
-              </a:rPr>
-              <a:t>  </a:t>
-            </a:r>
-            <a:r>
-              <a:rPr>
-                <a:solidFill>
-                  <a:srgbClr val="657422"/>
-                </a:solidFill>
-                <a:latin typeface="Courier"/>
-              </a:rPr>
-              <a:t>location =</a:t>
-            </a:r>
-            <a:r>
-              <a:rPr>
-                <a:solidFill>
-                  <a:srgbClr val="003B4F"/>
-                </a:solidFill>
-                <a:latin typeface="Courier"/>
-              </a:rPr>
-              <a:t> </a:t>
-            </a:r>
-            <a:r>
-              <a:rPr>
-                <a:solidFill>
-                  <a:srgbClr val="4758AB"/>
-                </a:solidFill>
-                <a:latin typeface="Courier"/>
-              </a:rPr>
-              <a:t>paste0</a:t>
-            </a:r>
-            <a:r>
-              <a:rPr>
-                <a:solidFill>
-                  <a:srgbClr val="003B4F"/>
-                </a:solidFill>
-                <a:latin typeface="Courier"/>
-              </a:rPr>
-              <a:t>(</a:t>
-            </a:r>
-            <a:r>
-              <a:rPr>
-                <a:solidFill>
-                  <a:srgbClr val="20794D"/>
-                </a:solidFill>
-                <a:latin typeface="Courier"/>
-              </a:rPr>
-              <a:t>"S"</a:t>
-            </a:r>
-            <a:r>
-              <a:rPr>
-                <a:solidFill>
-                  <a:srgbClr val="003B4F"/>
-                </a:solidFill>
-                <a:latin typeface="Courier"/>
-              </a:rPr>
-              <a:t>, </a:t>
-            </a:r>
-            <a:r>
-              <a:rPr>
-                <a:solidFill>
-                  <a:srgbClr val="AD0000"/>
-                </a:solidFill>
-                <a:latin typeface="Courier"/>
-              </a:rPr>
-              <a:t>1</a:t>
-            </a:r>
-            <a:r>
-              <a:rPr>
-                <a:solidFill>
-                  <a:srgbClr val="5E5E5E"/>
-                </a:solidFill>
-                <a:latin typeface="Courier"/>
-              </a:rPr>
-              <a:t>:</a:t>
-            </a:r>
-            <a:r>
-              <a:rPr>
-                <a:solidFill>
-                  <a:srgbClr val="AD0000"/>
-                </a:solidFill>
-                <a:latin typeface="Courier"/>
-              </a:rPr>
-              <a:t>5</a:t>
-            </a:r>
-            <a:r>
-              <a:rPr>
-                <a:solidFill>
-                  <a:srgbClr val="003B4F"/>
-                </a:solidFill>
-                <a:latin typeface="Courier"/>
-              </a:rPr>
-              <a:t>),</a:t>
-            </a:r>
-            <a:br/>
-            <a:r>
-              <a:rPr>
-                <a:solidFill>
-                  <a:srgbClr val="003B4F"/>
-                </a:solidFill>
-                <a:latin typeface="Courier"/>
-              </a:rPr>
-              <a:t>  </a:t>
-            </a:r>
-            <a:r>
-              <a:rPr>
-                <a:solidFill>
-                  <a:srgbClr val="657422"/>
-                </a:solidFill>
-                <a:latin typeface="Courier"/>
-              </a:rPr>
-              <a:t>sun =</a:t>
-            </a:r>
-            <a:r>
-              <a:rPr>
-                <a:solidFill>
-                  <a:srgbClr val="003B4F"/>
-                </a:solidFill>
-                <a:latin typeface="Courier"/>
-              </a:rPr>
-              <a:t> </a:t>
-            </a:r>
-            <a:r>
-              <a:rPr>
-                <a:solidFill>
-                  <a:srgbClr val="20794D"/>
-                </a:solidFill>
-                <a:latin typeface="Courier"/>
-              </a:rPr>
-              <a:t>"shady"</a:t>
-            </a:r>
-            <a:r>
-              <a:rPr>
-                <a:solidFill>
-                  <a:srgbClr val="003B4F"/>
-                </a:solidFill>
-                <a:latin typeface="Courier"/>
-              </a:rPr>
-              <a:t>,</a:t>
-            </a:r>
-            <a:br/>
-            <a:r>
-              <a:rPr>
-                <a:solidFill>
-                  <a:srgbClr val="003B4F"/>
-                </a:solidFill>
-                <a:latin typeface="Courier"/>
-              </a:rPr>
-              <a:t>  </a:t>
-            </a:r>
-            <a:r>
-              <a:rPr>
-                <a:solidFill>
-                  <a:srgbClr val="657422"/>
-                </a:solidFill>
-                <a:latin typeface="Courier"/>
-              </a:rPr>
-              <a:t>length_mm =</a:t>
-            </a:r>
-            <a:r>
-              <a:rPr>
-                <a:solidFill>
-                  <a:srgbClr val="003B4F"/>
-                </a:solidFill>
-                <a:latin typeface="Courier"/>
-              </a:rPr>
-              <a:t> </a:t>
-            </a:r>
-            <a:r>
-              <a:rPr>
-                <a:solidFill>
-                  <a:srgbClr val="4758AB"/>
-                </a:solidFill>
-                <a:latin typeface="Courier"/>
-              </a:rPr>
-              <a:t>rnorm</a:t>
-            </a:r>
-            <a:r>
-              <a:rPr>
-                <a:solidFill>
-                  <a:srgbClr val="003B4F"/>
-                </a:solidFill>
-                <a:latin typeface="Courier"/>
-              </a:rPr>
-              <a:t>(</a:t>
-            </a:r>
-            <a:r>
-              <a:rPr>
-                <a:solidFill>
-                  <a:srgbClr val="AD0000"/>
-                </a:solidFill>
-                <a:latin typeface="Courier"/>
-              </a:rPr>
-              <a:t>5</a:t>
-            </a:r>
-            <a:r>
-              <a:rPr>
-                <a:solidFill>
-                  <a:srgbClr val="5E5E5E"/>
-                </a:solidFill>
-                <a:latin typeface="Courier"/>
-              </a:rPr>
-              <a:t>*</a:t>
-            </a:r>
-            <a:r>
-              <a:rPr>
-                <a:solidFill>
-                  <a:srgbClr val="AD0000"/>
-                </a:solidFill>
-                <a:latin typeface="Courier"/>
-              </a:rPr>
-              <a:t>10</a:t>
-            </a:r>
-            <a:r>
-              <a:rPr>
-                <a:solidFill>
-                  <a:srgbClr val="003B4F"/>
-                </a:solidFill>
-                <a:latin typeface="Courier"/>
-              </a:rPr>
-              <a:t>, </a:t>
-            </a:r>
-            <a:r>
-              <a:rPr>
-                <a:solidFill>
-                  <a:srgbClr val="657422"/>
-                </a:solidFill>
-                <a:latin typeface="Courier"/>
-              </a:rPr>
-              <a:t>mean =</a:t>
-            </a:r>
-            <a:r>
-              <a:rPr>
-                <a:solidFill>
-                  <a:srgbClr val="003B4F"/>
-                </a:solidFill>
-                <a:latin typeface="Courier"/>
-              </a:rPr>
-              <a:t> </a:t>
-            </a:r>
-            <a:r>
-              <a:rPr>
-                <a:solidFill>
-                  <a:srgbClr val="AD0000"/>
-                </a:solidFill>
-                <a:latin typeface="Courier"/>
-              </a:rPr>
-              <a:t>90</a:t>
-            </a:r>
-            <a:r>
-              <a:rPr>
-                <a:solidFill>
-                  <a:srgbClr val="003B4F"/>
-                </a:solidFill>
-                <a:latin typeface="Courier"/>
-              </a:rPr>
-              <a:t>, </a:t>
-            </a:r>
-            <a:r>
-              <a:rPr>
-                <a:solidFill>
-                  <a:srgbClr val="657422"/>
-                </a:solidFill>
-                <a:latin typeface="Courier"/>
-              </a:rPr>
-              <a:t>sd =</a:t>
-            </a:r>
-            <a:r>
-              <a:rPr>
-                <a:solidFill>
-                  <a:srgbClr val="003B4F"/>
-                </a:solidFill>
-                <a:latin typeface="Courier"/>
-              </a:rPr>
-              <a:t> </a:t>
-            </a:r>
-            <a:r>
-              <a:rPr>
-                <a:solidFill>
-                  <a:srgbClr val="AD0000"/>
-                </a:solidFill>
-                <a:latin typeface="Courier"/>
-              </a:rPr>
-              <a:t>12</a:t>
-            </a:r>
-            <a:r>
-              <a:rPr>
-                <a:solidFill>
-                  <a:srgbClr val="003B4F"/>
-                </a:solidFill>
-                <a:latin typeface="Courier"/>
-              </a:rPr>
-              <a:t>),</a:t>
-            </a:r>
-            <a:br/>
-            <a:r>
-              <a:rPr>
-                <a:solidFill>
-                  <a:srgbClr val="003B4F"/>
-                </a:solidFill>
-                <a:latin typeface="Courier"/>
-              </a:rPr>
-              <a:t>  </a:t>
-            </a:r>
-            <a:r>
-              <a:rPr>
-                <a:solidFill>
-                  <a:srgbClr val="657422"/>
-                </a:solidFill>
-                <a:latin typeface="Courier"/>
-              </a:rPr>
-              <a:t>tree_id =</a:t>
-            </a:r>
-            <a:r>
-              <a:rPr>
-                <a:solidFill>
-                  <a:srgbClr val="003B4F"/>
-                </a:solidFill>
-                <a:latin typeface="Courier"/>
-              </a:rPr>
-              <a:t> </a:t>
-            </a:r>
-            <a:r>
-              <a:rPr>
-                <a:solidFill>
-                  <a:srgbClr val="4758AB"/>
-                </a:solidFill>
-                <a:latin typeface="Courier"/>
-              </a:rPr>
-              <a:t>rep</a:t>
-            </a:r>
-            <a:r>
-              <a:rPr>
-                <a:solidFill>
-                  <a:srgbClr val="003B4F"/>
-                </a:solidFill>
-                <a:latin typeface="Courier"/>
-              </a:rPr>
-              <a:t>(</a:t>
-            </a:r>
-            <a:r>
-              <a:rPr>
-                <a:solidFill>
-                  <a:srgbClr val="AD0000"/>
-                </a:solidFill>
-                <a:latin typeface="Courier"/>
-              </a:rPr>
-              <a:t>6</a:t>
-            </a:r>
-            <a:r>
-              <a:rPr>
-                <a:solidFill>
-                  <a:srgbClr val="5E5E5E"/>
-                </a:solidFill>
-                <a:latin typeface="Courier"/>
-              </a:rPr>
-              <a:t>:</a:t>
-            </a:r>
-            <a:r>
-              <a:rPr>
-                <a:solidFill>
-                  <a:srgbClr val="AD0000"/>
-                </a:solidFill>
-                <a:latin typeface="Courier"/>
-              </a:rPr>
-              <a:t>10</a:t>
-            </a:r>
-            <a:r>
-              <a:rPr>
-                <a:solidFill>
-                  <a:srgbClr val="003B4F"/>
-                </a:solidFill>
-                <a:latin typeface="Courier"/>
-              </a:rPr>
-              <a:t>, </a:t>
-            </a:r>
-            <a:r>
-              <a:rPr>
-                <a:solidFill>
-                  <a:srgbClr val="657422"/>
-                </a:solidFill>
-                <a:latin typeface="Courier"/>
-              </a:rPr>
-              <a:t>each =</a:t>
-            </a:r>
-            <a:r>
-              <a:rPr>
-                <a:solidFill>
-                  <a:srgbClr val="003B4F"/>
-                </a:solidFill>
-                <a:latin typeface="Courier"/>
-              </a:rPr>
-              <a:t> </a:t>
-            </a:r>
-            <a:r>
-              <a:rPr>
-                <a:solidFill>
-                  <a:srgbClr val="AD0000"/>
-                </a:solidFill>
-                <a:latin typeface="Courier"/>
-              </a:rPr>
-              <a:t>10</a:t>
-            </a:r>
-            <a:r>
-              <a:rPr>
-                <a:solidFill>
-                  <a:srgbClr val="003B4F"/>
-                </a:solidFill>
-                <a:latin typeface="Courier"/>
-              </a:rPr>
-              <a:t>)</a:t>
-            </a:r>
-            <a:br/>
-            <a:r>
-              <a:rPr>
-                <a:solidFill>
-                  <a:srgbClr val="003B4F"/>
-                </a:solidFill>
-                <a:latin typeface="Courier"/>
-              </a:rPr>
-              <a:t>)</a:t>
-            </a:r>
-            <a:br/>
-            <a:br/>
-            <a:r>
-              <a:rPr>
-                <a:solidFill>
-                  <a:srgbClr val="003B4F"/>
-                </a:solidFill>
-                <a:latin typeface="Courier"/>
-              </a:rPr>
-              <a:t>fake_pine_data &lt;- </a:t>
-            </a:r>
-            <a:r>
-              <a:rPr>
-                <a:solidFill>
-                  <a:srgbClr val="4758AB"/>
-                </a:solidFill>
-                <a:latin typeface="Courier"/>
-              </a:rPr>
-              <a:t>rbind</a:t>
-            </a:r>
-            <a:r>
-              <a:rPr>
-                <a:solidFill>
-                  <a:srgbClr val="003B4F"/>
-                </a:solidFill>
-                <a:latin typeface="Courier"/>
-              </a:rPr>
-              <a:t>(exposed_locations, sheltered_locations)</a:t>
-            </a:r>
-            <a:br/>
-            <a:br/>
-            <a:r>
-              <a:rPr>
-                <a:solidFill>
-                  <a:srgbClr val="5E5E5E"/>
-                </a:solidFill>
-                <a:latin typeface="Courier"/>
-              </a:rPr>
-              <a:t># View the data</a:t>
-            </a:r>
-            <a:br/>
-            <a:r>
-              <a:rPr>
-                <a:solidFill>
-                  <a:srgbClr val="003B4F"/>
-                </a:solidFill>
-                <a:latin typeface="Courier"/>
-              </a:rPr>
-              <a:t>fake_pine_data </a:t>
-            </a:r>
-            <a:r>
-              <a:rPr>
-                <a:solidFill>
-                  <a:srgbClr val="5E5E5E"/>
-                </a:solidFill>
-                <a:latin typeface="Courier"/>
-              </a:rPr>
-              <a:t>%&gt;%</a:t>
-            </a:r>
-            <a:r>
-              <a:rPr>
-                <a:solidFill>
-                  <a:srgbClr val="003B4F"/>
-                </a:solidFill>
-                <a:latin typeface="Courier"/>
-              </a:rPr>
-              <a:t> </a:t>
-            </a:r>
-            <a:r>
-              <a:rPr>
-                <a:solidFill>
-                  <a:srgbClr val="4758AB"/>
-                </a:solidFill>
-                <a:latin typeface="Courier"/>
-              </a:rPr>
-              <a:t>ggplot</a:t>
-            </a:r>
-            <a:r>
-              <a:rPr>
-                <a:solidFill>
-                  <a:srgbClr val="003B4F"/>
-                </a:solidFill>
-                <a:latin typeface="Courier"/>
-              </a:rPr>
-              <a:t>(</a:t>
-            </a:r>
-            <a:r>
-              <a:rPr>
-                <a:solidFill>
-                  <a:srgbClr val="4758AB"/>
-                </a:solidFill>
-                <a:latin typeface="Courier"/>
-              </a:rPr>
-              <a:t>aes</a:t>
-            </a:r>
-            <a:r>
-              <a:rPr>
-                <a:solidFill>
-                  <a:srgbClr val="003B4F"/>
-                </a:solidFill>
-                <a:latin typeface="Courier"/>
-              </a:rPr>
-              <a:t>(sun, length_mm, </a:t>
-            </a:r>
-            <a:r>
-              <a:rPr>
-                <a:solidFill>
-                  <a:srgbClr val="657422"/>
-                </a:solidFill>
-                <a:latin typeface="Courier"/>
-              </a:rPr>
-              <a:t>color =</a:t>
-            </a:r>
-            <a:r>
-              <a:rPr>
-                <a:solidFill>
-                  <a:srgbClr val="003B4F"/>
-                </a:solidFill>
-                <a:latin typeface="Courier"/>
-              </a:rPr>
-              <a:t> sun)) </a:t>
-            </a:r>
-            <a:r>
-              <a:rPr>
-                <a:solidFill>
-                  <a:srgbClr val="5E5E5E"/>
-                </a:solidFill>
-                <a:latin typeface="Courier"/>
-              </a:rPr>
-              <a:t>+</a:t>
-            </a:r>
-            <a:r>
-              <a:rPr>
-                <a:solidFill>
-                  <a:srgbClr val="003B4F"/>
-                </a:solidFill>
-                <a:latin typeface="Courier"/>
-              </a:rPr>
-              <a:t> </a:t>
-            </a:r>
-            <a:r>
-              <a:rPr>
-                <a:solidFill>
-                  <a:srgbClr val="4758AB"/>
-                </a:solidFill>
-                <a:latin typeface="Courier"/>
-              </a:rPr>
-              <a:t>geom_boxplot</a:t>
-            </a:r>
-            <a:r>
-              <a:rPr>
-                <a:solidFill>
-                  <a:srgbClr val="003B4F"/>
-                </a:solidFill>
-                <a:latin typeface="Courier"/>
-              </a:rPr>
-              <a:t>()</a:t>
-            </a:r>
-          </a:p>
-          <a:p>
-            <a:pPr lvl="0" indent="0" marL="1270000">
-              <a:buNone/>
-            </a:pPr>
-          </a:p>
-          <a:p>
-            <a:pPr lvl="0" indent="0" marL="1270000">
-              <a:buNone/>
-            </a:pPr>
-            <a:r>
-              <a:rPr sz="2000"/>
-              <a:t>In small groups, discuss:</a:t>
-            </a:r>
-          </a:p>
-          <a:p>
-            <a:pPr lvl="0" indent="-342900" marL="342900">
-              <a:buAutoNum type="arabicPeriod"/>
-            </a:pPr>
-            <a:r>
-              <a:rPr sz="2000"/>
-              <a:t>What confounding variables might affect this natural experiment?</a:t>
-            </a:r>
-          </a:p>
-          <a:p>
-            <a:pPr lvl="0" indent="-342900" marL="342900">
-              <a:buAutoNum type="arabicPeriod"/>
-            </a:pPr>
-            <a:r>
-              <a:rPr sz="2000"/>
-              <a:t>How would you design a study to reduce these confounding effects?</a:t>
-            </a:r>
-          </a:p>
-          <a:p>
-            <a:pPr lvl="0" indent="-342900" marL="342900">
-              <a:buAutoNum type="arabicPeriod"/>
-            </a:pPr>
-            <a:r>
-              <a:rPr sz="2000"/>
-              <a:t>What data would you collect besides needle length?</a:t>
-            </a:r>
-          </a:p>
-        </p:txBody>
-      </p:sp>
-    </p:spTree>
-  </p:cSld>
-</p:sld>
-</file>
-
-<file path=ppt/slides/slide11.xml><?xml version="1.0" encoding="utf-8"?>
-<p:sld xmlns:a="http://schemas.openxmlformats.org/drawingml/2006/main" xmlns:r="http://schemas.openxmlformats.org/officeDocument/2006/relationships" xmlns:p="http://schemas.openxmlformats.org/presentationml/2006/main">
-  <p:cSld>
-    <p:spTree>
-      <p:nvGrpSpPr>
-        <p:cNvPr id="1" name=""/>
-        <p:cNvGrpSpPr/>
-        <p:nvPr/>
-      </p:nvGrpSpPr>
-      <p:grpSpPr>
-        <a:xfrm>
-          <a:off x="0" y="0"/>
-          <a:ext cx="0" cy="0"/>
-          <a:chOff x="0" y="0"/>
-          <a:chExt cx="0" cy="0"/>
-        </a:xfrm>
-      </p:grpSpPr>
-      <p:sp>
-        <p:nvSpPr>
-          <p:cNvPr id="2" name="Title 1"/>
-          <p:cNvSpPr>
-            <a:spLocks noGrp="1"/>
-          </p:cNvSpPr>
-          <p:nvPr>
-            <p:ph type="title"/>
-          </p:nvPr>
-        </p:nvSpPr>
-        <p:spPr>
-          <a:xfrm>
-            <a:off x="0" y="0"/>
             <a:ext cx="9144000" cy="602780"/>
           </a:xfrm>
           <a:solidFill>
@@ -4741,7 +3528,7 @@
 </p:sld>
 </file>
 
-<file path=ppt/slides/slide12.xml><?xml version="1.0" encoding="utf-8"?>
+<file path=ppt/slides/slide11.xml><?xml version="1.0" encoding="utf-8"?>
 <p:sld xmlns:a="http://schemas.openxmlformats.org/drawingml/2006/main" xmlns:r="http://schemas.openxmlformats.org/officeDocument/2006/relationships" xmlns:p="http://schemas.openxmlformats.org/presentationml/2006/main">
   <p:cSld>
     <p:spTree>
@@ -4899,7 +3686,7 @@
 </p:sld>
 </file>
 
-<file path=ppt/slides/slide13.xml><?xml version="1.0" encoding="utf-8"?>
+<file path=ppt/slides/slide12.xml><?xml version="1.0" encoding="utf-8"?>
 <p:sld xmlns:a="http://schemas.openxmlformats.org/drawingml/2006/main" xmlns:r="http://schemas.openxmlformats.org/officeDocument/2006/relationships" xmlns:p="http://schemas.openxmlformats.org/presentationml/2006/main">
   <p:cSld>
     <p:spTree>
@@ -5057,7 +3844,7 @@
 </p:sld>
 </file>
 
-<file path=ppt/slides/slide14.xml><?xml version="1.0" encoding="utf-8"?>
+<file path=ppt/slides/slide13.xml><?xml version="1.0" encoding="utf-8"?>
 <p:sld xmlns:a="http://schemas.openxmlformats.org/drawingml/2006/main" xmlns:r="http://schemas.openxmlformats.org/officeDocument/2006/relationships" xmlns:p="http://schemas.openxmlformats.org/presentationml/2006/main">
   <p:cSld>
     <p:spTree>
@@ -5241,6 +4028,132 @@
 </p:sld>
 </file>
 
+<file path=ppt/slides/slide14.xml><?xml version="1.0" encoding="utf-8"?>
+<p:sld xmlns:a="http://schemas.openxmlformats.org/drawingml/2006/main" xmlns:r="http://schemas.openxmlformats.org/officeDocument/2006/relationships" xmlns:p="http://schemas.openxmlformats.org/presentationml/2006/main">
+  <p:cSld>
+    <p:spTree>
+      <p:nvGrpSpPr>
+        <p:cNvPr id="1" name=""/>
+        <p:cNvGrpSpPr/>
+        <p:nvPr/>
+      </p:nvGrpSpPr>
+      <p:grpSpPr>
+        <a:xfrm>
+          <a:off x="0" y="0"/>
+          <a:ext cx="0" cy="0"/>
+          <a:chOff x="0" y="0"/>
+          <a:chExt cx="0" cy="0"/>
+        </a:xfrm>
+      </p:grpSpPr>
+      <p:sp>
+        <p:nvSpPr>
+          <p:cNvPr id="2" name="Title 1"/>
+          <p:cNvSpPr>
+            <a:spLocks noGrp="1"/>
+          </p:cNvSpPr>
+          <p:nvPr>
+            <p:ph type="title"/>
+          </p:nvPr>
+        </p:nvSpPr>
+        <p:spPr>
+          <a:xfrm>
+            <a:off x="0" y="0"/>
+            <a:ext cx="9144000" cy="582780"/>
+          </a:xfrm>
+        </p:spPr>
+        <p:txBody>
+          <a:bodyPr/>
+          <a:lstStyle/>
+          <a:p>
+            <a:pPr lvl="0" indent="0" marL="0">
+              <a:buNone/>
+            </a:pPr>
+            <a:r>
+              <a:rPr/>
+              <a:t>Consequences of Pseudoreplication</a:t>
+            </a:r>
+          </a:p>
+        </p:txBody>
+      </p:sp>
+      <p:sp>
+        <p:nvSpPr>
+          <p:cNvPr id="3" name="Content Placeholder 2"/>
+          <p:cNvSpPr>
+            <a:spLocks noGrp="1"/>
+          </p:cNvSpPr>
+          <p:nvPr>
+            <p:ph idx="1"/>
+          </p:nvPr>
+        </p:nvSpPr>
+        <p:spPr/>
+        <p:txBody>
+          <a:bodyPr/>
+          <a:lstStyle/>
+          <a:p>
+            <a:pPr lvl="0" indent="0" marL="0">
+              <a:buNone/>
+            </a:pPr>
+            <a:r>
+              <a:rPr/>
+              <a:t>When you pseudoreplicate, you:</a:t>
+            </a:r>
+          </a:p>
+          <a:p>
+            <a:pPr lvl="0"/>
+            <a:r>
+              <a:rPr/>
+              <a:t>Underestimate variability</a:t>
+            </a:r>
+          </a:p>
+          <a:p>
+            <a:pPr lvl="0"/>
+            <a:r>
+              <a:rPr/>
+              <a:t>Increase type I error rate</a:t>
+            </a:r>
+          </a:p>
+          <a:p>
+            <a:pPr lvl="0" indent="0" marL="0">
+              <a:buNone/>
+            </a:pPr>
+            <a:r>
+              <a:rPr/>
+              <a:t>Replicates must be on scale appropriate to population (&amp; hypothesis!) of interest:</a:t>
+            </a:r>
+          </a:p>
+          <a:p>
+            <a:pPr lvl="0"/>
+            <a:r>
+              <a:rPr/>
+              <a:t>Different burnt/unburnt forest areas</a:t>
+            </a:r>
+          </a:p>
+          <a:p>
+            <a:pPr lvl="0"/>
+            <a:r>
+              <a:rPr/>
+              <a:t>Different aquaria</a:t>
+            </a:r>
+          </a:p>
+          <a:p>
+            <a:pPr lvl="0"/>
+            <a:r>
+              <a:rPr/>
+              <a:t>Different plants and streams</a:t>
+            </a:r>
+          </a:p>
+          <a:p>
+            <a:pPr lvl="0" indent="0" marL="0">
+              <a:buNone/>
+            </a:pPr>
+          </a:p>
+        </p:txBody>
+      </p:sp>
+    </p:spTree>
+  </p:cSld>
+</p:sld>
+</file>
+
 <file path=ppt/slides/slide15.xml><?xml version="1.0" encoding="utf-8"?>
 <p:sld xmlns:a="http://schemas.openxmlformats.org/drawingml/2006/main" xmlns:r="http://schemas.openxmlformats.org/officeDocument/2006/relationships" xmlns:p="http://schemas.openxmlformats.org/presentationml/2006/main">
   <p:cSld>
@@ -5283,7 +4196,7 @@
             </a:pPr>
             <a:r>
               <a:rPr/>
-              <a:t>Consequences of Pseudoreplication</a:t>
+              <a:t>When Replication is Difficult</a:t>
             </a:r>
           </a:p>
         </p:txBody>
@@ -5304,25 +4217,14 @@
           <a:lstStyle/>
           <a:p>
             <a:pPr lvl="0" indent="0" marL="0">
-              <a:buNone/>
-            </a:pPr>
-            <a:r>
-              <a:rPr/>
-              <a:t>When you pseudoreplicate, you:</a:t>
-            </a:r>
-          </a:p>
-          <a:p>
-            <a:pPr lvl="0"/>
-            <a:r>
-              <a:rPr/>
-              <a:t>Underestimate variability</a:t>
-            </a:r>
-          </a:p>
-          <a:p>
-            <a:pPr lvl="0"/>
-            <a:r>
-              <a:rPr/>
-              <a:t>Increase type I error rate</a:t>
+              <a:spcBef>
+                <a:spcPts val="3000"/>
+              </a:spcBef>
+              <a:buNone/>
+            </a:pPr>
+            <a:r>
+              <a:rPr b="1"/>
+              <a:t>What if replication is impossible/difficult/expensive?</a:t>
             </a:r>
           </a:p>
           <a:p>
@@ -5330,29 +4232,49 @@
               <a:buNone/>
             </a:pPr>
             <a:r>
-              <a:rPr/>
-              <a:t>Replicates must be on scale appropriate to population (&amp; hypothesis!) of interest:</a:t>
-            </a:r>
-          </a:p>
-          <a:p>
-            <a:pPr lvl="0"/>
-            <a:r>
-              <a:rPr/>
-              <a:t>Different burnt/unburnt forest areas</a:t>
-            </a:r>
-          </a:p>
-          <a:p>
-            <a:pPr lvl="0"/>
-            <a:r>
-              <a:rPr/>
-              <a:t>Different aquaria</a:t>
-            </a:r>
-          </a:p>
-          <a:p>
-            <a:pPr lvl="0"/>
-            <a:r>
-              <a:rPr/>
-              <a:t>Different plants and streams</a:t>
+              <a:rPr b="1"/>
+              <a:t>Example:</a:t>
+            </a:r>
+            <a:r>
+              <a:rPr/>
+              <a:t> Effect of temperature on phytoplankton growth</a:t>
+            </a:r>
+          </a:p>
+          <a:p>
+            <a:pPr lvl="0"/>
+            <a:r>
+              <a:rPr/>
+              <a:t>4 chambers (5, 10, 15, 20°C), 10 beakers in each</a:t>
+            </a:r>
+          </a:p>
+          <a:p>
+            <a:pPr lvl="0"/>
+            <a:r>
+              <a:rPr/>
+              <a:t>Are beakers true replicates?</a:t>
+            </a:r>
+          </a:p>
+          <a:p>
+            <a:pPr lvl="0" indent="0" marL="0">
+              <a:buNone/>
+            </a:pPr>
+            <a:r>
+              <a:rPr/>
+              <a:t>Possible solutions:</a:t>
+            </a:r>
+          </a:p>
+          <a:p>
+            <a:pPr lvl="0"/>
+            <a:r>
+              <a:rPr/>
+              <a:t>Rerun the experiment a few times, changing temperature of chambers - block by time</a:t>
+            </a:r>
+          </a:p>
+          <a:p>
+            <a:pPr lvl="0"/>
+            <a:r>
+              <a:rPr/>
+              <a:t>Try to account for all possible differences between chambers (light levels, humidity, contamination) - block by chamber</a:t>
             </a:r>
           </a:p>
           <a:p>
@@ -5397,8 +4319,11 @@
         <p:spPr>
           <a:xfrm>
             <a:off x="0" y="0"/>
-            <a:ext cx="9144000" cy="582780"/>
+            <a:ext cx="9144000" cy="602780"/>
           </a:xfrm>
+          <a:solidFill>
+            <a:srgbClr val="70121D"/>
+          </a:solidFill>
         </p:spPr>
         <p:txBody>
           <a:bodyPr/>
@@ -5409,7 +4334,7 @@
             </a:pPr>
             <a:r>
               <a:rPr/>
-              <a:t>When Replication is Difficult</a:t>
+              <a:t>Controls or reference?</a:t>
             </a:r>
           </a:p>
         </p:txBody>
@@ -5421,7 +4346,7 @@
             <a:spLocks noGrp="1"/>
           </p:cNvSpPr>
           <p:nvPr>
-            <p:ph idx="1"/>
+            <p:ph idx="1" sz="half"/>
           </p:nvPr>
         </p:nvSpPr>
         <p:spPr/>
@@ -5437,7 +4362,7 @@
             </a:pPr>
             <a:r>
               <a:rPr b="1"/>
-              <a:t>What if replication is impossible/difficult/expensive?</a:t>
+              <a:t>Key question: Is response due to manipulation/hypothesized mechanism or external factor?</a:t>
             </a:r>
           </a:p>
           <a:p>
@@ -5445,58 +4370,86 @@
               <a:buNone/>
             </a:pPr>
             <a:r>
+              <a:rPr/>
+              <a:t>Controls help address this question:</a:t>
+            </a:r>
+          </a:p>
+          <a:p>
+            <a:pPr lvl="0"/>
+            <a:r>
+              <a:rPr/>
+              <a:t>Experimental units treated exactly as the manipulated units, except no manipulation under investigation</a:t>
+            </a:r>
+          </a:p>
+          <a:p>
+            <a:pPr lvl="0"/>
+            <a:r>
+              <a:rPr/>
+              <a:t>Can be tricky to implement; requires careful thought</a:t>
+            </a:r>
+          </a:p>
+          <a:p>
+            <a:pPr lvl="0" indent="0" marL="0">
+              <a:buNone/>
+            </a:pPr>
+            <a:r>
               <a:rPr b="1"/>
-              <a:t>Example:</a:t>
-            </a:r>
-            <a:r>
-              <a:rPr/>
-              <a:t> Effect of temperature on phytoplankton growth</a:t>
-            </a:r>
-          </a:p>
-          <a:p>
-            <a:pPr lvl="0"/>
-            <a:r>
-              <a:rPr/>
-              <a:t>4 chambers (5, 10, 15, 20°C), 10 beakers in each</a:t>
-            </a:r>
-          </a:p>
-          <a:p>
-            <a:pPr lvl="0"/>
-            <a:r>
-              <a:rPr/>
-              <a:t>Are beakers true replicates?</a:t>
-            </a:r>
-          </a:p>
-          <a:p>
-            <a:pPr lvl="0" indent="0" marL="0">
-              <a:buNone/>
-            </a:pPr>
-            <a:r>
-              <a:rPr/>
-              <a:t>Possible solutions:</a:t>
-            </a:r>
-          </a:p>
-          <a:p>
-            <a:pPr lvl="0"/>
-            <a:r>
-              <a:rPr/>
-              <a:t>Rerun the experiment a few times, changing temperature of chambers - block by time</a:t>
-            </a:r>
-          </a:p>
-          <a:p>
-            <a:pPr lvl="0"/>
-            <a:r>
-              <a:rPr/>
-              <a:t>Try to account for all possible differences between chambers (light levels, humidity, contamination) - block by chamber</a:t>
-            </a:r>
-          </a:p>
-          <a:p>
-            <a:pPr lvl="0" indent="0" marL="0">
-              <a:buNone/>
-            </a:pPr>
-          </a:p>
-        </p:txBody>
-      </p:sp>
+              <a:t>Examples:</a:t>
+            </a:r>
+          </a:p>
+          <a:p>
+            <a:pPr lvl="0"/>
+            <a:r>
+              <a:rPr/>
+              <a:t>In toxicology, controls and treatment groups must both be injected, but control does not receive the substance under study</a:t>
+            </a:r>
+          </a:p>
+          <a:p>
+            <a:pPr lvl="0"/>
+            <a:r>
+              <a:rPr/>
+              <a:t>Predator exclosures often produce “cage effects”</a:t>
+            </a:r>
+          </a:p>
+          <a:p>
+            <a:pPr lvl="0"/>
+            <a:r>
+              <a:rPr/>
+              <a:t>need two controls: a grazer/predator control and a “cage control”</a:t>
+            </a:r>
+          </a:p>
+        </p:txBody>
+      </p:sp>
+      <p:pic>
+        <p:nvPicPr>
+          <p:cNvPr descr="images/clipboard-3685049769.png" id="0" name="Picture 1"/>
+          <p:cNvPicPr>
+            <a:picLocks noGrp="1" noChangeAspect="1"/>
+          </p:cNvPicPr>
+          <p:nvPr/>
+        </p:nvPicPr>
+        <p:blipFill>
+          <a:blip r:embed="rId2"/>
+          <a:stretch>
+            <a:fillRect/>
+          </a:stretch>
+        </p:blipFill>
+        <p:spPr bwMode="auto">
+          <a:xfrm>
+            <a:off x="6121400" y="1739900"/>
+            <a:ext cx="2781300" cy="2311400"/>
+          </a:xfrm>
+          <a:prstGeom prst="rect">
+            <a:avLst/>
+          </a:prstGeom>
+          <a:noFill/>
+          <a:ln w="9525">
+            <a:noFill/>
+            <a:headEnd/>
+            <a:tailEnd/>
+          </a:ln>
+        </p:spPr>
+      </p:pic>
     </p:spTree>
   </p:cSld>
 </p:sld>
@@ -5532,11 +4485,8 @@
         <p:spPr>
           <a:xfrm>
             <a:off x="0" y="0"/>
-            <a:ext cx="9144000" cy="602780"/>
+            <a:ext cx="9144000" cy="582780"/>
           </a:xfrm>
-          <a:solidFill>
-            <a:srgbClr val="70121D"/>
-          </a:solidFill>
         </p:spPr>
         <p:txBody>
           <a:bodyPr/>
@@ -5547,7 +4497,7 @@
             </a:pPr>
             <a:r>
               <a:rPr/>
-              <a:t>Randomization</a:t>
+              <a:t>Activity 4: Designing Controls</a:t>
             </a:r>
           </a:p>
         </p:txBody>
@@ -5559,7 +4509,7 @@
             <a:spLocks noGrp="1"/>
           </p:cNvSpPr>
           <p:nvPr>
-            <p:ph idx="1" sz="half"/>
+            <p:ph idx="1"/>
           </p:nvPr>
         </p:nvSpPr>
         <p:spPr/>
@@ -5567,83 +4517,82 @@
           <a:bodyPr/>
           <a:lstStyle/>
           <a:p>
-            <a:pPr lvl="0" indent="0" marL="0">
-              <a:buNone/>
-            </a:pPr>
-            <a:r>
-              <a:rPr/>
-              <a:t>Randomization helps deconfound “lurking” variables:</a:t>
-            </a:r>
-          </a:p>
-          <a:p>
-            <a:pPr lvl="0"/>
-            <a:r>
-              <a:rPr/>
-              <a:t>Attempts to equalize effects of confounders</a:t>
-            </a:r>
-          </a:p>
-          <a:p>
-            <a:pPr lvl="0" indent="0" marL="0">
-              <a:buNone/>
-            </a:pPr>
-            <a:r>
-              <a:rPr b="1"/>
-              <a:t>Random sampling from population:</a:t>
-            </a:r>
-          </a:p>
-          <a:p>
-            <a:pPr lvl="0"/>
-            <a:r>
-              <a:rPr/>
-              <a:t>Experimental units should represent random sample from population of interest</a:t>
-            </a:r>
-          </a:p>
-          <a:p>
-            <a:pPr lvl="0"/>
-            <a:r>
-              <a:rPr/>
-              <a:t>Ensures unbiased population estimates and inference</a:t>
-            </a:r>
-          </a:p>
-          <a:p>
-            <a:pPr lvl="0"/>
-            <a:r>
-              <a:rPr/>
-              <a:t>E.g., animals in experiment are random subset of all animals that could have been used</a:t>
-            </a:r>
-          </a:p>
-        </p:txBody>
-      </p:sp>
-      <p:pic>
-        <p:nvPicPr>
-          <p:cNvPr descr="images/clipboard-425378447.png" id="0" name="Picture 1"/>
-          <p:cNvPicPr>
-            <a:picLocks noGrp="1" noChangeAspect="1"/>
-          </p:cNvPicPr>
-          <p:nvPr/>
-        </p:nvPicPr>
-        <p:blipFill>
-          <a:blip r:embed="rId2"/>
-          <a:stretch>
-            <a:fillRect/>
-          </a:stretch>
-        </p:blipFill>
-        <p:spPr bwMode="auto">
-          <a:xfrm>
-            <a:off x="6121400" y="2019300"/>
-            <a:ext cx="2781300" cy="1752600"/>
-          </a:xfrm>
-          <a:prstGeom prst="rect">
-            <a:avLst/>
-          </a:prstGeom>
-          <a:noFill/>
-          <a:ln w="9525">
-            <a:noFill/>
-            <a:headEnd/>
-            <a:tailEnd/>
-          </a:ln>
-        </p:spPr>
-      </p:pic>
+            <a:pPr lvl="0" indent="0" marL="1270000">
+              <a:buNone/>
+            </a:pPr>
+            <a:r>
+              <a:rPr sz="2000" b="1"/>
+              <a:t>Activity 4: Designing Controls for Pine Experiments</a:t>
+            </a:r>
+          </a:p>
+          <a:p>
+            <a:pPr lvl="0" indent="0" marL="1270000">
+              <a:buNone/>
+            </a:pPr>
+            <a:r>
+              <a:rPr sz="2000"/>
+              <a:t>Work in small groups to design appropriate controls for each experiment:</a:t>
+            </a:r>
+          </a:p>
+          <a:p>
+            <a:pPr lvl="0" indent="-342900" marL="342900">
+              <a:buAutoNum type="arabicPeriod"/>
+            </a:pPr>
+            <a:r>
+              <a:rPr sz="2000"/>
+              <a:t>Testing whether pine needle length is affected by a particular fertilizer</a:t>
+            </a:r>
+          </a:p>
+          <a:p>
+            <a:pPr lvl="0" indent="-342900" marL="342900">
+              <a:buAutoNum type="arabicPeriod"/>
+            </a:pPr>
+            <a:r>
+              <a:rPr sz="2000"/>
+              <a:t>Testing whether pine needle density affects water retention during drought using enclosed branches</a:t>
+            </a:r>
+          </a:p>
+          <a:p>
+            <a:pPr lvl="0" indent="-342900" marL="342900">
+              <a:buAutoNum type="arabicPeriod"/>
+            </a:pPr>
+            <a:r>
+              <a:rPr sz="2000"/>
+              <a:t>Testing whether sunlight exposure affects pine seedling growth using shade cloth</a:t>
+            </a:r>
+          </a:p>
+          <a:p>
+            <a:pPr lvl="0" indent="0" marL="1270000">
+              <a:buNone/>
+            </a:pPr>
+            <a:r>
+              <a:rPr sz="2000"/>
+              <a:t>For each experiment, identify:</a:t>
+            </a:r>
+          </a:p>
+          <a:p>
+            <a:pPr lvl="0"/>
+            <a:r>
+              <a:rPr sz="2000"/>
+              <a:t>What would be appropriate controls?</a:t>
+            </a:r>
+          </a:p>
+          <a:p>
+            <a:pPr lvl="0"/>
+            <a:r>
+              <a:rPr sz="2000"/>
+              <a:t>What factors need to be controlled besides the main variable?</a:t>
+            </a:r>
+          </a:p>
+          <a:p>
+            <a:pPr lvl="0"/>
+            <a:r>
+              <a:rPr sz="2000"/>
+              <a:t>Could there be “cage effects” or similar issues to consider?</a:t>
+            </a:r>
+          </a:p>
+        </p:txBody>
+      </p:sp>
     </p:spTree>
   </p:cSld>
 </p:sld>
@@ -5679,11 +4628,8 @@
         <p:spPr>
           <a:xfrm>
             <a:off x="0" y="0"/>
-            <a:ext cx="9144000" cy="602780"/>
+            <a:ext cx="9144000" cy="582780"/>
           </a:xfrm>
-          <a:solidFill>
-            <a:srgbClr val="70121D"/>
-          </a:solidFill>
         </p:spPr>
         <p:txBody>
           <a:bodyPr/>
@@ -5694,7 +4640,7 @@
             </a:pPr>
             <a:r>
               <a:rPr/>
-              <a:t>Randomization in Practice</a:t>
+              <a:t>Independence</a:t>
             </a:r>
           </a:p>
         </p:txBody>
@@ -5706,7 +4652,7 @@
             <a:spLocks noGrp="1"/>
           </p:cNvSpPr>
           <p:nvPr>
-            <p:ph idx="1" sz="half"/>
+            <p:ph idx="1"/>
           </p:nvPr>
         </p:nvSpPr>
         <p:spPr/>
@@ -5718,384 +4664,64 @@
               <a:buNone/>
             </a:pPr>
             <a:r>
+              <a:rPr/>
+              <a:t>Independence of observations: assumption of many statistical methods</a:t>
+            </a:r>
+          </a:p>
+          <a:p>
+            <a:pPr lvl="0" indent="0" marL="0">
+              <a:buNone/>
+            </a:pPr>
+            <a:r>
+              <a:rPr/>
+              <a:t>Events are independent if occurrence of one has no effect on occurrence of another</a:t>
+            </a:r>
+          </a:p>
+          <a:p>
+            <a:pPr lvl="0"/>
+            <a:r>
+              <a:rPr/>
+              <a:t>E.g., offspring of one mother for treatment, offspring of another for control</a:t>
+            </a:r>
+          </a:p>
+          <a:p>
+            <a:pPr lvl="0" indent="0" marL="0">
+              <a:buNone/>
+            </a:pPr>
+            <a:r>
               <a:rPr b="1"/>
-              <a:t>Allocation of experimental units to treatment/control:</a:t>
-            </a:r>
-          </a:p>
-          <a:p>
-            <a:pPr lvl="0"/>
-            <a:r>
-              <a:rPr/>
-              <a:t>Experimental units must have equal chance of being allocated to control or experimental group</a:t>
-            </a:r>
-          </a:p>
-          <a:p>
-            <a:pPr lvl="0"/>
-            <a:r>
-              <a:rPr/>
-              <a:t>Properly done by random number generation</a:t>
+              <a:t>Temporal/spatial autocorrelation:</a:t>
+            </a:r>
+            <a:r>
+              <a:rPr/>
+              <a:t> violation of independence</a:t>
+            </a:r>
+          </a:p>
+          <a:p>
+            <a:pPr lvl="0"/>
+            <a:r>
+              <a:rPr/>
+              <a:t>Values of variables at certain place/time correlated with values at another place/time</a:t>
+            </a:r>
+          </a:p>
+          <a:p>
+            <a:pPr lvl="0"/>
+            <a:r>
+              <a:rPr/>
+              <a:t>“Everything is related to everything, but near things are more related than distant things”</a:t>
+            </a:r>
+          </a:p>
+          <a:p>
+            <a:pPr lvl="0"/>
+            <a:r>
+              <a:rPr/>
+              <a:t>Special methods to adjust for autocorrelation</a:t>
             </a:r>
           </a:p>
           <a:p>
             <a:pPr lvl="0" indent="0" marL="0">
               <a:buNone/>
             </a:pPr>
-            <a:r>
-              <a:rPr/>
-              <a:t>Randomization is essential at two levels:</a:t>
-            </a:r>
-          </a:p>
-          <a:p>
-            <a:pPr lvl="0"/>
-            <a:r>
-              <a:rPr/>
-              <a:t>Random selection from population</a:t>
-            </a:r>
-          </a:p>
-          <a:p>
-            <a:pPr lvl="0"/>
-            <a:r>
-              <a:rPr/>
-              <a:t>Random assignment to treatments</a:t>
-            </a:r>
-          </a:p>
-        </p:txBody>
-      </p:sp>
-      <p:sp>
-        <p:nvSpPr>
-          <p:cNvPr id="4" name="Content Placeholder 3"/>
-          <p:cNvSpPr>
-            <a:spLocks noGrp="1"/>
-          </p:cNvSpPr>
-          <p:nvPr>
-            <p:ph idx="2" sz="half"/>
-          </p:nvPr>
-        </p:nvSpPr>
-        <p:spPr/>
-        <p:txBody>
-          <a:bodyPr/>
-          <a:lstStyle/>
-          <a:p>
-            <a:pPr lvl="0" indent="0">
-              <a:buNone/>
-            </a:pPr>
-            <a:r>
-              <a:rPr>
-                <a:solidFill>
-                  <a:srgbClr val="5E5E5E"/>
-                </a:solidFill>
-                <a:latin typeface="Courier"/>
-              </a:rPr>
-              <a:t># Example of randomization in R</a:t>
-            </a:r>
-            <a:br/>
-            <a:r>
-              <a:rPr>
-                <a:solidFill>
-                  <a:srgbClr val="5E5E5E"/>
-                </a:solidFill>
-                <a:latin typeface="Courier"/>
-              </a:rPr>
-              <a:t># Select 10 trees randomly from 100 possible trees</a:t>
-            </a:r>
-            <a:br/>
-            <a:r>
-              <a:rPr>
-                <a:solidFill>
-                  <a:srgbClr val="003B4F"/>
-                </a:solidFill>
-                <a:latin typeface="Courier"/>
-              </a:rPr>
-              <a:t>all_trees &lt;- </a:t>
-            </a:r>
-            <a:r>
-              <a:rPr>
-                <a:solidFill>
-                  <a:srgbClr val="AD0000"/>
-                </a:solidFill>
-                <a:latin typeface="Courier"/>
-              </a:rPr>
-              <a:t>1</a:t>
-            </a:r>
-            <a:r>
-              <a:rPr>
-                <a:solidFill>
-                  <a:srgbClr val="5E5E5E"/>
-                </a:solidFill>
-                <a:latin typeface="Courier"/>
-              </a:rPr>
-              <a:t>:</a:t>
-            </a:r>
-            <a:r>
-              <a:rPr>
-                <a:solidFill>
-                  <a:srgbClr val="AD0000"/>
-                </a:solidFill>
-                <a:latin typeface="Courier"/>
-              </a:rPr>
-              <a:t>100</a:t>
-            </a:r>
-            <a:br/>
-            <a:r>
-              <a:rPr>
-                <a:solidFill>
-                  <a:srgbClr val="003B4F"/>
-                </a:solidFill>
-                <a:latin typeface="Courier"/>
-              </a:rPr>
-              <a:t>selected_trees &lt;- </a:t>
-            </a:r>
-            <a:r>
-              <a:rPr>
-                <a:solidFill>
-                  <a:srgbClr val="4758AB"/>
-                </a:solidFill>
-                <a:latin typeface="Courier"/>
-              </a:rPr>
-              <a:t>sample</a:t>
-            </a:r>
-            <a:r>
-              <a:rPr>
-                <a:solidFill>
-                  <a:srgbClr val="003B4F"/>
-                </a:solidFill>
-                <a:latin typeface="Courier"/>
-              </a:rPr>
-              <a:t>(all_trees, </a:t>
-            </a:r>
-            <a:r>
-              <a:rPr>
-                <a:solidFill>
-                  <a:srgbClr val="AD0000"/>
-                </a:solidFill>
-                <a:latin typeface="Courier"/>
-              </a:rPr>
-              <a:t>10</a:t>
-            </a:r>
-            <a:r>
-              <a:rPr>
-                <a:solidFill>
-                  <a:srgbClr val="003B4F"/>
-                </a:solidFill>
-                <a:latin typeface="Courier"/>
-              </a:rPr>
-              <a:t>)</a:t>
-            </a:r>
-            <a:br/>
-            <a:br/>
-            <a:r>
-              <a:rPr>
-                <a:solidFill>
-                  <a:srgbClr val="5E5E5E"/>
-                </a:solidFill>
-                <a:latin typeface="Courier"/>
-              </a:rPr>
-              <a:t># Randomly assign 5 trees to treatment and 5 to control</a:t>
-            </a:r>
-            <a:br/>
-            <a:r>
-              <a:rPr>
-                <a:solidFill>
-                  <a:srgbClr val="003B4F"/>
-                </a:solidFill>
-                <a:latin typeface="Courier"/>
-              </a:rPr>
-              <a:t>treatment_trees &lt;- </a:t>
-            </a:r>
-            <a:r>
-              <a:rPr>
-                <a:solidFill>
-                  <a:srgbClr val="4758AB"/>
-                </a:solidFill>
-                <a:latin typeface="Courier"/>
-              </a:rPr>
-              <a:t>sample</a:t>
-            </a:r>
-            <a:r>
-              <a:rPr>
-                <a:solidFill>
-                  <a:srgbClr val="003B4F"/>
-                </a:solidFill>
-                <a:latin typeface="Courier"/>
-              </a:rPr>
-              <a:t>(selected_trees, </a:t>
-            </a:r>
-            <a:r>
-              <a:rPr>
-                <a:solidFill>
-                  <a:srgbClr val="AD0000"/>
-                </a:solidFill>
-                <a:latin typeface="Courier"/>
-              </a:rPr>
-              <a:t>5</a:t>
-            </a:r>
-            <a:r>
-              <a:rPr>
-                <a:solidFill>
-                  <a:srgbClr val="003B4F"/>
-                </a:solidFill>
-                <a:latin typeface="Courier"/>
-              </a:rPr>
-              <a:t>)</a:t>
-            </a:r>
-            <a:br/>
-            <a:r>
-              <a:rPr>
-                <a:solidFill>
-                  <a:srgbClr val="003B4F"/>
-                </a:solidFill>
-                <a:latin typeface="Courier"/>
-              </a:rPr>
-              <a:t>control_trees &lt;- selected_trees[</a:t>
-            </a:r>
-            <a:r>
-              <a:rPr>
-                <a:solidFill>
-                  <a:srgbClr val="5E5E5E"/>
-                </a:solidFill>
-                <a:latin typeface="Courier"/>
-              </a:rPr>
-              <a:t>!</a:t>
-            </a:r>
-            <a:r>
-              <a:rPr>
-                <a:solidFill>
-                  <a:srgbClr val="003B4F"/>
-                </a:solidFill>
-                <a:latin typeface="Courier"/>
-              </a:rPr>
-              <a:t>selected_trees </a:t>
-            </a:r>
-            <a:r>
-              <a:rPr>
-                <a:solidFill>
-                  <a:srgbClr val="5E5E5E"/>
-                </a:solidFill>
-                <a:latin typeface="Courier"/>
-              </a:rPr>
-              <a:t>%in%</a:t>
-            </a:r>
-            <a:r>
-              <a:rPr>
-                <a:solidFill>
-                  <a:srgbClr val="003B4F"/>
-                </a:solidFill>
-                <a:latin typeface="Courier"/>
-              </a:rPr>
-              <a:t> treatment_trees]</a:t>
-            </a:r>
-            <a:br/>
-            <a:br/>
-            <a:r>
-              <a:rPr>
-                <a:solidFill>
-                  <a:srgbClr val="5E5E5E"/>
-                </a:solidFill>
-                <a:latin typeface="Courier"/>
-              </a:rPr>
-              <a:t># Display results</a:t>
-            </a:r>
-            <a:br/>
-            <a:r>
-              <a:rPr>
-                <a:solidFill>
-                  <a:srgbClr val="4758AB"/>
-                </a:solidFill>
-                <a:latin typeface="Courier"/>
-              </a:rPr>
-              <a:t>data.frame</a:t>
-            </a:r>
-            <a:r>
-              <a:rPr>
-                <a:solidFill>
-                  <a:srgbClr val="003B4F"/>
-                </a:solidFill>
-                <a:latin typeface="Courier"/>
-              </a:rPr>
-              <a:t>(</a:t>
-            </a:r>
-            <a:br/>
-            <a:r>
-              <a:rPr>
-                <a:solidFill>
-                  <a:srgbClr val="003B4F"/>
-                </a:solidFill>
-                <a:latin typeface="Courier"/>
-              </a:rPr>
-              <a:t>  </a:t>
-            </a:r>
-            <a:r>
-              <a:rPr>
-                <a:solidFill>
-                  <a:srgbClr val="657422"/>
-                </a:solidFill>
-                <a:latin typeface="Courier"/>
-              </a:rPr>
-              <a:t>Treatment =</a:t>
-            </a:r>
-            <a:r>
-              <a:rPr>
-                <a:solidFill>
-                  <a:srgbClr val="003B4F"/>
-                </a:solidFill>
-                <a:latin typeface="Courier"/>
-              </a:rPr>
-              <a:t> treatment_trees,</a:t>
-            </a:r>
-            <a:br/>
-            <a:r>
-              <a:rPr>
-                <a:solidFill>
-                  <a:srgbClr val="003B4F"/>
-                </a:solidFill>
-                <a:latin typeface="Courier"/>
-              </a:rPr>
-              <a:t>  </a:t>
-            </a:r>
-            <a:r>
-              <a:rPr>
-                <a:solidFill>
-                  <a:srgbClr val="657422"/>
-                </a:solidFill>
-                <a:latin typeface="Courier"/>
-              </a:rPr>
-              <a:t>Control =</a:t>
-            </a:r>
-            <a:r>
-              <a:rPr>
-                <a:solidFill>
-                  <a:srgbClr val="003B4F"/>
-                </a:solidFill>
-                <a:latin typeface="Courier"/>
-              </a:rPr>
-              <a:t> control_trees</a:t>
-            </a:r>
-            <a:br/>
-            <a:r>
-              <a:rPr>
-                <a:solidFill>
-                  <a:srgbClr val="003B4F"/>
-                </a:solidFill>
-                <a:latin typeface="Courier"/>
-              </a:rPr>
-              <a:t>)</a:t>
-            </a:r>
-          </a:p>
-          <a:p>
-            <a:pPr lvl="0" indent="0">
-              <a:buNone/>
-            </a:pPr>
-            <a:r>
-              <a:rPr>
-                <a:latin typeface="Courier"/>
-              </a:rPr>
-              <a:t>  Treatment Control
-1        32      24
-2        66      98
-3        92      25
-4        62      14
-5        61      34</a:t>
-            </a:r>
           </a:p>
         </p:txBody>
       </p:sp>
@@ -6149,7 +4775,7 @@
             </a:pPr>
             <a:r>
               <a:rPr/>
-              <a:t>Controls or reference?</a:t>
+              <a:t>Randomization</a:t>
             </a:r>
           </a:p>
         </p:txBody>
@@ -6170,74 +4796,55 @@
           <a:lstStyle/>
           <a:p>
             <a:pPr lvl="0" indent="0" marL="0">
-              <a:spcBef>
-                <a:spcPts val="3000"/>
-              </a:spcBef>
+              <a:buNone/>
+            </a:pPr>
+            <a:r>
+              <a:rPr/>
+              <a:t>Randomization helps deconfound “lurking” variables:</a:t>
+            </a:r>
+          </a:p>
+          <a:p>
+            <a:pPr lvl="0"/>
+            <a:r>
+              <a:rPr/>
+              <a:t>Attempts to equalize effects of confounders</a:t>
+            </a:r>
+          </a:p>
+          <a:p>
+            <a:pPr lvl="0" indent="0" marL="0">
               <a:buNone/>
             </a:pPr>
             <a:r>
               <a:rPr b="1"/>
-              <a:t>Key question: Is response due to manipulation/hypothesized mechanism or external factor?</a:t>
-            </a:r>
-          </a:p>
-          <a:p>
-            <a:pPr lvl="0" indent="0" marL="0">
-              <a:buNone/>
-            </a:pPr>
-            <a:r>
-              <a:rPr/>
-              <a:t>Controls help address this question:</a:t>
-            </a:r>
-          </a:p>
-          <a:p>
-            <a:pPr lvl="0"/>
-            <a:r>
-              <a:rPr/>
-              <a:t>Experimental units treated exactly as the manipulated units, except no manipulation under investigation</a:t>
-            </a:r>
-          </a:p>
-          <a:p>
-            <a:pPr lvl="0"/>
-            <a:r>
-              <a:rPr/>
-              <a:t>Can be tricky to implement; requires careful thought</a:t>
-            </a:r>
-          </a:p>
-          <a:p>
-            <a:pPr lvl="0" indent="0" marL="0">
-              <a:buNone/>
-            </a:pPr>
-            <a:r>
-              <a:rPr b="1"/>
-              <a:t>Examples:</a:t>
-            </a:r>
-          </a:p>
-          <a:p>
-            <a:pPr lvl="0"/>
-            <a:r>
-              <a:rPr/>
-              <a:t>In toxicology, controls and treatment groups must both be injected, but control does not receive the substance under study</a:t>
-            </a:r>
-          </a:p>
-          <a:p>
-            <a:pPr lvl="0"/>
-            <a:r>
-              <a:rPr/>
-              <a:t>Predator exclosures often produce “cage effects”</a:t>
-            </a:r>
-          </a:p>
-          <a:p>
-            <a:pPr lvl="0"/>
-            <a:r>
-              <a:rPr/>
-              <a:t>need two controls: a grazer/predator control and a “cage control”</a:t>
+              <a:t>Random sampling from population:</a:t>
+            </a:r>
+          </a:p>
+          <a:p>
+            <a:pPr lvl="0"/>
+            <a:r>
+              <a:rPr/>
+              <a:t>Experimental units should represent random sample from population of interest</a:t>
+            </a:r>
+          </a:p>
+          <a:p>
+            <a:pPr lvl="0"/>
+            <a:r>
+              <a:rPr/>
+              <a:t>Ensures unbiased population estimates and inference</a:t>
+            </a:r>
+          </a:p>
+          <a:p>
+            <a:pPr lvl="0"/>
+            <a:r>
+              <a:rPr/>
+              <a:t>E.g., animals in experiment are random subset of all animals that could have been used</a:t>
             </a:r>
           </a:p>
         </p:txBody>
       </p:sp>
       <p:pic>
         <p:nvPicPr>
-          <p:cNvPr descr="images/clipboard-3685049769.png" id="0" name="Picture 1"/>
+          <p:cNvPr descr="images/clipboard-425378447.png" id="0" name="Picture 1"/>
           <p:cNvPicPr>
             <a:picLocks noGrp="1" noChangeAspect="1"/>
           </p:cNvPicPr>
@@ -6251,8 +4858,8 @@
         </p:blipFill>
         <p:spPr bwMode="auto">
           <a:xfrm>
-            <a:off x="6121400" y="1739900"/>
-            <a:ext cx="2781300" cy="2311400"/>
+            <a:off x="6121400" y="2019300"/>
+            <a:ext cx="2781300" cy="1752600"/>
           </a:xfrm>
           <a:prstGeom prst="rect">
             <a:avLst/>
@@ -6452,8 +5059,11 @@
         <p:spPr>
           <a:xfrm>
             <a:off x="0" y="0"/>
-            <a:ext cx="9144000" cy="582780"/>
+            <a:ext cx="9144000" cy="602780"/>
           </a:xfrm>
+          <a:solidFill>
+            <a:srgbClr val="70121D"/>
+          </a:solidFill>
         </p:spPr>
         <p:txBody>
           <a:bodyPr/>
@@ -6464,7 +5074,7 @@
             </a:pPr>
             <a:r>
               <a:rPr/>
-              <a:t>Activity 4: Designing Controls</a:t>
+              <a:t>Randomization in Practice</a:t>
             </a:r>
           </a:p>
         </p:txBody>
@@ -6476,7 +5086,7 @@
             <a:spLocks noGrp="1"/>
           </p:cNvSpPr>
           <p:nvPr>
-            <p:ph idx="1"/>
+            <p:ph idx="1" sz="half"/>
           </p:nvPr>
         </p:nvSpPr>
         <p:spPr/>
@@ -6484,78 +5094,81 @@
           <a:bodyPr/>
           <a:lstStyle/>
           <a:p>
-            <a:pPr lvl="0" indent="0" marL="1270000">
-              <a:buNone/>
-            </a:pPr>
-            <a:r>
-              <a:rPr sz="2000" b="1"/>
-              <a:t>Activity 4: Designing Controls for Pine Experiments</a:t>
-            </a:r>
-          </a:p>
-          <a:p>
-            <a:pPr lvl="0" indent="0" marL="1270000">
-              <a:buNone/>
-            </a:pPr>
-            <a:r>
-              <a:rPr sz="2000"/>
-              <a:t>Work in small groups to design appropriate controls for each experiment:</a:t>
-            </a:r>
-          </a:p>
-          <a:p>
-            <a:pPr lvl="0" indent="-342900" marL="342900">
-              <a:buAutoNum type="arabicPeriod"/>
-            </a:pPr>
-            <a:r>
-              <a:rPr sz="2000"/>
-              <a:t>Testing whether pine needle length is affected by a particular fertilizer</a:t>
-            </a:r>
-          </a:p>
-          <a:p>
-            <a:pPr lvl="0" indent="-342900" marL="342900">
-              <a:buAutoNum type="arabicPeriod"/>
-            </a:pPr>
-            <a:r>
-              <a:rPr sz="2000"/>
-              <a:t>Testing whether pine needle density affects water retention during drought using enclosed branches</a:t>
-            </a:r>
-          </a:p>
-          <a:p>
-            <a:pPr lvl="0" indent="-342900" marL="342900">
-              <a:buAutoNum type="arabicPeriod"/>
-            </a:pPr>
-            <a:r>
-              <a:rPr sz="2000"/>
-              <a:t>Testing whether sunlight exposure affects pine seedling growth using shade cloth</a:t>
-            </a:r>
-          </a:p>
-          <a:p>
-            <a:pPr lvl="0" indent="0" marL="1270000">
-              <a:buNone/>
-            </a:pPr>
-            <a:r>
-              <a:rPr sz="2000"/>
-              <a:t>For each experiment, identify:</a:t>
-            </a:r>
-          </a:p>
-          <a:p>
-            <a:pPr lvl="0"/>
-            <a:r>
-              <a:rPr sz="2000"/>
-              <a:t>What would be appropriate controls?</a:t>
-            </a:r>
-          </a:p>
-          <a:p>
-            <a:pPr lvl="0"/>
-            <a:r>
-              <a:rPr sz="2000"/>
-              <a:t>What factors need to be controlled besides the main variable?</a:t>
-            </a:r>
-          </a:p>
-          <a:p>
-            <a:pPr lvl="0"/>
-            <a:r>
-              <a:rPr sz="2000"/>
-              <a:t>Could there be “cage effects” or similar issues to consider?</a:t>
+            <a:pPr lvl="0" indent="0" marL="0">
+              <a:buNone/>
+            </a:pPr>
+            <a:r>
+              <a:rPr b="1"/>
+              <a:t>Allocation of experimental units to treatment/control:</a:t>
+            </a:r>
+          </a:p>
+          <a:p>
+            <a:pPr lvl="0"/>
+            <a:r>
+              <a:rPr/>
+              <a:t>Experimental units must have equal chance of being allocated to control or experimental group</a:t>
+            </a:r>
+          </a:p>
+          <a:p>
+            <a:pPr lvl="0"/>
+            <a:r>
+              <a:rPr/>
+              <a:t>Properly done by random number generation</a:t>
+            </a:r>
+          </a:p>
+          <a:p>
+            <a:pPr lvl="0" indent="0" marL="0">
+              <a:buNone/>
+            </a:pPr>
+            <a:r>
+              <a:rPr/>
+              <a:t>Randomization is essential at two levels:</a:t>
+            </a:r>
+          </a:p>
+          <a:p>
+            <a:pPr lvl="0"/>
+            <a:r>
+              <a:rPr/>
+              <a:t>Random selection from population</a:t>
+            </a:r>
+          </a:p>
+          <a:p>
+            <a:pPr lvl="0"/>
+            <a:r>
+              <a:rPr/>
+              <a:t>Random assignment to treatments</a:t>
+            </a:r>
+          </a:p>
+        </p:txBody>
+      </p:sp>
+      <p:sp>
+        <p:nvSpPr>
+          <p:cNvPr id="4" name="Content Placeholder 3"/>
+          <p:cNvSpPr>
+            <a:spLocks noGrp="1"/>
+          </p:cNvSpPr>
+          <p:nvPr>
+            <p:ph idx="2" sz="half"/>
+          </p:nvPr>
+        </p:nvSpPr>
+        <p:spPr/>
+        <p:txBody>
+          <a:bodyPr/>
+          <a:lstStyle/>
+          <a:p>
+            <a:pPr lvl="0" indent="0">
+              <a:buNone/>
+            </a:pPr>
+            <a:r>
+              <a:rPr>
+                <a:latin typeface="Courier"/>
+              </a:rPr>
+              <a:t>  Treatment Control
+1        18      49
+2        74     100
+3        65      47
+4        24      71
+5        25      89</a:t>
             </a:r>
           </a:p>
         </p:txBody>
@@ -6566,138 +5179,6 @@
 </file>
 
 <file path=ppt/slides/slide21.xml><?xml version="1.0" encoding="utf-8"?>
-<p:sld xmlns:a="http://schemas.openxmlformats.org/drawingml/2006/main" xmlns:r="http://schemas.openxmlformats.org/officeDocument/2006/relationships" xmlns:p="http://schemas.openxmlformats.org/presentationml/2006/main">
-  <p:cSld>
-    <p:spTree>
-      <p:nvGrpSpPr>
-        <p:cNvPr id="1" name=""/>
-        <p:cNvGrpSpPr/>
-        <p:nvPr/>
-      </p:nvGrpSpPr>
-      <p:grpSpPr>
-        <a:xfrm>
-          <a:off x="0" y="0"/>
-          <a:ext cx="0" cy="0"/>
-          <a:chOff x="0" y="0"/>
-          <a:chExt cx="0" cy="0"/>
-        </a:xfrm>
-      </p:grpSpPr>
-      <p:sp>
-        <p:nvSpPr>
-          <p:cNvPr id="2" name="Title 1"/>
-          <p:cNvSpPr>
-            <a:spLocks noGrp="1"/>
-          </p:cNvSpPr>
-          <p:nvPr>
-            <p:ph type="title"/>
-          </p:nvPr>
-        </p:nvSpPr>
-        <p:spPr>
-          <a:xfrm>
-            <a:off x="0" y="0"/>
-            <a:ext cx="9144000" cy="582780"/>
-          </a:xfrm>
-        </p:spPr>
-        <p:txBody>
-          <a:bodyPr/>
-          <a:lstStyle/>
-          <a:p>
-            <a:pPr lvl="0" indent="0" marL="0">
-              <a:buNone/>
-            </a:pPr>
-            <a:r>
-              <a:rPr/>
-              <a:t>Independence</a:t>
-            </a:r>
-          </a:p>
-        </p:txBody>
-      </p:sp>
-      <p:sp>
-        <p:nvSpPr>
-          <p:cNvPr id="3" name="Content Placeholder 2"/>
-          <p:cNvSpPr>
-            <a:spLocks noGrp="1"/>
-          </p:cNvSpPr>
-          <p:nvPr>
-            <p:ph idx="1"/>
-          </p:nvPr>
-        </p:nvSpPr>
-        <p:spPr/>
-        <p:txBody>
-          <a:bodyPr/>
-          <a:lstStyle/>
-          <a:p>
-            <a:pPr lvl="0" indent="0" marL="0">
-              <a:buNone/>
-            </a:pPr>
-            <a:r>
-              <a:rPr/>
-              <a:t>Independence of observations: assumption of many statistical methods</a:t>
-            </a:r>
-          </a:p>
-          <a:p>
-            <a:pPr lvl="0" indent="0" marL="0">
-              <a:buNone/>
-            </a:pPr>
-            <a:r>
-              <a:rPr/>
-              <a:t>Events are independent if occurrence of one has no effect on occurrence of another</a:t>
-            </a:r>
-          </a:p>
-          <a:p>
-            <a:pPr lvl="0"/>
-            <a:r>
-              <a:rPr/>
-              <a:t>E.g., offspring of one mother for treatment, offspring of another for control</a:t>
-            </a:r>
-          </a:p>
-          <a:p>
-            <a:pPr lvl="0" indent="0" marL="0">
-              <a:buNone/>
-            </a:pPr>
-            <a:r>
-              <a:rPr b="1"/>
-              <a:t>Temporal/spatial autocorrelation:</a:t>
-            </a:r>
-            <a:r>
-              <a:rPr/>
-              <a:t> violation of independence</a:t>
-            </a:r>
-          </a:p>
-          <a:p>
-            <a:pPr lvl="0"/>
-            <a:r>
-              <a:rPr/>
-              <a:t>Values of variables at certain place/time correlated with values at another place/time</a:t>
-            </a:r>
-          </a:p>
-          <a:p>
-            <a:pPr lvl="0"/>
-            <a:r>
-              <a:rPr/>
-              <a:t>“Everything is related to everything, but near things are more related than distant things”</a:t>
-            </a:r>
-          </a:p>
-          <a:p>
-            <a:pPr lvl="0"/>
-            <a:r>
-              <a:rPr/>
-              <a:t>Special methods to adjust for autocorrelation</a:t>
-            </a:r>
-          </a:p>
-          <a:p>
-            <a:pPr lvl="0" indent="0" marL="0">
-              <a:buNone/>
-            </a:pPr>
-          </a:p>
-        </p:txBody>
-      </p:sp>
-    </p:spTree>
-  </p:cSld>
-</p:sld>
-</file>
-
-<file path=ppt/slides/slide22.xml><?xml version="1.0" encoding="utf-8"?>
 <p:sld xmlns:a="http://schemas.openxmlformats.org/drawingml/2006/main" xmlns:r="http://schemas.openxmlformats.org/officeDocument/2006/relationships" xmlns:p="http://schemas.openxmlformats.org/presentationml/2006/main">
   <p:cSld>
     <p:spTree>
@@ -6838,6 +5319,133 @@
 </p:sld>
 </file>
 
+<file path=ppt/slides/slide22.xml><?xml version="1.0" encoding="utf-8"?>
+<p:sld xmlns:a="http://schemas.openxmlformats.org/drawingml/2006/main" xmlns:r="http://schemas.openxmlformats.org/officeDocument/2006/relationships" xmlns:p="http://schemas.openxmlformats.org/presentationml/2006/main">
+  <p:cSld>
+    <p:spTree>
+      <p:nvGrpSpPr>
+        <p:cNvPr id="1" name=""/>
+        <p:cNvGrpSpPr/>
+        <p:nvPr/>
+      </p:nvGrpSpPr>
+      <p:grpSpPr>
+        <a:xfrm>
+          <a:off x="0" y="0"/>
+          <a:ext cx="0" cy="0"/>
+          <a:chOff x="0" y="0"/>
+          <a:chExt cx="0" cy="0"/>
+        </a:xfrm>
+      </p:grpSpPr>
+      <p:sp>
+        <p:nvSpPr>
+          <p:cNvPr id="2" name="Title 1"/>
+          <p:cNvSpPr>
+            <a:spLocks noGrp="1"/>
+          </p:cNvSpPr>
+          <p:nvPr>
+            <p:ph type="title"/>
+          </p:nvPr>
+        </p:nvSpPr>
+        <p:spPr>
+          <a:xfrm>
+            <a:off x="0" y="0"/>
+            <a:ext cx="9144000" cy="602780"/>
+          </a:xfrm>
+          <a:solidFill>
+            <a:srgbClr val="70121D"/>
+          </a:solidFill>
+        </p:spPr>
+        <p:txBody>
+          <a:bodyPr/>
+          <a:lstStyle/>
+          <a:p>
+            <a:pPr lvl="0" indent="0" marL="0">
+              <a:buNone/>
+            </a:pPr>
+            <a:r>
+              <a:rPr/>
+              <a:t>Sampling Design - Stratified</a:t>
+            </a:r>
+          </a:p>
+        </p:txBody>
+      </p:sp>
+      <p:sp>
+        <p:nvSpPr>
+          <p:cNvPr id="3" name="Content Placeholder 2"/>
+          <p:cNvSpPr>
+            <a:spLocks noGrp="1"/>
+          </p:cNvSpPr>
+          <p:nvPr>
+            <p:ph idx="1" sz="half"/>
+          </p:nvPr>
+        </p:nvSpPr>
+        <p:spPr/>
+        <p:txBody>
+          <a:bodyPr/>
+          <a:lstStyle/>
+          <a:p>
+            <a:pPr lvl="0" indent="0" marL="0">
+              <a:spcBef>
+                <a:spcPts val="3000"/>
+              </a:spcBef>
+              <a:buNone/>
+            </a:pPr>
+            <a:r>
+              <a:rPr b="1"/>
+              <a:t>Stratified designs: if there are distinct strata (groups) in population, may want to sample each independently</a:t>
+            </a:r>
+          </a:p>
+          <a:p>
+            <a:pPr lvl="0"/>
+            <a:r>
+              <a:rPr/>
+              <a:t>Samples collected from each stratum randomly, n proportional to “size” of stratum</a:t>
+            </a:r>
+          </a:p>
+          <a:p>
+            <a:pPr lvl="0"/>
+            <a:r>
+              <a:rPr/>
+              <a:t>Means and variances need to be estimated using different procedure; strata included in model</a:t>
+            </a:r>
+          </a:p>
+        </p:txBody>
+      </p:sp>
+      <p:pic>
+        <p:nvPicPr>
+          <p:cNvPr descr="images/clipboard-4229571822.png" id="0" name="Picture 1"/>
+          <p:cNvPicPr>
+            <a:picLocks noGrp="1" noChangeAspect="1"/>
+          </p:cNvPicPr>
+          <p:nvPr/>
+        </p:nvPicPr>
+        <p:blipFill>
+          <a:blip r:embed="rId2"/>
+          <a:stretch>
+            <a:fillRect/>
+          </a:stretch>
+        </p:blipFill>
+        <p:spPr bwMode="auto">
+          <a:xfrm>
+            <a:off x="6121400" y="2159000"/>
+            <a:ext cx="2781300" cy="1473200"/>
+          </a:xfrm>
+          <a:prstGeom prst="rect">
+            <a:avLst/>
+          </a:prstGeom>
+          <a:noFill/>
+          <a:ln w="9525">
+            <a:noFill/>
+            <a:headEnd/>
+            <a:tailEnd/>
+          </a:ln>
+        </p:spPr>
+      </p:pic>
+    </p:spTree>
+  </p:cSld>
+</p:sld>
+</file>
+
 <file path=ppt/slides/slide23.xml><?xml version="1.0" encoding="utf-8"?>
 <p:sld xmlns:a="http://schemas.openxmlformats.org/drawingml/2006/main" xmlns:r="http://schemas.openxmlformats.org/officeDocument/2006/relationships" xmlns:p="http://schemas.openxmlformats.org/presentationml/2006/main">
   <p:cSld>
@@ -6883,7 +5491,7 @@
             </a:pPr>
             <a:r>
               <a:rPr/>
-              <a:t>Sampling Design - Stratified</a:t>
+              <a:t>Sampling Design - Cluster</a:t>
             </a:r>
           </a:p>
         </p:txBody>
@@ -6911,28 +5519,42 @@
             </a:pPr>
             <a:r>
               <a:rPr b="1"/>
-              <a:t>Stratified designs: if there are distinct strata (groups) in population, may want to sample each independently</a:t>
-            </a:r>
-          </a:p>
-          <a:p>
-            <a:pPr lvl="0"/>
-            <a:r>
-              <a:rPr/>
-              <a:t>Samples collected from each stratum randomly, n proportional to “size” of stratum</a:t>
-            </a:r>
-          </a:p>
-          <a:p>
-            <a:pPr lvl="0"/>
-            <a:r>
-              <a:rPr/>
-              <a:t>Means and variances need to be estimated using different procedure; strata included in model</a:t>
+              <a:t>Cluster designs:</a:t>
+            </a:r>
+          </a:p>
+          <a:p>
+            <a:pPr lvl="0"/>
+            <a:r>
+              <a:rPr/>
+              <a:t>focuses on sampling subunits nested in larger units</a:t>
+            </a:r>
+          </a:p>
+          <a:p>
+            <a:pPr lvl="0"/>
+            <a:r>
+              <a:rPr/>
+              <a:t>Used when other designs impractical (e.g., due to cost)</a:t>
+            </a:r>
+          </a:p>
+          <a:p>
+            <a:pPr lvl="0"/>
+            <a:r>
+              <a:rPr/>
+              <a:t>Mean calculation easy, modified procedure for variance</a:t>
+            </a:r>
+          </a:p>
+          <a:p>
+            <a:pPr lvl="0"/>
+            <a:r>
+              <a:rPr/>
+              <a:t>Nested ANOVA is often appropriate analytical method</a:t>
             </a:r>
           </a:p>
         </p:txBody>
       </p:sp>
       <p:pic>
         <p:nvPicPr>
-          <p:cNvPr descr="images/clipboard-4229571822.png" id="0" name="Picture 1"/>
+          <p:cNvPr descr="images/clipboard-3497374488.png" id="0" name="Picture 1"/>
           <p:cNvPicPr>
             <a:picLocks noGrp="1" noChangeAspect="1"/>
           </p:cNvPicPr>
@@ -7010,147 +5632,6 @@
             </a:pPr>
             <a:r>
               <a:rPr/>
-              <a:t>Sampling Design - Cluster</a:t>
-            </a:r>
-          </a:p>
-        </p:txBody>
-      </p:sp>
-      <p:sp>
-        <p:nvSpPr>
-          <p:cNvPr id="3" name="Content Placeholder 2"/>
-          <p:cNvSpPr>
-            <a:spLocks noGrp="1"/>
-          </p:cNvSpPr>
-          <p:nvPr>
-            <p:ph idx="1" sz="half"/>
-          </p:nvPr>
-        </p:nvSpPr>
-        <p:spPr/>
-        <p:txBody>
-          <a:bodyPr/>
-          <a:lstStyle/>
-          <a:p>
-            <a:pPr lvl="0" indent="0" marL="0">
-              <a:spcBef>
-                <a:spcPts val="3000"/>
-              </a:spcBef>
-              <a:buNone/>
-            </a:pPr>
-            <a:r>
-              <a:rPr b="1"/>
-              <a:t>Cluster designs:</a:t>
-            </a:r>
-          </a:p>
-          <a:p>
-            <a:pPr lvl="0"/>
-            <a:r>
-              <a:rPr/>
-              <a:t>focuses on sampling subunits nested in larger units</a:t>
-            </a:r>
-          </a:p>
-          <a:p>
-            <a:pPr lvl="0"/>
-            <a:r>
-              <a:rPr/>
-              <a:t>Used when other designs impractical (e.g., due to cost)</a:t>
-            </a:r>
-          </a:p>
-          <a:p>
-            <a:pPr lvl="0"/>
-            <a:r>
-              <a:rPr/>
-              <a:t>Mean calculation easy, modified procedure for variance</a:t>
-            </a:r>
-          </a:p>
-          <a:p>
-            <a:pPr lvl="0"/>
-            <a:r>
-              <a:rPr/>
-              <a:t>Nested ANOVA is often appropriate analytical method</a:t>
-            </a:r>
-          </a:p>
-        </p:txBody>
-      </p:sp>
-      <p:pic>
-        <p:nvPicPr>
-          <p:cNvPr descr="images/clipboard-3497374488.png" id="0" name="Picture 1"/>
-          <p:cNvPicPr>
-            <a:picLocks noGrp="1" noChangeAspect="1"/>
-          </p:cNvPicPr>
-          <p:nvPr/>
-        </p:nvPicPr>
-        <p:blipFill>
-          <a:blip r:embed="rId2"/>
-          <a:stretch>
-            <a:fillRect/>
-          </a:stretch>
-        </p:blipFill>
-        <p:spPr bwMode="auto">
-          <a:xfrm>
-            <a:off x="6121400" y="2159000"/>
-            <a:ext cx="2781300" cy="1473200"/>
-          </a:xfrm>
-          <a:prstGeom prst="rect">
-            <a:avLst/>
-          </a:prstGeom>
-          <a:noFill/>
-          <a:ln w="9525">
-            <a:noFill/>
-            <a:headEnd/>
-            <a:tailEnd/>
-          </a:ln>
-        </p:spPr>
-      </p:pic>
-    </p:spTree>
-  </p:cSld>
-</p:sld>
-</file>
-
-<file path=ppt/slides/slide25.xml><?xml version="1.0" encoding="utf-8"?>
-<p:sld xmlns:a="http://schemas.openxmlformats.org/drawingml/2006/main" xmlns:r="http://schemas.openxmlformats.org/officeDocument/2006/relationships" xmlns:p="http://schemas.openxmlformats.org/presentationml/2006/main">
-  <p:cSld>
-    <p:spTree>
-      <p:nvGrpSpPr>
-        <p:cNvPr id="1" name=""/>
-        <p:cNvGrpSpPr/>
-        <p:nvPr/>
-      </p:nvGrpSpPr>
-      <p:grpSpPr>
-        <a:xfrm>
-          <a:off x="0" y="0"/>
-          <a:ext cx="0" cy="0"/>
-          <a:chOff x="0" y="0"/>
-          <a:chExt cx="0" cy="0"/>
-        </a:xfrm>
-      </p:grpSpPr>
-      <p:sp>
-        <p:nvSpPr>
-          <p:cNvPr id="2" name="Title 1"/>
-          <p:cNvSpPr>
-            <a:spLocks noGrp="1"/>
-          </p:cNvSpPr>
-          <p:nvPr>
-            <p:ph type="title"/>
-          </p:nvPr>
-        </p:nvSpPr>
-        <p:spPr>
-          <a:xfrm>
-            <a:off x="0" y="0"/>
-            <a:ext cx="9144000" cy="602780"/>
-          </a:xfrm>
-          <a:solidFill>
-            <a:srgbClr val="70121D"/>
-          </a:solidFill>
-        </p:spPr>
-        <p:txBody>
-          <a:bodyPr/>
-          <a:lstStyle/>
-          <a:p>
-            <a:pPr lvl="0" indent="0" marL="0">
-              <a:buNone/>
-            </a:pPr>
-            <a:r>
-              <a:rPr/>
               <a:t>Sampling Design - Systematic</a:t>
             </a:r>
           </a:p>
@@ -7240,7 +5721,7 @@
 </p:sld>
 </file>
 
-<file path=ppt/slides/slide26.xml><?xml version="1.0" encoding="utf-8"?>
+<file path=ppt/slides/slide25.xml><?xml version="1.0" encoding="utf-8"?>
 <p:sld xmlns:a="http://schemas.openxmlformats.org/drawingml/2006/main" xmlns:r="http://schemas.openxmlformats.org/officeDocument/2006/relationships" xmlns:p="http://schemas.openxmlformats.org/presentationml/2006/main">
   <p:cSld>
     <p:spTree>
@@ -7320,1036 +5801,6 @@
             </a:r>
           </a:p>
           <a:p>
-            <a:pPr lvl="0" indent="0">
-              <a:buNone/>
-            </a:pPr>
-            <a:r>
-              <a:rPr>
-                <a:solidFill>
-                  <a:srgbClr val="5E5E5E"/>
-                </a:solidFill>
-                <a:latin typeface="Courier"/>
-              </a:rPr>
-              <a:t># Let's create a campus map grid (simplified)</a:t>
-            </a:r>
-            <a:br/>
-            <a:r>
-              <a:rPr>
-                <a:solidFill>
-                  <a:srgbClr val="003B4F"/>
-                </a:solidFill>
-                <a:latin typeface="Courier"/>
-              </a:rPr>
-              <a:t>campus_grid &lt;- </a:t>
-            </a:r>
-            <a:r>
-              <a:rPr>
-                <a:solidFill>
-                  <a:srgbClr val="4758AB"/>
-                </a:solidFill>
-                <a:latin typeface="Courier"/>
-              </a:rPr>
-              <a:t>expand.grid</a:t>
-            </a:r>
-            <a:r>
-              <a:rPr>
-                <a:solidFill>
-                  <a:srgbClr val="003B4F"/>
-                </a:solidFill>
-                <a:latin typeface="Courier"/>
-              </a:rPr>
-              <a:t>(</a:t>
-            </a:r>
-            <a:r>
-              <a:rPr>
-                <a:solidFill>
-                  <a:srgbClr val="657422"/>
-                </a:solidFill>
-                <a:latin typeface="Courier"/>
-              </a:rPr>
-              <a:t>x =</a:t>
-            </a:r>
-            <a:r>
-              <a:rPr>
-                <a:solidFill>
-                  <a:srgbClr val="003B4F"/>
-                </a:solidFill>
-                <a:latin typeface="Courier"/>
-              </a:rPr>
-              <a:t> </a:t>
-            </a:r>
-            <a:r>
-              <a:rPr>
-                <a:solidFill>
-                  <a:srgbClr val="AD0000"/>
-                </a:solidFill>
-                <a:latin typeface="Courier"/>
-              </a:rPr>
-              <a:t>1</a:t>
-            </a:r>
-            <a:r>
-              <a:rPr>
-                <a:solidFill>
-                  <a:srgbClr val="5E5E5E"/>
-                </a:solidFill>
-                <a:latin typeface="Courier"/>
-              </a:rPr>
-              <a:t>:</a:t>
-            </a:r>
-            <a:r>
-              <a:rPr>
-                <a:solidFill>
-                  <a:srgbClr val="AD0000"/>
-                </a:solidFill>
-                <a:latin typeface="Courier"/>
-              </a:rPr>
-              <a:t>10</a:t>
-            </a:r>
-            <a:r>
-              <a:rPr>
-                <a:solidFill>
-                  <a:srgbClr val="003B4F"/>
-                </a:solidFill>
-                <a:latin typeface="Courier"/>
-              </a:rPr>
-              <a:t>, </a:t>
-            </a:r>
-            <a:r>
-              <a:rPr>
-                <a:solidFill>
-                  <a:srgbClr val="657422"/>
-                </a:solidFill>
-                <a:latin typeface="Courier"/>
-              </a:rPr>
-              <a:t>y =</a:t>
-            </a:r>
-            <a:r>
-              <a:rPr>
-                <a:solidFill>
-                  <a:srgbClr val="003B4F"/>
-                </a:solidFill>
-                <a:latin typeface="Courier"/>
-              </a:rPr>
-              <a:t> </a:t>
-            </a:r>
-            <a:r>
-              <a:rPr>
-                <a:solidFill>
-                  <a:srgbClr val="AD0000"/>
-                </a:solidFill>
-                <a:latin typeface="Courier"/>
-              </a:rPr>
-              <a:t>1</a:t>
-            </a:r>
-            <a:r>
-              <a:rPr>
-                <a:solidFill>
-                  <a:srgbClr val="5E5E5E"/>
-                </a:solidFill>
-                <a:latin typeface="Courier"/>
-              </a:rPr>
-              <a:t>:</a:t>
-            </a:r>
-            <a:r>
-              <a:rPr>
-                <a:solidFill>
-                  <a:srgbClr val="AD0000"/>
-                </a:solidFill>
-                <a:latin typeface="Courier"/>
-              </a:rPr>
-              <a:t>10</a:t>
-            </a:r>
-            <a:r>
-              <a:rPr>
-                <a:solidFill>
-                  <a:srgbClr val="003B4F"/>
-                </a:solidFill>
-                <a:latin typeface="Courier"/>
-              </a:rPr>
-              <a:t>)</a:t>
-            </a:r>
-            <a:br/>
-            <a:br/>
-            <a:r>
-              <a:rPr>
-                <a:solidFill>
-                  <a:srgbClr val="5E5E5E"/>
-                </a:solidFill>
-                <a:latin typeface="Courier"/>
-              </a:rPr>
-              <a:t># Place "pine trees" clustered toward the north side (higher y values)</a:t>
-            </a:r>
-            <a:br/>
-            <a:r>
-              <a:rPr>
-                <a:solidFill>
-                  <a:srgbClr val="4758AB"/>
-                </a:solidFill>
-                <a:latin typeface="Courier"/>
-              </a:rPr>
-              <a:t>set.seed</a:t>
-            </a:r>
-            <a:r>
-              <a:rPr>
-                <a:solidFill>
-                  <a:srgbClr val="003B4F"/>
-                </a:solidFill>
-                <a:latin typeface="Courier"/>
-              </a:rPr>
-              <a:t>(</a:t>
-            </a:r>
-            <a:r>
-              <a:rPr>
-                <a:solidFill>
-                  <a:srgbClr val="AD0000"/>
-                </a:solidFill>
-                <a:latin typeface="Courier"/>
-              </a:rPr>
-              <a:t>46</a:t>
-            </a:r>
-            <a:r>
-              <a:rPr>
-                <a:solidFill>
-                  <a:srgbClr val="003B4F"/>
-                </a:solidFill>
-                <a:latin typeface="Courier"/>
-              </a:rPr>
-              <a:t>)</a:t>
-            </a:r>
-            <a:br/>
-            <a:r>
-              <a:rPr>
-                <a:solidFill>
-                  <a:srgbClr val="003B4F"/>
-                </a:solidFill>
-                <a:latin typeface="Courier"/>
-              </a:rPr>
-              <a:t>pine_locations &lt;- </a:t>
-            </a:r>
-            <a:r>
-              <a:rPr>
-                <a:solidFill>
-                  <a:srgbClr val="4758AB"/>
-                </a:solidFill>
-                <a:latin typeface="Courier"/>
-              </a:rPr>
-              <a:t>data.frame</a:t>
-            </a:r>
-            <a:r>
-              <a:rPr>
-                <a:solidFill>
-                  <a:srgbClr val="003B4F"/>
-                </a:solidFill>
-                <a:latin typeface="Courier"/>
-              </a:rPr>
-              <a:t>(</a:t>
-            </a:r>
-            <a:br/>
-            <a:r>
-              <a:rPr>
-                <a:solidFill>
-                  <a:srgbClr val="003B4F"/>
-                </a:solidFill>
-                <a:latin typeface="Courier"/>
-              </a:rPr>
-              <a:t>  </a:t>
-            </a:r>
-            <a:r>
-              <a:rPr>
-                <a:solidFill>
-                  <a:srgbClr val="657422"/>
-                </a:solidFill>
-                <a:latin typeface="Courier"/>
-              </a:rPr>
-              <a:t>x =</a:t>
-            </a:r>
-            <a:r>
-              <a:rPr>
-                <a:solidFill>
-                  <a:srgbClr val="003B4F"/>
-                </a:solidFill>
-                <a:latin typeface="Courier"/>
-              </a:rPr>
-              <a:t> </a:t>
-            </a:r>
-            <a:r>
-              <a:rPr>
-                <a:solidFill>
-                  <a:srgbClr val="4758AB"/>
-                </a:solidFill>
-                <a:latin typeface="Courier"/>
-              </a:rPr>
-              <a:t>sample</a:t>
-            </a:r>
-            <a:r>
-              <a:rPr>
-                <a:solidFill>
-                  <a:srgbClr val="003B4F"/>
-                </a:solidFill>
-                <a:latin typeface="Courier"/>
-              </a:rPr>
-              <a:t>(</a:t>
-            </a:r>
-            <a:r>
-              <a:rPr>
-                <a:solidFill>
-                  <a:srgbClr val="AD0000"/>
-                </a:solidFill>
-                <a:latin typeface="Courier"/>
-              </a:rPr>
-              <a:t>1</a:t>
-            </a:r>
-            <a:r>
-              <a:rPr>
-                <a:solidFill>
-                  <a:srgbClr val="5E5E5E"/>
-                </a:solidFill>
-                <a:latin typeface="Courier"/>
-              </a:rPr>
-              <a:t>:</a:t>
-            </a:r>
-            <a:r>
-              <a:rPr>
-                <a:solidFill>
-                  <a:srgbClr val="AD0000"/>
-                </a:solidFill>
-                <a:latin typeface="Courier"/>
-              </a:rPr>
-              <a:t>10</a:t>
-            </a:r>
-            <a:r>
-              <a:rPr>
-                <a:solidFill>
-                  <a:srgbClr val="003B4F"/>
-                </a:solidFill>
-                <a:latin typeface="Courier"/>
-              </a:rPr>
-              <a:t>, </a:t>
-            </a:r>
-            <a:r>
-              <a:rPr>
-                <a:solidFill>
-                  <a:srgbClr val="AD0000"/>
-                </a:solidFill>
-                <a:latin typeface="Courier"/>
-              </a:rPr>
-              <a:t>30</a:t>
-            </a:r>
-            <a:r>
-              <a:rPr>
-                <a:solidFill>
-                  <a:srgbClr val="003B4F"/>
-                </a:solidFill>
-                <a:latin typeface="Courier"/>
-              </a:rPr>
-              <a:t>, </a:t>
-            </a:r>
-            <a:r>
-              <a:rPr>
-                <a:solidFill>
-                  <a:srgbClr val="657422"/>
-                </a:solidFill>
-                <a:latin typeface="Courier"/>
-              </a:rPr>
-              <a:t>replace =</a:t>
-            </a:r>
-            <a:r>
-              <a:rPr>
-                <a:solidFill>
-                  <a:srgbClr val="003B4F"/>
-                </a:solidFill>
-                <a:latin typeface="Courier"/>
-              </a:rPr>
-              <a:t> </a:t>
-            </a:r>
-            <a:r>
-              <a:rPr>
-                <a:solidFill>
-                  <a:srgbClr val="8F5902"/>
-                </a:solidFill>
-                <a:latin typeface="Courier"/>
-              </a:rPr>
-              <a:t>TRUE</a:t>
-            </a:r>
-            <a:r>
-              <a:rPr>
-                <a:solidFill>
-                  <a:srgbClr val="003B4F"/>
-                </a:solidFill>
-                <a:latin typeface="Courier"/>
-              </a:rPr>
-              <a:t>),</a:t>
-            </a:r>
-            <a:br/>
-            <a:r>
-              <a:rPr>
-                <a:solidFill>
-                  <a:srgbClr val="003B4F"/>
-                </a:solidFill>
-                <a:latin typeface="Courier"/>
-              </a:rPr>
-              <a:t>  </a:t>
-            </a:r>
-            <a:r>
-              <a:rPr>
-                <a:solidFill>
-                  <a:srgbClr val="5E5E5E"/>
-                </a:solidFill>
-                <a:latin typeface="Courier"/>
-              </a:rPr>
-              <a:t># Using rbeta to skew distribution toward higher y values</a:t>
-            </a:r>
-            <a:br/>
-            <a:r>
-              <a:rPr>
-                <a:solidFill>
-                  <a:srgbClr val="003B4F"/>
-                </a:solidFill>
-                <a:latin typeface="Courier"/>
-              </a:rPr>
-              <a:t>  </a:t>
-            </a:r>
-            <a:r>
-              <a:rPr>
-                <a:solidFill>
-                  <a:srgbClr val="5E5E5E"/>
-                </a:solidFill>
-                <a:latin typeface="Courier"/>
-              </a:rPr>
-              <a:t># Alpha=1, Beta=3 creates right-skewed distribution, then scale to 1-10 range</a:t>
-            </a:r>
-            <a:br/>
-            <a:r>
-              <a:rPr>
-                <a:solidFill>
-                  <a:srgbClr val="003B4F"/>
-                </a:solidFill>
-                <a:latin typeface="Courier"/>
-              </a:rPr>
-              <a:t>  </a:t>
-            </a:r>
-            <a:r>
-              <a:rPr>
-                <a:solidFill>
-                  <a:srgbClr val="657422"/>
-                </a:solidFill>
-                <a:latin typeface="Courier"/>
-              </a:rPr>
-              <a:t>y =</a:t>
-            </a:r>
-            <a:r>
-              <a:rPr>
-                <a:solidFill>
-                  <a:srgbClr val="003B4F"/>
-                </a:solidFill>
-                <a:latin typeface="Courier"/>
-              </a:rPr>
-              <a:t> </a:t>
-            </a:r>
-            <a:r>
-              <a:rPr>
-                <a:solidFill>
-                  <a:srgbClr val="4758AB"/>
-                </a:solidFill>
-                <a:latin typeface="Courier"/>
-              </a:rPr>
-              <a:t>round</a:t>
-            </a:r>
-            <a:r>
-              <a:rPr>
-                <a:solidFill>
-                  <a:srgbClr val="003B4F"/>
-                </a:solidFill>
-                <a:latin typeface="Courier"/>
-              </a:rPr>
-              <a:t>(</a:t>
-            </a:r>
-            <a:r>
-              <a:rPr>
-                <a:solidFill>
-                  <a:srgbClr val="4758AB"/>
-                </a:solidFill>
-                <a:latin typeface="Courier"/>
-              </a:rPr>
-              <a:t>rbeta</a:t>
-            </a:r>
-            <a:r>
-              <a:rPr>
-                <a:solidFill>
-                  <a:srgbClr val="003B4F"/>
-                </a:solidFill>
-                <a:latin typeface="Courier"/>
-              </a:rPr>
-              <a:t>(</a:t>
-            </a:r>
-            <a:r>
-              <a:rPr>
-                <a:solidFill>
-                  <a:srgbClr val="AD0000"/>
-                </a:solidFill>
-                <a:latin typeface="Courier"/>
-              </a:rPr>
-              <a:t>30</a:t>
-            </a:r>
-            <a:r>
-              <a:rPr>
-                <a:solidFill>
-                  <a:srgbClr val="003B4F"/>
-                </a:solidFill>
-                <a:latin typeface="Courier"/>
-              </a:rPr>
-              <a:t>, </a:t>
-            </a:r>
-            <a:r>
-              <a:rPr>
-                <a:solidFill>
-                  <a:srgbClr val="AD0000"/>
-                </a:solidFill>
-                <a:latin typeface="Courier"/>
-              </a:rPr>
-              <a:t>3</a:t>
-            </a:r>
-            <a:r>
-              <a:rPr>
-                <a:solidFill>
-                  <a:srgbClr val="003B4F"/>
-                </a:solidFill>
-                <a:latin typeface="Courier"/>
-              </a:rPr>
-              <a:t>, </a:t>
-            </a:r>
-            <a:r>
-              <a:rPr>
-                <a:solidFill>
-                  <a:srgbClr val="AD0000"/>
-                </a:solidFill>
-                <a:latin typeface="Courier"/>
-              </a:rPr>
-              <a:t>1</a:t>
-            </a:r>
-            <a:r>
-              <a:rPr>
-                <a:solidFill>
-                  <a:srgbClr val="003B4F"/>
-                </a:solidFill>
-                <a:latin typeface="Courier"/>
-              </a:rPr>
-              <a:t>) </a:t>
-            </a:r>
-            <a:r>
-              <a:rPr>
-                <a:solidFill>
-                  <a:srgbClr val="5E5E5E"/>
-                </a:solidFill>
-                <a:latin typeface="Courier"/>
-              </a:rPr>
-              <a:t>*</a:t>
-            </a:r>
-            <a:r>
-              <a:rPr>
-                <a:solidFill>
-                  <a:srgbClr val="003B4F"/>
-                </a:solidFill>
-                <a:latin typeface="Courier"/>
-              </a:rPr>
-              <a:t> </a:t>
-            </a:r>
-            <a:r>
-              <a:rPr>
-                <a:solidFill>
-                  <a:srgbClr val="AD0000"/>
-                </a:solidFill>
-                <a:latin typeface="Courier"/>
-              </a:rPr>
-              <a:t>9</a:t>
-            </a:r>
-            <a:r>
-              <a:rPr>
-                <a:solidFill>
-                  <a:srgbClr val="003B4F"/>
-                </a:solidFill>
-                <a:latin typeface="Courier"/>
-              </a:rPr>
-              <a:t> </a:t>
-            </a:r>
-            <a:r>
-              <a:rPr>
-                <a:solidFill>
-                  <a:srgbClr val="5E5E5E"/>
-                </a:solidFill>
-                <a:latin typeface="Courier"/>
-              </a:rPr>
-              <a:t>+</a:t>
-            </a:r>
-            <a:r>
-              <a:rPr>
-                <a:solidFill>
-                  <a:srgbClr val="003B4F"/>
-                </a:solidFill>
-                <a:latin typeface="Courier"/>
-              </a:rPr>
-              <a:t> </a:t>
-            </a:r>
-            <a:r>
-              <a:rPr>
-                <a:solidFill>
-                  <a:srgbClr val="AD0000"/>
-                </a:solidFill>
-                <a:latin typeface="Courier"/>
-              </a:rPr>
-              <a:t>1</a:t>
-            </a:r>
-            <a:r>
-              <a:rPr>
-                <a:solidFill>
-                  <a:srgbClr val="003B4F"/>
-                </a:solidFill>
-                <a:latin typeface="Courier"/>
-              </a:rPr>
-              <a:t>)</a:t>
-            </a:r>
-            <a:br/>
-            <a:r>
-              <a:rPr>
-                <a:solidFill>
-                  <a:srgbClr val="003B4F"/>
-                </a:solidFill>
-                <a:latin typeface="Courier"/>
-              </a:rPr>
-              <a:t>)</a:t>
-            </a:r>
-            <a:br/>
-            <a:br/>
-            <a:r>
-              <a:rPr>
-                <a:solidFill>
-                  <a:srgbClr val="5E5E5E"/>
-                </a:solidFill>
-                <a:latin typeface="Courier"/>
-              </a:rPr>
-              <a:t># Plot the campus and trees</a:t>
-            </a:r>
-            <a:br/>
-            <a:r>
-              <a:rPr>
-                <a:solidFill>
-                  <a:srgbClr val="4758AB"/>
-                </a:solidFill>
-                <a:latin typeface="Courier"/>
-              </a:rPr>
-              <a:t>ggplot</a:t>
-            </a:r>
-            <a:r>
-              <a:rPr>
-                <a:solidFill>
-                  <a:srgbClr val="003B4F"/>
-                </a:solidFill>
-                <a:latin typeface="Courier"/>
-              </a:rPr>
-              <a:t>() </a:t>
-            </a:r>
-            <a:r>
-              <a:rPr>
-                <a:solidFill>
-                  <a:srgbClr val="5E5E5E"/>
-                </a:solidFill>
-                <a:latin typeface="Courier"/>
-              </a:rPr>
-              <a:t>+</a:t>
-            </a:r>
-            <a:br/>
-            <a:r>
-              <a:rPr>
-                <a:solidFill>
-                  <a:srgbClr val="003B4F"/>
-                </a:solidFill>
-                <a:latin typeface="Courier"/>
-              </a:rPr>
-              <a:t>  </a:t>
-            </a:r>
-            <a:r>
-              <a:rPr>
-                <a:solidFill>
-                  <a:srgbClr val="4758AB"/>
-                </a:solidFill>
-                <a:latin typeface="Courier"/>
-              </a:rPr>
-              <a:t>geom_point</a:t>
-            </a:r>
-            <a:r>
-              <a:rPr>
-                <a:solidFill>
-                  <a:srgbClr val="003B4F"/>
-                </a:solidFill>
-                <a:latin typeface="Courier"/>
-              </a:rPr>
-              <a:t>(</a:t>
-            </a:r>
-            <a:r>
-              <a:rPr>
-                <a:solidFill>
-                  <a:srgbClr val="657422"/>
-                </a:solidFill>
-                <a:latin typeface="Courier"/>
-              </a:rPr>
-              <a:t>data =</a:t>
-            </a:r>
-            <a:r>
-              <a:rPr>
-                <a:solidFill>
-                  <a:srgbClr val="003B4F"/>
-                </a:solidFill>
-                <a:latin typeface="Courier"/>
-              </a:rPr>
-              <a:t> campus_grid, </a:t>
-            </a:r>
-            <a:r>
-              <a:rPr>
-                <a:solidFill>
-                  <a:srgbClr val="4758AB"/>
-                </a:solidFill>
-                <a:latin typeface="Courier"/>
-              </a:rPr>
-              <a:t>aes</a:t>
-            </a:r>
-            <a:r>
-              <a:rPr>
-                <a:solidFill>
-                  <a:srgbClr val="003B4F"/>
-                </a:solidFill>
-                <a:latin typeface="Courier"/>
-              </a:rPr>
-              <a:t>(x, y), </a:t>
-            </a:r>
-            <a:r>
-              <a:rPr>
-                <a:solidFill>
-                  <a:srgbClr val="657422"/>
-                </a:solidFill>
-                <a:latin typeface="Courier"/>
-              </a:rPr>
-              <a:t>color =</a:t>
-            </a:r>
-            <a:r>
-              <a:rPr>
-                <a:solidFill>
-                  <a:srgbClr val="003B4F"/>
-                </a:solidFill>
-                <a:latin typeface="Courier"/>
-              </a:rPr>
-              <a:t> </a:t>
-            </a:r>
-            <a:r>
-              <a:rPr>
-                <a:solidFill>
-                  <a:srgbClr val="20794D"/>
-                </a:solidFill>
-                <a:latin typeface="Courier"/>
-              </a:rPr>
-              <a:t>"lightgrey"</a:t>
-            </a:r>
-            <a:r>
-              <a:rPr>
-                <a:solidFill>
-                  <a:srgbClr val="003B4F"/>
-                </a:solidFill>
-                <a:latin typeface="Courier"/>
-              </a:rPr>
-              <a:t>, </a:t>
-            </a:r>
-            <a:r>
-              <a:rPr>
-                <a:solidFill>
-                  <a:srgbClr val="657422"/>
-                </a:solidFill>
-                <a:latin typeface="Courier"/>
-              </a:rPr>
-              <a:t>size =</a:t>
-            </a:r>
-            <a:r>
-              <a:rPr>
-                <a:solidFill>
-                  <a:srgbClr val="003B4F"/>
-                </a:solidFill>
-                <a:latin typeface="Courier"/>
-              </a:rPr>
-              <a:t> </a:t>
-            </a:r>
-            <a:r>
-              <a:rPr>
-                <a:solidFill>
-                  <a:srgbClr val="AD0000"/>
-                </a:solidFill>
-                <a:latin typeface="Courier"/>
-              </a:rPr>
-              <a:t>0.5</a:t>
-            </a:r>
-            <a:r>
-              <a:rPr>
-                <a:solidFill>
-                  <a:srgbClr val="003B4F"/>
-                </a:solidFill>
-                <a:latin typeface="Courier"/>
-              </a:rPr>
-              <a:t>) </a:t>
-            </a:r>
-            <a:r>
-              <a:rPr>
-                <a:solidFill>
-                  <a:srgbClr val="5E5E5E"/>
-                </a:solidFill>
-                <a:latin typeface="Courier"/>
-              </a:rPr>
-              <a:t>+</a:t>
-            </a:r>
-            <a:br/>
-            <a:r>
-              <a:rPr>
-                <a:solidFill>
-                  <a:srgbClr val="003B4F"/>
-                </a:solidFill>
-                <a:latin typeface="Courier"/>
-              </a:rPr>
-              <a:t>  </a:t>
-            </a:r>
-            <a:r>
-              <a:rPr>
-                <a:solidFill>
-                  <a:srgbClr val="4758AB"/>
-                </a:solidFill>
-                <a:latin typeface="Courier"/>
-              </a:rPr>
-              <a:t>geom_point</a:t>
-            </a:r>
-            <a:r>
-              <a:rPr>
-                <a:solidFill>
-                  <a:srgbClr val="003B4F"/>
-                </a:solidFill>
-                <a:latin typeface="Courier"/>
-              </a:rPr>
-              <a:t>(</a:t>
-            </a:r>
-            <a:r>
-              <a:rPr>
-                <a:solidFill>
-                  <a:srgbClr val="657422"/>
-                </a:solidFill>
-                <a:latin typeface="Courier"/>
-              </a:rPr>
-              <a:t>data =</a:t>
-            </a:r>
-            <a:r>
-              <a:rPr>
-                <a:solidFill>
-                  <a:srgbClr val="003B4F"/>
-                </a:solidFill>
-                <a:latin typeface="Courier"/>
-              </a:rPr>
-              <a:t> pine_locations, </a:t>
-            </a:r>
-            <a:r>
-              <a:rPr>
-                <a:solidFill>
-                  <a:srgbClr val="4758AB"/>
-                </a:solidFill>
-                <a:latin typeface="Courier"/>
-              </a:rPr>
-              <a:t>aes</a:t>
-            </a:r>
-            <a:r>
-              <a:rPr>
-                <a:solidFill>
-                  <a:srgbClr val="003B4F"/>
-                </a:solidFill>
-                <a:latin typeface="Courier"/>
-              </a:rPr>
-              <a:t>(x, y), </a:t>
-            </a:r>
-            <a:r>
-              <a:rPr>
-                <a:solidFill>
-                  <a:srgbClr val="657422"/>
-                </a:solidFill>
-                <a:latin typeface="Courier"/>
-              </a:rPr>
-              <a:t>color =</a:t>
-            </a:r>
-            <a:r>
-              <a:rPr>
-                <a:solidFill>
-                  <a:srgbClr val="003B4F"/>
-                </a:solidFill>
-                <a:latin typeface="Courier"/>
-              </a:rPr>
-              <a:t> </a:t>
-            </a:r>
-            <a:r>
-              <a:rPr>
-                <a:solidFill>
-                  <a:srgbClr val="20794D"/>
-                </a:solidFill>
-                <a:latin typeface="Courier"/>
-              </a:rPr>
-              <a:t>"darkgreen"</a:t>
-            </a:r>
-            <a:r>
-              <a:rPr>
-                <a:solidFill>
-                  <a:srgbClr val="003B4F"/>
-                </a:solidFill>
-                <a:latin typeface="Courier"/>
-              </a:rPr>
-              <a:t>, </a:t>
-            </a:r>
-            <a:r>
-              <a:rPr>
-                <a:solidFill>
-                  <a:srgbClr val="657422"/>
-                </a:solidFill>
-                <a:latin typeface="Courier"/>
-              </a:rPr>
-              <a:t>size =</a:t>
-            </a:r>
-            <a:r>
-              <a:rPr>
-                <a:solidFill>
-                  <a:srgbClr val="003B4F"/>
-                </a:solidFill>
-                <a:latin typeface="Courier"/>
-              </a:rPr>
-              <a:t> </a:t>
-            </a:r>
-            <a:r>
-              <a:rPr>
-                <a:solidFill>
-                  <a:srgbClr val="AD0000"/>
-                </a:solidFill>
-                <a:latin typeface="Courier"/>
-              </a:rPr>
-              <a:t>3</a:t>
-            </a:r>
-            <a:r>
-              <a:rPr>
-                <a:solidFill>
-                  <a:srgbClr val="003B4F"/>
-                </a:solidFill>
-                <a:latin typeface="Courier"/>
-              </a:rPr>
-              <a:t>) </a:t>
-            </a:r>
-            <a:r>
-              <a:rPr>
-                <a:solidFill>
-                  <a:srgbClr val="5E5E5E"/>
-                </a:solidFill>
-                <a:latin typeface="Courier"/>
-              </a:rPr>
-              <a:t>+</a:t>
-            </a:r>
-            <a:br/>
-            <a:r>
-              <a:rPr>
-                <a:solidFill>
-                  <a:srgbClr val="003B4F"/>
-                </a:solidFill>
-                <a:latin typeface="Courier"/>
-              </a:rPr>
-              <a:t>  </a:t>
-            </a:r>
-            <a:r>
-              <a:rPr>
-                <a:solidFill>
-                  <a:srgbClr val="4758AB"/>
-                </a:solidFill>
-                <a:latin typeface="Courier"/>
-              </a:rPr>
-              <a:t>theme_minimal</a:t>
-            </a:r>
-            <a:r>
-              <a:rPr>
-                <a:solidFill>
-                  <a:srgbClr val="003B4F"/>
-                </a:solidFill>
-                <a:latin typeface="Courier"/>
-              </a:rPr>
-              <a:t>() </a:t>
-            </a:r>
-            <a:r>
-              <a:rPr>
-                <a:solidFill>
-                  <a:srgbClr val="5E5E5E"/>
-                </a:solidFill>
-                <a:latin typeface="Courier"/>
-              </a:rPr>
-              <a:t>+</a:t>
-            </a:r>
-            <a:br/>
-            <a:r>
-              <a:rPr>
-                <a:solidFill>
-                  <a:srgbClr val="003B4F"/>
-                </a:solidFill>
-                <a:latin typeface="Courier"/>
-              </a:rPr>
-              <a:t>  </a:t>
-            </a:r>
-            <a:r>
-              <a:rPr>
-                <a:solidFill>
-                  <a:srgbClr val="4758AB"/>
-                </a:solidFill>
-                <a:latin typeface="Courier"/>
-              </a:rPr>
-              <a:t>labs</a:t>
-            </a:r>
-            <a:r>
-              <a:rPr>
-                <a:solidFill>
-                  <a:srgbClr val="003B4F"/>
-                </a:solidFill>
-                <a:latin typeface="Courier"/>
-              </a:rPr>
-              <a:t>(</a:t>
-            </a:r>
-            <a:r>
-              <a:rPr>
-                <a:solidFill>
-                  <a:srgbClr val="657422"/>
-                </a:solidFill>
-                <a:latin typeface="Courier"/>
-              </a:rPr>
-              <a:t>title =</a:t>
-            </a:r>
-            <a:r>
-              <a:rPr>
-                <a:solidFill>
-                  <a:srgbClr val="003B4F"/>
-                </a:solidFill>
-                <a:latin typeface="Courier"/>
-              </a:rPr>
-              <a:t> </a:t>
-            </a:r>
-            <a:r>
-              <a:rPr>
-                <a:solidFill>
-                  <a:srgbClr val="20794D"/>
-                </a:solidFill>
-                <a:latin typeface="Courier"/>
-              </a:rPr>
-              <a:t>"Pine Tree Locations on Campus Grid (North Clustered)"</a:t>
-            </a:r>
-            <a:r>
-              <a:rPr>
-                <a:solidFill>
-                  <a:srgbClr val="003B4F"/>
-                </a:solidFill>
-                <a:latin typeface="Courier"/>
-              </a:rPr>
-              <a:t>)</a:t>
-            </a:r>
-          </a:p>
-          <a:p>
             <a:pPr lvl="0" indent="0" marL="1270000">
               <a:buNone/>
             </a:pPr>
@@ -8423,7 +5874,7 @@
 </p:sld>
 </file>
 
-<file path=ppt/slides/slide27.xml><?xml version="1.0" encoding="utf-8"?>
+<file path=ppt/slides/slide26.xml><?xml version="1.0" encoding="utf-8"?>
 <p:sld xmlns:a="http://schemas.openxmlformats.org/drawingml/2006/main" xmlns:r="http://schemas.openxmlformats.org/officeDocument/2006/relationships" xmlns:p="http://schemas.openxmlformats.org/presentationml/2006/main">
   <p:cSld>
     <p:spTree>
@@ -8657,6 +6108,451 @@
 </p:sld>
 </file>
 
+<file path=ppt/slides/slide27.xml><?xml version="1.0" encoding="utf-8"?>
+<p:sld xmlns:a="http://schemas.openxmlformats.org/drawingml/2006/main" xmlns:r="http://schemas.openxmlformats.org/officeDocument/2006/relationships" xmlns:p="http://schemas.openxmlformats.org/presentationml/2006/main">
+  <p:cSld>
+    <p:spTree>
+      <p:nvGrpSpPr>
+        <p:cNvPr id="1" name=""/>
+        <p:cNvGrpSpPr/>
+        <p:nvPr/>
+      </p:nvGrpSpPr>
+      <p:grpSpPr>
+        <a:xfrm>
+          <a:off x="0" y="0"/>
+          <a:ext cx="0" cy="0"/>
+          <a:chOff x="0" y="0"/>
+          <a:chExt cx="0" cy="0"/>
+        </a:xfrm>
+      </p:grpSpPr>
+      <p:sp>
+        <p:nvSpPr>
+          <p:cNvPr id="2" name="Title 1"/>
+          <p:cNvSpPr>
+            <a:spLocks noGrp="1"/>
+          </p:cNvSpPr>
+          <p:nvPr>
+            <p:ph type="title"/>
+          </p:nvPr>
+        </p:nvSpPr>
+        <p:spPr>
+          <a:xfrm>
+            <a:off x="0" y="0"/>
+            <a:ext cx="9144000" cy="582780"/>
+          </a:xfrm>
+        </p:spPr>
+        <p:txBody>
+          <a:bodyPr/>
+          <a:lstStyle/>
+          <a:p>
+            <a:pPr lvl="0" indent="0" marL="0">
+              <a:buNone/>
+            </a:pPr>
+            <a:r>
+              <a:rPr/>
+              <a:t>A Priori Power Analysis</a:t>
+            </a:r>
+          </a:p>
+        </p:txBody>
+      </p:sp>
+      <p:sp>
+        <p:nvSpPr>
+          <p:cNvPr id="3" name="Content Placeholder 2"/>
+          <p:cNvSpPr>
+            <a:spLocks noGrp="1"/>
+          </p:cNvSpPr>
+          <p:nvPr>
+            <p:ph idx="1"/>
+          </p:nvPr>
+        </p:nvSpPr>
+        <p:spPr/>
+        <p:txBody>
+          <a:bodyPr/>
+          <a:lstStyle/>
+          <a:p>
+            <a:pPr lvl="0"/>
+            <a:r>
+              <a:rPr/>
+              <a:t>Using power analysis to plan experiments:</a:t>
+            </a:r>
+          </a:p>
+          <a:p>
+            <a:pPr lvl="0"/>
+            <a:r>
+              <a:rPr b="1"/>
+              <a:t>Sample size calculation:</a:t>
+            </a:r>
+            <a:r>
+              <a:rPr/>
+              <a:t> how many samples will be needed?</a:t>
+            </a:r>
+          </a:p>
+          <a:p>
+            <a:pPr lvl="0"/>
+            <a:r>
+              <a:rPr/>
+              <a:t>Need to know: desired power, variability, significance level, effect size</a:t>
+            </a:r>
+          </a:p>
+          <a:p>
+            <a:pPr lvl="0"/>
+            <a:r>
+              <a:rPr b="1"/>
+              <a:t>Effect size calculation:</a:t>
+            </a:r>
+            <a:r>
+              <a:rPr/>
+              <a:t> what kind of effect can we find, given particular design?</a:t>
+            </a:r>
+          </a:p>
+          <a:p>
+            <a:pPr lvl="0"/>
+            <a:r>
+              <a:rPr/>
+              <a:t>Need to know: desired power, variability, significance level, n</a:t>
+            </a:r>
+          </a:p>
+          <a:p>
+            <a:pPr lvl="0"/>
+            <a:r>
+              <a:rPr/>
+              <a:t>Cohen’s d - standardized measure of effect size used in statistical analysis, particularly when comparing two means</a:t>
+            </a:r>
+          </a:p>
+          <a:p>
+            <a:pPr lvl="1"/>
+            <a:r>
+              <a:rPr/>
+              <a:t>0.2 = small effect</a:t>
+            </a:r>
+          </a:p>
+          <a:p>
+            <a:pPr lvl="1"/>
+            <a:r>
+              <a:rPr/>
+              <a:t>0.5 = medium effect</a:t>
+            </a:r>
+          </a:p>
+          <a:p>
+            <a:pPr lvl="1"/>
+            <a:r>
+              <a:rPr/>
+              <a:t>0.8 = large effect</a:t>
+            </a:r>
+          </a:p>
+          <a:p>
+            <a:pPr lvl="0"/>
+            <a:r>
+              <a:rPr/>
+              <a:t>Helps determine the practical significance of research findings, as opposed to just statistical significance (p-values). A Cohen’s d of 0.8 means that the difference between groups is large enough to be substantial in practical terms - specifically, it indicates that the means differ by 0.8 standard deviations.</a:t>
+            </a:r>
+          </a:p>
+          <a:p>
+            <a:pPr lvl="0" indent="0" marL="0">
+              <a:spcBef>
+                <a:spcPts val="3000"/>
+              </a:spcBef>
+              <a:buNone/>
+            </a:pPr>
+            <a:r>
+              <a:rPr b="1"/>
+              <a:t>A Priori Power Analysis Example</a:t>
+            </a:r>
+          </a:p>
+          <a:p>
+            <a:pPr lvl="1" indent="0" marL="342900">
+              <a:buNone/>
+            </a:pPr>
+            <a:r>
+              <a:rPr/>
+              <a:t>How many samples do you need to find this difference</a:t>
+            </a:r>
+          </a:p>
+          <a:p>
+            <a:pPr lvl="0" indent="0">
+              <a:buNone/>
+            </a:pPr>
+            <a:r>
+              <a:rPr>
+                <a:solidFill>
+                  <a:srgbClr val="5E5E5E"/>
+                </a:solidFill>
+                <a:latin typeface="Courier"/>
+              </a:rPr>
+              <a:t># A priori power analysis for t-test</a:t>
+            </a:r>
+            <a:br/>
+            <a:r>
+              <a:rPr>
+                <a:solidFill>
+                  <a:srgbClr val="5E5E5E"/>
+                </a:solidFill>
+                <a:latin typeface="Courier"/>
+              </a:rPr>
+              <a:t># How many samples needed per group?</a:t>
+            </a:r>
+            <a:br/>
+            <a:br/>
+            <a:r>
+              <a:rPr>
+                <a:solidFill>
+                  <a:srgbClr val="5E5E5E"/>
+                </a:solidFill>
+                <a:latin typeface="Courier"/>
+              </a:rPr>
+              <a:t># Parameters</a:t>
+            </a:r>
+            <a:br/>
+            <a:r>
+              <a:rPr>
+                <a:solidFill>
+                  <a:srgbClr val="003B4F"/>
+                </a:solidFill>
+                <a:latin typeface="Courier"/>
+              </a:rPr>
+              <a:t>effect_size &lt;- </a:t>
+            </a:r>
+            <a:r>
+              <a:rPr>
+                <a:solidFill>
+                  <a:srgbClr val="AD0000"/>
+                </a:solidFill>
+                <a:latin typeface="Courier"/>
+              </a:rPr>
+              <a:t>0.8</a:t>
+            </a:r>
+            <a:r>
+              <a:rPr>
+                <a:solidFill>
+                  <a:srgbClr val="003B4F"/>
+                </a:solidFill>
+                <a:latin typeface="Courier"/>
+              </a:rPr>
+              <a:t>  </a:t>
+            </a:r>
+            <a:r>
+              <a:rPr>
+                <a:solidFill>
+                  <a:srgbClr val="5E5E5E"/>
+                </a:solidFill>
+                <a:latin typeface="Courier"/>
+              </a:rPr>
+              <a:t># Cohen's d</a:t>
+            </a:r>
+            <a:br/>
+            <a:r>
+              <a:rPr>
+                <a:solidFill>
+                  <a:srgbClr val="003B4F"/>
+                </a:solidFill>
+                <a:latin typeface="Courier"/>
+              </a:rPr>
+              <a:t>significance &lt;- </a:t>
+            </a:r>
+            <a:r>
+              <a:rPr>
+                <a:solidFill>
+                  <a:srgbClr val="AD0000"/>
+                </a:solidFill>
+                <a:latin typeface="Courier"/>
+              </a:rPr>
+              <a:t>0.05</a:t>
+            </a:r>
+            <a:br/>
+            <a:r>
+              <a:rPr>
+                <a:solidFill>
+                  <a:srgbClr val="003B4F"/>
+                </a:solidFill>
+                <a:latin typeface="Courier"/>
+              </a:rPr>
+              <a:t>desired_power &lt;- </a:t>
+            </a:r>
+            <a:r>
+              <a:rPr>
+                <a:solidFill>
+                  <a:srgbClr val="AD0000"/>
+                </a:solidFill>
+                <a:latin typeface="Courier"/>
+              </a:rPr>
+              <a:t>0.8</a:t>
+            </a:r>
+            <a:br/>
+            <a:br/>
+            <a:r>
+              <a:rPr>
+                <a:solidFill>
+                  <a:srgbClr val="5E5E5E"/>
+                </a:solidFill>
+                <a:latin typeface="Courier"/>
+              </a:rPr>
+              <a:t># Calculate sample size needed</a:t>
+            </a:r>
+            <a:br/>
+            <a:r>
+              <a:rPr>
+                <a:solidFill>
+                  <a:srgbClr val="4758AB"/>
+                </a:solidFill>
+                <a:latin typeface="Courier"/>
+              </a:rPr>
+              <a:t>pwr.t.test</a:t>
+            </a:r>
+            <a:r>
+              <a:rPr>
+                <a:solidFill>
+                  <a:srgbClr val="003B4F"/>
+                </a:solidFill>
+                <a:latin typeface="Courier"/>
+              </a:rPr>
+              <a:t>(</a:t>
+            </a:r>
+            <a:r>
+              <a:rPr>
+                <a:solidFill>
+                  <a:srgbClr val="657422"/>
+                </a:solidFill>
+                <a:latin typeface="Courier"/>
+              </a:rPr>
+              <a:t>d =</a:t>
+            </a:r>
+            <a:r>
+              <a:rPr>
+                <a:solidFill>
+                  <a:srgbClr val="003B4F"/>
+                </a:solidFill>
+                <a:latin typeface="Courier"/>
+              </a:rPr>
+              <a:t> effect_size, </a:t>
+            </a:r>
+            <a:br/>
+            <a:r>
+              <a:rPr>
+                <a:solidFill>
+                  <a:srgbClr val="003B4F"/>
+                </a:solidFill>
+                <a:latin typeface="Courier"/>
+              </a:rPr>
+              <a:t>           </a:t>
+            </a:r>
+            <a:r>
+              <a:rPr>
+                <a:solidFill>
+                  <a:srgbClr val="657422"/>
+                </a:solidFill>
+                <a:latin typeface="Courier"/>
+              </a:rPr>
+              <a:t>sig.level =</a:t>
+            </a:r>
+            <a:r>
+              <a:rPr>
+                <a:solidFill>
+                  <a:srgbClr val="003B4F"/>
+                </a:solidFill>
+                <a:latin typeface="Courier"/>
+              </a:rPr>
+              <a:t> significance,</a:t>
+            </a:r>
+            <a:br/>
+            <a:r>
+              <a:rPr>
+                <a:solidFill>
+                  <a:srgbClr val="003B4F"/>
+                </a:solidFill>
+                <a:latin typeface="Courier"/>
+              </a:rPr>
+              <a:t>           </a:t>
+            </a:r>
+            <a:r>
+              <a:rPr>
+                <a:solidFill>
+                  <a:srgbClr val="657422"/>
+                </a:solidFill>
+                <a:latin typeface="Courier"/>
+              </a:rPr>
+              <a:t>power =</a:t>
+            </a:r>
+            <a:r>
+              <a:rPr>
+                <a:solidFill>
+                  <a:srgbClr val="003B4F"/>
+                </a:solidFill>
+                <a:latin typeface="Courier"/>
+              </a:rPr>
+              <a:t> desired_power,</a:t>
+            </a:r>
+            <a:br/>
+            <a:r>
+              <a:rPr>
+                <a:solidFill>
+                  <a:srgbClr val="003B4F"/>
+                </a:solidFill>
+                <a:latin typeface="Courier"/>
+              </a:rPr>
+              <a:t>           </a:t>
+            </a:r>
+            <a:r>
+              <a:rPr>
+                <a:solidFill>
+                  <a:srgbClr val="657422"/>
+                </a:solidFill>
+                <a:latin typeface="Courier"/>
+              </a:rPr>
+              <a:t>type =</a:t>
+            </a:r>
+            <a:r>
+              <a:rPr>
+                <a:solidFill>
+                  <a:srgbClr val="003B4F"/>
+                </a:solidFill>
+                <a:latin typeface="Courier"/>
+              </a:rPr>
+              <a:t> </a:t>
+            </a:r>
+            <a:r>
+              <a:rPr>
+                <a:solidFill>
+                  <a:srgbClr val="20794D"/>
+                </a:solidFill>
+                <a:latin typeface="Courier"/>
+              </a:rPr>
+              <a:t>"two.sample"</a:t>
+            </a:r>
+            <a:r>
+              <a:rPr>
+                <a:solidFill>
+                  <a:srgbClr val="003B4F"/>
+                </a:solidFill>
+                <a:latin typeface="Courier"/>
+              </a:rPr>
+              <a:t>)</a:t>
+            </a:r>
+          </a:p>
+          <a:p>
+            <a:pPr lvl="0" indent="0">
+              <a:buNone/>
+            </a:pPr>
+            <a:r>
+              <a:rPr>
+                <a:latin typeface="Courier"/>
+              </a:rPr>
+              <a:t>
+     Two-sample t test power calculation 
+              n = 25.52458
+              d = 0.8
+      sig.level = 0.05
+          power = 0.8
+    alternative = two.sided
+NOTE: n is number in *each* group</a:t>
+            </a:r>
+          </a:p>
+        </p:txBody>
+      </p:sp>
+    </p:spTree>
+  </p:cSld>
+</p:sld>
+</file>
+
 <file path=ppt/slides/slide28.xml><?xml version="1.0" encoding="utf-8"?>
 <p:sld xmlns:a="http://schemas.openxmlformats.org/drawingml/2006/main" xmlns:r="http://schemas.openxmlformats.org/officeDocument/2006/relationships" xmlns:p="http://schemas.openxmlformats.org/presentationml/2006/main">
   <p:cSld>
@@ -8699,7 +6595,7 @@
             </a:pPr>
             <a:r>
               <a:rPr/>
-              <a:t>A Priori Power Analysis</a:t>
+              <a:t>Post Hoc Power Analysis</a:t>
             </a:r>
           </a:p>
         </p:txBody>
@@ -8722,377 +6618,49 @@
             <a:pPr lvl="0"/>
             <a:r>
               <a:rPr/>
-              <a:t>Using power analysis to plan experiments:</a:t>
-            </a:r>
-          </a:p>
-          <a:p>
-            <a:pPr lvl="0"/>
-            <a:r>
-              <a:rPr b="1"/>
-              <a:t>Sample size calculation:</a:t>
-            </a:r>
-            <a:r>
-              <a:rPr/>
-              <a:t> how many samples will be needed?</a:t>
-            </a:r>
-          </a:p>
-          <a:p>
-            <a:pPr lvl="0"/>
-            <a:r>
-              <a:rPr/>
-              <a:t>Need to know: desired power, variability, significance level, effect size</a:t>
-            </a:r>
-          </a:p>
-          <a:p>
-            <a:pPr lvl="0"/>
-            <a:r>
-              <a:rPr b="1"/>
-              <a:t>Effect size calculation:</a:t>
-            </a:r>
-            <a:r>
-              <a:rPr/>
-              <a:t> what kind of effect can we find, given particular design?</a:t>
-            </a:r>
-          </a:p>
-          <a:p>
-            <a:pPr lvl="0"/>
-            <a:r>
-              <a:rPr/>
-              <a:t>Need to know: desired power, variability, significance level, n</a:t>
-            </a:r>
-          </a:p>
-          <a:p>
-            <a:pPr lvl="0"/>
-            <a:r>
-              <a:rPr/>
-              <a:t>Cohen’s d - standardized measure of effect size used in statistical analysis, particularly when comparing two means</a:t>
+              <a:t>Imagine you did not reject null hypothesis - still worth publishing result?</a:t>
+            </a:r>
+          </a:p>
+          <a:p>
+            <a:pPr lvl="0"/>
+            <a:r>
+              <a:rPr/>
+              <a:t>Is non-significant result due to low power (poor design) or actual no-effect situation?</a:t>
             </a:r>
           </a:p>
           <a:p>
             <a:pPr lvl="1"/>
             <a:r>
               <a:rPr/>
-              <a:t>0.2 = small effect</a:t>
+              <a:t>Have n and estimate of σ</a:t>
             </a:r>
           </a:p>
           <a:p>
             <a:pPr lvl="1"/>
             <a:r>
               <a:rPr/>
-              <a:t>0.5 = medium effect</a:t>
+              <a:t>Need to define effect size that wanted to detect</a:t>
             </a:r>
           </a:p>
           <a:p>
             <a:pPr lvl="1"/>
             <a:r>
               <a:rPr/>
-              <a:t>0.8 = large effect</a:t>
-            </a:r>
-          </a:p>
-          <a:p>
-            <a:pPr lvl="0"/>
-            <a:r>
-              <a:rPr/>
-              <a:t>Helps determine the practical significance of research findings, as opposed to just statistical significance (p-values). A Cohen’s d of 0.8 means that the difference between groups is large enough to be substantial in practical terms - specifically, it indicates that the means differ by 0.8 standard deviations.</a:t>
-            </a:r>
-          </a:p>
-          <a:p>
-            <a:pPr lvl="0" indent="0" marL="0">
-              <a:spcBef>
-                <a:spcPts val="3000"/>
-              </a:spcBef>
-              <a:buNone/>
-            </a:pPr>
-            <a:r>
-              <a:rPr b="1"/>
-              <a:t>A Priori Power Analysis Example</a:t>
-            </a:r>
-          </a:p>
-          <a:p>
-            <a:pPr lvl="1" indent="0" marL="342900">
-              <a:buNone/>
-            </a:pPr>
-            <a:r>
-              <a:rPr/>
-              <a:t>How many samples do you need to find this difference</a:t>
-            </a:r>
-          </a:p>
-          <a:p>
-            <a:pPr lvl="0" indent="0">
-              <a:buNone/>
-            </a:pPr>
-            <a:r>
-              <a:rPr>
-                <a:solidFill>
-                  <a:srgbClr val="5E5E5E"/>
-                </a:solidFill>
-                <a:latin typeface="Courier"/>
-              </a:rPr>
-              <a:t># A priori power analysis for t-test</a:t>
-            </a:r>
-            <a:br/>
-            <a:r>
-              <a:rPr>
-                <a:solidFill>
-                  <a:srgbClr val="5E5E5E"/>
-                </a:solidFill>
-                <a:latin typeface="Courier"/>
-              </a:rPr>
-              <a:t># How many samples needed per group?</a:t>
-            </a:r>
-            <a:br/>
-            <a:br/>
-            <a:r>
-              <a:rPr>
-                <a:solidFill>
-                  <a:srgbClr val="5E5E5E"/>
-                </a:solidFill>
-                <a:latin typeface="Courier"/>
-              </a:rPr>
-              <a:t># Parameters</a:t>
-            </a:r>
-            <a:br/>
-            <a:r>
-              <a:rPr>
-                <a:solidFill>
-                  <a:srgbClr val="003B4F"/>
-                </a:solidFill>
-                <a:latin typeface="Courier"/>
-              </a:rPr>
-              <a:t>effect_size &lt;- </a:t>
-            </a:r>
-            <a:r>
-              <a:rPr>
-                <a:solidFill>
-                  <a:srgbClr val="AD0000"/>
-                </a:solidFill>
-                <a:latin typeface="Courier"/>
-              </a:rPr>
-              <a:t>0.8</a:t>
-            </a:r>
-            <a:r>
-              <a:rPr>
-                <a:solidFill>
-                  <a:srgbClr val="003B4F"/>
-                </a:solidFill>
-                <a:latin typeface="Courier"/>
-              </a:rPr>
-              <a:t>  </a:t>
-            </a:r>
-            <a:r>
-              <a:rPr>
-                <a:solidFill>
-                  <a:srgbClr val="5E5E5E"/>
-                </a:solidFill>
-                <a:latin typeface="Courier"/>
-              </a:rPr>
-              <a:t># Cohen's d</a:t>
-            </a:r>
-            <a:br/>
-            <a:r>
-              <a:rPr>
-                <a:solidFill>
-                  <a:srgbClr val="003B4F"/>
-                </a:solidFill>
-                <a:latin typeface="Courier"/>
-              </a:rPr>
-              <a:t>significance &lt;- </a:t>
-            </a:r>
-            <a:r>
-              <a:rPr>
-                <a:solidFill>
-                  <a:srgbClr val="AD0000"/>
-                </a:solidFill>
-                <a:latin typeface="Courier"/>
-              </a:rPr>
-              <a:t>0.05</a:t>
-            </a:r>
-            <a:br/>
-            <a:r>
-              <a:rPr>
-                <a:solidFill>
-                  <a:srgbClr val="003B4F"/>
-                </a:solidFill>
-                <a:latin typeface="Courier"/>
-              </a:rPr>
-              <a:t>desired_power &lt;- </a:t>
-            </a:r>
-            <a:r>
-              <a:rPr>
-                <a:solidFill>
-                  <a:srgbClr val="AD0000"/>
-                </a:solidFill>
-                <a:latin typeface="Courier"/>
-              </a:rPr>
-              <a:t>0.8</a:t>
-            </a:r>
-            <a:br/>
-            <a:br/>
-            <a:r>
-              <a:rPr>
-                <a:solidFill>
-                  <a:srgbClr val="5E5E5E"/>
-                </a:solidFill>
-                <a:latin typeface="Courier"/>
-              </a:rPr>
-              <a:t># Calculate sample size needed</a:t>
-            </a:r>
-            <a:br/>
-            <a:r>
-              <a:rPr>
-                <a:solidFill>
-                  <a:srgbClr val="4758AB"/>
-                </a:solidFill>
-                <a:latin typeface="Courier"/>
-              </a:rPr>
-              <a:t>pwr.t.test</a:t>
-            </a:r>
-            <a:r>
-              <a:rPr>
-                <a:solidFill>
-                  <a:srgbClr val="003B4F"/>
-                </a:solidFill>
-                <a:latin typeface="Courier"/>
-              </a:rPr>
-              <a:t>(</a:t>
-            </a:r>
-            <a:r>
-              <a:rPr>
-                <a:solidFill>
-                  <a:srgbClr val="657422"/>
-                </a:solidFill>
-                <a:latin typeface="Courier"/>
-              </a:rPr>
-              <a:t>d =</a:t>
-            </a:r>
-            <a:r>
-              <a:rPr>
-                <a:solidFill>
-                  <a:srgbClr val="003B4F"/>
-                </a:solidFill>
-                <a:latin typeface="Courier"/>
-              </a:rPr>
-              <a:t> effect_size, </a:t>
-            </a:r>
-            <a:br/>
-            <a:r>
-              <a:rPr>
-                <a:solidFill>
-                  <a:srgbClr val="003B4F"/>
-                </a:solidFill>
-                <a:latin typeface="Courier"/>
-              </a:rPr>
-              <a:t>           </a:t>
-            </a:r>
-            <a:r>
-              <a:rPr>
-                <a:solidFill>
-                  <a:srgbClr val="657422"/>
-                </a:solidFill>
-                <a:latin typeface="Courier"/>
-              </a:rPr>
-              <a:t>sig.level =</a:t>
-            </a:r>
-            <a:r>
-              <a:rPr>
-                <a:solidFill>
-                  <a:srgbClr val="003B4F"/>
-                </a:solidFill>
-                <a:latin typeface="Courier"/>
-              </a:rPr>
-              <a:t> significance,</a:t>
-            </a:r>
-            <a:br/>
-            <a:r>
-              <a:rPr>
-                <a:solidFill>
-                  <a:srgbClr val="003B4F"/>
-                </a:solidFill>
-                <a:latin typeface="Courier"/>
-              </a:rPr>
-              <a:t>           </a:t>
-            </a:r>
-            <a:r>
-              <a:rPr>
-                <a:solidFill>
-                  <a:srgbClr val="657422"/>
-                </a:solidFill>
-                <a:latin typeface="Courier"/>
-              </a:rPr>
-              <a:t>power =</a:t>
-            </a:r>
-            <a:r>
-              <a:rPr>
-                <a:solidFill>
-                  <a:srgbClr val="003B4F"/>
-                </a:solidFill>
-                <a:latin typeface="Courier"/>
-              </a:rPr>
-              <a:t> desired_power,</a:t>
-            </a:r>
-            <a:br/>
-            <a:r>
-              <a:rPr>
-                <a:solidFill>
-                  <a:srgbClr val="003B4F"/>
-                </a:solidFill>
-                <a:latin typeface="Courier"/>
-              </a:rPr>
-              <a:t>           </a:t>
-            </a:r>
-            <a:r>
-              <a:rPr>
-                <a:solidFill>
-                  <a:srgbClr val="657422"/>
-                </a:solidFill>
-                <a:latin typeface="Courier"/>
-              </a:rPr>
-              <a:t>type =</a:t>
-            </a:r>
-            <a:r>
-              <a:rPr>
-                <a:solidFill>
-                  <a:srgbClr val="003B4F"/>
-                </a:solidFill>
-                <a:latin typeface="Courier"/>
-              </a:rPr>
-              <a:t> </a:t>
-            </a:r>
-            <a:r>
-              <a:rPr>
-                <a:solidFill>
-                  <a:srgbClr val="20794D"/>
-                </a:solidFill>
-                <a:latin typeface="Courier"/>
-              </a:rPr>
-              <a:t>"two.sample"</a:t>
-            </a:r>
-            <a:r>
-              <a:rPr>
-                <a:solidFill>
-                  <a:srgbClr val="003B4F"/>
-                </a:solidFill>
-                <a:latin typeface="Courier"/>
-              </a:rPr>
-              <a:t>)</a:t>
-            </a:r>
-          </a:p>
-          <a:p>
-            <a:pPr lvl="0" indent="0">
-              <a:buNone/>
-            </a:pPr>
-            <a:r>
-              <a:rPr>
-                <a:latin typeface="Courier"/>
-              </a:rPr>
-              <a:t>
-     Two-sample t test power calculation 
-              n = 25.52458
-              d = 0.8
-      sig.level = 0.05
-          power = 0.8
-    alternative = two.sided
-NOTE: n is number in *each* group</a:t>
+              <a:t>In return get estimate of experiment’s power</a:t>
+            </a:r>
+          </a:p>
+          <a:p>
+            <a:pPr lvl="0"/>
+            <a:r>
+              <a:rPr/>
+              <a:t>Cohen’s d is calculated as: d = (Mean1 - Mean2) / SD_pooled Where SD_pooled is the pooled standard deviation of both groups.</a:t>
+            </a:r>
+          </a:p>
+          <a:p>
+            <a:pPr lvl="0"/>
+            <a:r>
+              <a:rPr/>
+              <a:t>Can help convince reviewers that you are a good experimenter, but there really is no effect… please publish my non-significant finding!</a:t>
             </a:r>
           </a:p>
         </p:txBody>
@@ -9144,7 +6712,7 @@
             </a:pPr>
             <a:r>
               <a:rPr/>
-              <a:t>Post Hoc Power Analysis</a:t>
+              <a:t>Post Hoc Power Analysis Example</a:t>
             </a:r>
           </a:p>
         </p:txBody>
@@ -9164,52 +6732,317 @@
           <a:bodyPr/>
           <a:lstStyle/>
           <a:p>
-            <a:pPr lvl="0"/>
-            <a:r>
-              <a:rPr/>
-              <a:t>Imagine you did not reject null hypothesis - still worth publishing result?</a:t>
-            </a:r>
-          </a:p>
-          <a:p>
-            <a:pPr lvl="0"/>
-            <a:r>
-              <a:rPr/>
-              <a:t>Is non-significant result due to low power (poor design) or actual no-effect situation?</a:t>
-            </a:r>
-          </a:p>
-          <a:p>
-            <a:pPr lvl="1"/>
-            <a:r>
-              <a:rPr/>
-              <a:t>Have n and estimate of σ</a:t>
-            </a:r>
-          </a:p>
-          <a:p>
-            <a:pPr lvl="1"/>
-            <a:r>
-              <a:rPr/>
-              <a:t>Need to define effect size that wanted to detect</a:t>
-            </a:r>
-          </a:p>
-          <a:p>
-            <a:pPr lvl="1"/>
-            <a:r>
-              <a:rPr/>
-              <a:t>In return get estimate of experiment’s power</a:t>
-            </a:r>
-          </a:p>
-          <a:p>
-            <a:pPr lvl="0"/>
-            <a:r>
-              <a:rPr/>
-              <a:t>Cohen’s d is calculated as: d = (Mean1 - Mean2) / SD_pooled Where SD_pooled is the pooled standard deviation of both groups.</a:t>
-            </a:r>
-          </a:p>
-          <a:p>
-            <a:pPr lvl="0"/>
-            <a:r>
-              <a:rPr/>
-              <a:t>Can help convince reviewers that you are a good experimenter, but there really is no effect… please publish my non-significant finding!</a:t>
+            <a:pPr lvl="0" indent="0">
+              <a:buNone/>
+            </a:pPr>
+            <a:r>
+              <a:rPr>
+                <a:solidFill>
+                  <a:srgbClr val="5E5E5E"/>
+                </a:solidFill>
+                <a:latin typeface="Courier"/>
+              </a:rPr>
+              <a:t># Post hoc power analysis</a:t>
+            </a:r>
+            <a:br/>
+            <a:r>
+              <a:rPr>
+                <a:solidFill>
+                  <a:srgbClr val="5E5E5E"/>
+                </a:solidFill>
+                <a:latin typeface="Courier"/>
+              </a:rPr>
+              <a:t># If we had n = 20 per group</a:t>
+            </a:r>
+            <a:br/>
+            <a:br/>
+            <a:r>
+              <a:rPr>
+                <a:solidFill>
+                  <a:srgbClr val="5E5E5E"/>
+                </a:solidFill>
+                <a:latin typeface="Courier"/>
+              </a:rPr>
+              <a:t># Parameters</a:t>
+            </a:r>
+            <a:br/>
+            <a:r>
+              <a:rPr>
+                <a:solidFill>
+                  <a:srgbClr val="003B4F"/>
+                </a:solidFill>
+                <a:latin typeface="Courier"/>
+              </a:rPr>
+              <a:t>effect_size &lt;- </a:t>
+            </a:r>
+            <a:r>
+              <a:rPr>
+                <a:solidFill>
+                  <a:srgbClr val="AD0000"/>
+                </a:solidFill>
+                <a:latin typeface="Courier"/>
+              </a:rPr>
+              <a:t>0.5</a:t>
+            </a:r>
+            <a:r>
+              <a:rPr>
+                <a:solidFill>
+                  <a:srgbClr val="003B4F"/>
+                </a:solidFill>
+                <a:latin typeface="Courier"/>
+              </a:rPr>
+              <a:t>  </a:t>
+            </a:r>
+            <a:r>
+              <a:rPr>
+                <a:solidFill>
+                  <a:srgbClr val="5E5E5E"/>
+                </a:solidFill>
+                <a:latin typeface="Courier"/>
+              </a:rPr>
+              <a:t># Medium effect size</a:t>
+            </a:r>
+            <a:br/>
+            <a:r>
+              <a:rPr>
+                <a:solidFill>
+                  <a:srgbClr val="003B4F"/>
+                </a:solidFill>
+                <a:latin typeface="Courier"/>
+              </a:rPr>
+              <a:t>significance &lt;- </a:t>
+            </a:r>
+            <a:r>
+              <a:rPr>
+                <a:solidFill>
+                  <a:srgbClr val="AD0000"/>
+                </a:solidFill>
+                <a:latin typeface="Courier"/>
+              </a:rPr>
+              <a:t>0.05</a:t>
+            </a:r>
+            <a:br/>
+            <a:r>
+              <a:rPr>
+                <a:solidFill>
+                  <a:srgbClr val="003B4F"/>
+                </a:solidFill>
+                <a:latin typeface="Courier"/>
+              </a:rPr>
+              <a:t>sample_size &lt;- </a:t>
+            </a:r>
+            <a:r>
+              <a:rPr>
+                <a:solidFill>
+                  <a:srgbClr val="AD0000"/>
+                </a:solidFill>
+                <a:latin typeface="Courier"/>
+              </a:rPr>
+              <a:t>20</a:t>
+            </a:r>
+            <a:r>
+              <a:rPr>
+                <a:solidFill>
+                  <a:srgbClr val="003B4F"/>
+                </a:solidFill>
+                <a:latin typeface="Courier"/>
+              </a:rPr>
+              <a:t>  </a:t>
+            </a:r>
+            <a:r>
+              <a:rPr>
+                <a:solidFill>
+                  <a:srgbClr val="5E5E5E"/>
+                </a:solidFill>
+                <a:latin typeface="Courier"/>
+              </a:rPr>
+              <a:t># per group</a:t>
+            </a:r>
+            <a:br/>
+            <a:br/>
+            <a:r>
+              <a:rPr>
+                <a:solidFill>
+                  <a:srgbClr val="5E5E5E"/>
+                </a:solidFill>
+                <a:latin typeface="Courier"/>
+              </a:rPr>
+              <a:t># Calculate achieved power</a:t>
+            </a:r>
+            <a:br/>
+            <a:r>
+              <a:rPr>
+                <a:solidFill>
+                  <a:srgbClr val="4758AB"/>
+                </a:solidFill>
+                <a:latin typeface="Courier"/>
+              </a:rPr>
+              <a:t>pwr.t.test</a:t>
+            </a:r>
+            <a:r>
+              <a:rPr>
+                <a:solidFill>
+                  <a:srgbClr val="003B4F"/>
+                </a:solidFill>
+                <a:latin typeface="Courier"/>
+              </a:rPr>
+              <a:t>(</a:t>
+            </a:r>
+            <a:r>
+              <a:rPr>
+                <a:solidFill>
+                  <a:srgbClr val="657422"/>
+                </a:solidFill>
+                <a:latin typeface="Courier"/>
+              </a:rPr>
+              <a:t>n =</a:t>
+            </a:r>
+            <a:r>
+              <a:rPr>
+                <a:solidFill>
+                  <a:srgbClr val="003B4F"/>
+                </a:solidFill>
+                <a:latin typeface="Courier"/>
+              </a:rPr>
+              <a:t> sample_size,</a:t>
+            </a:r>
+            <a:br/>
+            <a:r>
+              <a:rPr>
+                <a:solidFill>
+                  <a:srgbClr val="003B4F"/>
+                </a:solidFill>
+                <a:latin typeface="Courier"/>
+              </a:rPr>
+              <a:t>           </a:t>
+            </a:r>
+            <a:r>
+              <a:rPr>
+                <a:solidFill>
+                  <a:srgbClr val="657422"/>
+                </a:solidFill>
+                <a:latin typeface="Courier"/>
+              </a:rPr>
+              <a:t>d =</a:t>
+            </a:r>
+            <a:r>
+              <a:rPr>
+                <a:solidFill>
+                  <a:srgbClr val="003B4F"/>
+                </a:solidFill>
+                <a:latin typeface="Courier"/>
+              </a:rPr>
+              <a:t> effect_size,</a:t>
+            </a:r>
+            <a:br/>
+            <a:r>
+              <a:rPr>
+                <a:solidFill>
+                  <a:srgbClr val="003B4F"/>
+                </a:solidFill>
+                <a:latin typeface="Courier"/>
+              </a:rPr>
+              <a:t>           </a:t>
+            </a:r>
+            <a:r>
+              <a:rPr>
+                <a:solidFill>
+                  <a:srgbClr val="657422"/>
+                </a:solidFill>
+                <a:latin typeface="Courier"/>
+              </a:rPr>
+              <a:t>sig.level =</a:t>
+            </a:r>
+            <a:r>
+              <a:rPr>
+                <a:solidFill>
+                  <a:srgbClr val="003B4F"/>
+                </a:solidFill>
+                <a:latin typeface="Courier"/>
+              </a:rPr>
+              <a:t> </a:t>
+            </a:r>
+            <a:r>
+              <a:rPr>
+                <a:solidFill>
+                  <a:srgbClr val="AD0000"/>
+                </a:solidFill>
+                <a:latin typeface="Courier"/>
+              </a:rPr>
+              <a:t>0.05</a:t>
+            </a:r>
+            <a:r>
+              <a:rPr>
+                <a:solidFill>
+                  <a:srgbClr val="003B4F"/>
+                </a:solidFill>
+                <a:latin typeface="Courier"/>
+              </a:rPr>
+              <a:t>,</a:t>
+            </a:r>
+            <a:br/>
+            <a:r>
+              <a:rPr>
+                <a:solidFill>
+                  <a:srgbClr val="003B4F"/>
+                </a:solidFill>
+                <a:latin typeface="Courier"/>
+              </a:rPr>
+              <a:t>           </a:t>
+            </a:r>
+            <a:r>
+              <a:rPr>
+                <a:solidFill>
+                  <a:srgbClr val="657422"/>
+                </a:solidFill>
+                <a:latin typeface="Courier"/>
+              </a:rPr>
+              <a:t>type =</a:t>
+            </a:r>
+            <a:r>
+              <a:rPr>
+                <a:solidFill>
+                  <a:srgbClr val="003B4F"/>
+                </a:solidFill>
+                <a:latin typeface="Courier"/>
+              </a:rPr>
+              <a:t> </a:t>
+            </a:r>
+            <a:r>
+              <a:rPr>
+                <a:solidFill>
+                  <a:srgbClr val="20794D"/>
+                </a:solidFill>
+                <a:latin typeface="Courier"/>
+              </a:rPr>
+              <a:t>"two.sample"</a:t>
+            </a:r>
+            <a:r>
+              <a:rPr>
+                <a:solidFill>
+                  <a:srgbClr val="003B4F"/>
+                </a:solidFill>
+                <a:latin typeface="Courier"/>
+              </a:rPr>
+              <a:t>)</a:t>
+            </a:r>
+          </a:p>
+          <a:p>
+            <a:pPr lvl="0" indent="0">
+              <a:buNone/>
+            </a:pPr>
+            <a:r>
+              <a:rPr>
+                <a:latin typeface="Courier"/>
+              </a:rPr>
+              <a:t>
+     Two-sample t test power calculation 
+              n = 20
+              d = 0.5
+      sig.level = 0.05
+          power = 0.337939
+    alternative = two.sided
+NOTE: n is number in *each* group</a:t>
             </a:r>
           </a:p>
         </p:txBody>
@@ -9484,7 +7317,7 @@
             </a:pPr>
             <a:r>
               <a:rPr/>
-              <a:t>Post Hoc Power Analysis Example</a:t>
+              <a:t>Activity 6: Power Analysis for Pine Needle Experiment</a:t>
             </a:r>
           </a:p>
         </p:txBody>
@@ -9504,6 +7337,24 @@
           <a:bodyPr/>
           <a:lstStyle/>
           <a:p>
+            <a:pPr lvl="0" indent="0" marL="1270000">
+              <a:buNone/>
+            </a:pPr>
+            <a:r>
+              <a:rPr sz="2000" b="1"/>
+              <a:t>Activity 6: Power Analysis for Pine Needle Experiment</a:t>
+            </a:r>
+          </a:p>
+          <a:p>
+            <a:pPr lvl="0" indent="0" marL="1270000">
+              <a:buNone/>
+            </a:pPr>
+            <a:r>
+              <a:rPr sz="2000"/>
+              <a:t>Let’s design a study to compare needle lengths between exposed and sheltered pine trees:</a:t>
+            </a:r>
+          </a:p>
+          <a:p>
             <a:pPr lvl="0" indent="0">
               <a:buNone/>
             </a:pPr>
@@ -9514,17 +7365,118 @@
                 </a:solidFill>
                 <a:latin typeface="Courier"/>
               </a:rPr>
-              <a:t># Post hoc power analysis</a:t>
+              <a:t># Based on pilot data, we have these estimates:</a:t>
             </a:r>
             <a:br/>
             <a:r>
               <a:rPr>
                 <a:solidFill>
+                  <a:srgbClr val="003B4F"/>
+                </a:solidFill>
+                <a:latin typeface="Courier"/>
+              </a:rPr>
+              <a:t>exposed_mean &lt;- </a:t>
+            </a:r>
+            <a:r>
+              <a:rPr>
+                <a:solidFill>
+                  <a:srgbClr val="AD0000"/>
+                </a:solidFill>
+                <a:latin typeface="Courier"/>
+              </a:rPr>
+              <a:t>75</a:t>
+            </a:r>
+            <a:r>
+              <a:rPr>
+                <a:solidFill>
+                  <a:srgbClr val="003B4F"/>
+                </a:solidFill>
+                <a:latin typeface="Courier"/>
+              </a:rPr>
+              <a:t>    </a:t>
+            </a:r>
+            <a:r>
+              <a:rPr>
+                <a:solidFill>
                   <a:srgbClr val="5E5E5E"/>
                 </a:solidFill>
                 <a:latin typeface="Courier"/>
               </a:rPr>
-              <a:t># If we had n = 20 per group</a:t>
+              <a:t># mm</a:t>
+            </a:r>
+            <a:br/>
+            <a:r>
+              <a:rPr>
+                <a:solidFill>
+                  <a:srgbClr val="003B4F"/>
+                </a:solidFill>
+                <a:latin typeface="Courier"/>
+              </a:rPr>
+              <a:t>sheltered_mean &lt;- </a:t>
+            </a:r>
+            <a:r>
+              <a:rPr>
+                <a:solidFill>
+                  <a:srgbClr val="AD0000"/>
+                </a:solidFill>
+                <a:latin typeface="Courier"/>
+              </a:rPr>
+              <a:t>85</a:t>
+            </a:r>
+            <a:r>
+              <a:rPr>
+                <a:solidFill>
+                  <a:srgbClr val="003B4F"/>
+                </a:solidFill>
+                <a:latin typeface="Courier"/>
+              </a:rPr>
+              <a:t>  </a:t>
+            </a:r>
+            <a:r>
+              <a:rPr>
+                <a:solidFill>
+                  <a:srgbClr val="5E5E5E"/>
+                </a:solidFill>
+                <a:latin typeface="Courier"/>
+              </a:rPr>
+              <a:t># mm</a:t>
+            </a:r>
+            <a:br/>
+            <a:r>
+              <a:rPr>
+                <a:solidFill>
+                  <a:srgbClr val="003B4F"/>
+                </a:solidFill>
+                <a:latin typeface="Courier"/>
+              </a:rPr>
+              <a:t>pooled_sd &lt;- </a:t>
+            </a:r>
+            <a:r>
+              <a:rPr>
+                <a:solidFill>
+                  <a:srgbClr val="AD0000"/>
+                </a:solidFill>
+                <a:latin typeface="Courier"/>
+              </a:rPr>
+              <a:t>12</a:t>
+            </a:r>
+            <a:r>
+              <a:rPr>
+                <a:solidFill>
+                  <a:srgbClr val="003B4F"/>
+                </a:solidFill>
+                <a:latin typeface="Courier"/>
+              </a:rPr>
+              <a:t>       </a:t>
+            </a:r>
+            <a:r>
+              <a:rPr>
+                <a:solidFill>
+                  <a:srgbClr val="5E5E5E"/>
+                </a:solidFill>
+                <a:latin typeface="Courier"/>
+              </a:rPr>
+              <a:t># mm</a:t>
             </a:r>
             <a:br/>
             <a:br/>
@@ -9535,7 +7487,7 @@
                 </a:solidFill>
                 <a:latin typeface="Courier"/>
               </a:rPr>
-              <a:t># Parameters</a:t>
+              <a:t># Calculate Cohen's d effect size</a:t>
             </a:r>
             <a:br/>
             <a:r>
@@ -9550,11 +7502,165 @@
             <a:r>
               <a:rPr>
                 <a:solidFill>
+                  <a:srgbClr val="4758AB"/>
+                </a:solidFill>
+                <a:latin typeface="Courier"/>
+              </a:rPr>
+              <a:t>abs</a:t>
+            </a:r>
+            <a:r>
+              <a:rPr>
+                <a:solidFill>
+                  <a:srgbClr val="003B4F"/>
+                </a:solidFill>
+                <a:latin typeface="Courier"/>
+              </a:rPr>
+              <a:t>(exposed_mean </a:t>
+            </a:r>
+            <a:r>
+              <a:rPr>
+                <a:solidFill>
+                  <a:srgbClr val="5E5E5E"/>
+                </a:solidFill>
+                <a:latin typeface="Courier"/>
+              </a:rPr>
+              <a:t>-</a:t>
+            </a:r>
+            <a:r>
+              <a:rPr>
+                <a:solidFill>
+                  <a:srgbClr val="003B4F"/>
+                </a:solidFill>
+                <a:latin typeface="Courier"/>
+              </a:rPr>
+              <a:t> sheltered_mean) </a:t>
+            </a:r>
+            <a:r>
+              <a:rPr>
+                <a:solidFill>
+                  <a:srgbClr val="5E5E5E"/>
+                </a:solidFill>
+                <a:latin typeface="Courier"/>
+              </a:rPr>
+              <a:t>/</a:t>
+            </a:r>
+            <a:r>
+              <a:rPr>
+                <a:solidFill>
+                  <a:srgbClr val="003B4F"/>
+                </a:solidFill>
+                <a:latin typeface="Courier"/>
+              </a:rPr>
+              <a:t> pooled_sd</a:t>
+            </a:r>
+            <a:br/>
+            <a:r>
+              <a:rPr>
+                <a:solidFill>
+                  <a:srgbClr val="003B4F"/>
+                </a:solidFill>
+                <a:latin typeface="Courier"/>
+              </a:rPr>
+              <a:t>effect_size</a:t>
+            </a:r>
+          </a:p>
+          <a:p>
+            <a:pPr lvl="0" indent="0">
+              <a:buNone/>
+            </a:pPr>
+            <a:r>
+              <a:rPr sz="2000">
+                <a:latin typeface="Courier"/>
+              </a:rPr>
+              <a:t>[1] 0.8333333</a:t>
+            </a:r>
+          </a:p>
+          <a:p>
+            <a:pPr lvl="0" indent="0">
+              <a:buNone/>
+            </a:pPr>
+            <a:r>
+              <a:rPr>
+                <a:solidFill>
+                  <a:srgbClr val="5E5E5E"/>
+                </a:solidFill>
+                <a:latin typeface="Courier"/>
+              </a:rPr>
+              <a:t># A priori power analysis</a:t>
+            </a:r>
+            <a:br/>
+            <a:r>
+              <a:rPr>
+                <a:solidFill>
+                  <a:srgbClr val="4758AB"/>
+                </a:solidFill>
+                <a:latin typeface="Courier"/>
+              </a:rPr>
+              <a:t>pwr.t.test</a:t>
+            </a:r>
+            <a:r>
+              <a:rPr>
+                <a:solidFill>
+                  <a:srgbClr val="003B4F"/>
+                </a:solidFill>
+                <a:latin typeface="Courier"/>
+              </a:rPr>
+              <a:t>(</a:t>
+            </a:r>
+            <a:r>
+              <a:rPr>
+                <a:solidFill>
+                  <a:srgbClr val="657422"/>
+                </a:solidFill>
+                <a:latin typeface="Courier"/>
+              </a:rPr>
+              <a:t>d =</a:t>
+            </a:r>
+            <a:r>
+              <a:rPr>
+                <a:solidFill>
+                  <a:srgbClr val="003B4F"/>
+                </a:solidFill>
+                <a:latin typeface="Courier"/>
+              </a:rPr>
+              <a:t> effect_size,</a:t>
+            </a:r>
+            <a:br/>
+            <a:r>
+              <a:rPr>
+                <a:solidFill>
+                  <a:srgbClr val="003B4F"/>
+                </a:solidFill>
+                <a:latin typeface="Courier"/>
+              </a:rPr>
+              <a:t>           </a:t>
+            </a:r>
+            <a:r>
+              <a:rPr>
+                <a:solidFill>
+                  <a:srgbClr val="657422"/>
+                </a:solidFill>
+                <a:latin typeface="Courier"/>
+              </a:rPr>
+              <a:t>sig.level =</a:t>
+            </a:r>
+            <a:r>
+              <a:rPr>
+                <a:solidFill>
+                  <a:srgbClr val="003B4F"/>
+                </a:solidFill>
+                <a:latin typeface="Courier"/>
+              </a:rPr>
+              <a:t> </a:t>
+            </a:r>
+            <a:r>
+              <a:rPr>
+                <a:solidFill>
                   <a:srgbClr val="AD0000"/>
                 </a:solidFill>
                 <a:latin typeface="Courier"/>
               </a:rPr>
-              <a:t>0.5</a:t>
+              <a:t>0.05</a:t>
             </a:r>
             <a:r>
               <a:rPr>
@@ -9563,16 +7669,7 @@
                 </a:solidFill>
                 <a:latin typeface="Courier"/>
               </a:rPr>
-              <a:t>  </a:t>
-            </a:r>
-            <a:r>
-              <a:rPr>
-                <a:solidFill>
-                  <a:srgbClr val="5E5E5E"/>
-                </a:solidFill>
-                <a:latin typeface="Courier"/>
-              </a:rPr>
-              <a:t># Medium effect size</a:t>
+              <a:t>,</a:t>
             </a:r>
             <a:br/>
             <a:r>
@@ -9582,7 +7679,25 @@
                 </a:solidFill>
                 <a:latin typeface="Courier"/>
               </a:rPr>
-              <a:t>significance &lt;- </a:t>
+              <a:t>           </a:t>
+            </a:r>
+            <a:r>
+              <a:rPr>
+                <a:solidFill>
+                  <a:srgbClr val="657422"/>
+                </a:solidFill>
+                <a:latin typeface="Courier"/>
+              </a:rPr>
+              <a:t>power =</a:t>
+            </a:r>
+            <a:r>
+              <a:rPr>
+                <a:solidFill>
+                  <a:srgbClr val="003B4F"/>
+                </a:solidFill>
+                <a:latin typeface="Courier"/>
+              </a:rPr>
+              <a:t> </a:t>
             </a:r>
             <a:r>
               <a:rPr>
@@ -9591,7 +7706,16 @@
                 </a:solidFill>
                 <a:latin typeface="Courier"/>
               </a:rPr>
-              <a:t>0.05</a:t>
+              <a:t>0.8</a:t>
+            </a:r>
+            <a:r>
+              <a:rPr>
+                <a:solidFill>
+                  <a:srgbClr val="003B4F"/>
+                </a:solidFill>
+                <a:latin typeface="Courier"/>
+              </a:rPr>
+              <a:t>,</a:t>
             </a:r>
             <a:br/>
             <a:r>
@@ -9601,16 +7725,16 @@
                 </a:solidFill>
                 <a:latin typeface="Courier"/>
               </a:rPr>
-              <a:t>sample_size &lt;- </a:t>
-            </a:r>
-            <a:r>
-              <a:rPr>
-                <a:solidFill>
-                  <a:srgbClr val="AD0000"/>
-                </a:solidFill>
-                <a:latin typeface="Courier"/>
-              </a:rPr>
-              <a:t>20</a:t>
+              <a:t>           </a:t>
+            </a:r>
+            <a:r>
+              <a:rPr>
+                <a:solidFill>
+                  <a:srgbClr val="657422"/>
+                </a:solidFill>
+                <a:latin typeface="Courier"/>
+              </a:rPr>
+              <a:t>type =</a:t>
             </a:r>
             <a:r>
               <a:rPr>
@@ -9619,37 +7743,16 @@
                 </a:solidFill>
                 <a:latin typeface="Courier"/>
               </a:rPr>
-              <a:t>  </a:t>
-            </a:r>
-            <a:r>
-              <a:rPr>
-                <a:solidFill>
-                  <a:srgbClr val="5E5E5E"/>
-                </a:solidFill>
-                <a:latin typeface="Courier"/>
-              </a:rPr>
-              <a:t># per group</a:t>
-            </a:r>
-            <a:br/>
-            <a:br/>
-            <a:r>
-              <a:rPr>
-                <a:solidFill>
-                  <a:srgbClr val="5E5E5E"/>
-                </a:solidFill>
-                <a:latin typeface="Courier"/>
-              </a:rPr>
-              <a:t># Calculate achieved power</a:t>
-            </a:r>
-            <a:br/>
-            <a:r>
-              <a:rPr>
-                <a:solidFill>
-                  <a:srgbClr val="4758AB"/>
-                </a:solidFill>
-                <a:latin typeface="Courier"/>
-              </a:rPr>
-              <a:t>pwr.t.test</a:t>
+              <a:t> </a:t>
+            </a:r>
+            <a:r>
+              <a:rPr>
+                <a:solidFill>
+                  <a:srgbClr val="20794D"/>
+                </a:solidFill>
+                <a:latin typeface="Courier"/>
+              </a:rPr>
+              <a:t>"two.sample"</a:t>
             </a:r>
             <a:r>
               <a:rPr>
@@ -9658,144 +7761,6 @@
                 </a:solidFill>
                 <a:latin typeface="Courier"/>
               </a:rPr>
-              <a:t>(</a:t>
-            </a:r>
-            <a:r>
-              <a:rPr>
-                <a:solidFill>
-                  <a:srgbClr val="657422"/>
-                </a:solidFill>
-                <a:latin typeface="Courier"/>
-              </a:rPr>
-              <a:t>n =</a:t>
-            </a:r>
-            <a:r>
-              <a:rPr>
-                <a:solidFill>
-                  <a:srgbClr val="003B4F"/>
-                </a:solidFill>
-                <a:latin typeface="Courier"/>
-              </a:rPr>
-              <a:t> sample_size,</a:t>
-            </a:r>
-            <a:br/>
-            <a:r>
-              <a:rPr>
-                <a:solidFill>
-                  <a:srgbClr val="003B4F"/>
-                </a:solidFill>
-                <a:latin typeface="Courier"/>
-              </a:rPr>
-              <a:t>           </a:t>
-            </a:r>
-            <a:r>
-              <a:rPr>
-                <a:solidFill>
-                  <a:srgbClr val="657422"/>
-                </a:solidFill>
-                <a:latin typeface="Courier"/>
-              </a:rPr>
-              <a:t>d =</a:t>
-            </a:r>
-            <a:r>
-              <a:rPr>
-                <a:solidFill>
-                  <a:srgbClr val="003B4F"/>
-                </a:solidFill>
-                <a:latin typeface="Courier"/>
-              </a:rPr>
-              <a:t> effect_size,</a:t>
-            </a:r>
-            <a:br/>
-            <a:r>
-              <a:rPr>
-                <a:solidFill>
-                  <a:srgbClr val="003B4F"/>
-                </a:solidFill>
-                <a:latin typeface="Courier"/>
-              </a:rPr>
-              <a:t>           </a:t>
-            </a:r>
-            <a:r>
-              <a:rPr>
-                <a:solidFill>
-                  <a:srgbClr val="657422"/>
-                </a:solidFill>
-                <a:latin typeface="Courier"/>
-              </a:rPr>
-              <a:t>sig.level =</a:t>
-            </a:r>
-            <a:r>
-              <a:rPr>
-                <a:solidFill>
-                  <a:srgbClr val="003B4F"/>
-                </a:solidFill>
-                <a:latin typeface="Courier"/>
-              </a:rPr>
-              <a:t> </a:t>
-            </a:r>
-            <a:r>
-              <a:rPr>
-                <a:solidFill>
-                  <a:srgbClr val="AD0000"/>
-                </a:solidFill>
-                <a:latin typeface="Courier"/>
-              </a:rPr>
-              <a:t>0.05</a:t>
-            </a:r>
-            <a:r>
-              <a:rPr>
-                <a:solidFill>
-                  <a:srgbClr val="003B4F"/>
-                </a:solidFill>
-                <a:latin typeface="Courier"/>
-              </a:rPr>
-              <a:t>,</a:t>
-            </a:r>
-            <a:br/>
-            <a:r>
-              <a:rPr>
-                <a:solidFill>
-                  <a:srgbClr val="003B4F"/>
-                </a:solidFill>
-                <a:latin typeface="Courier"/>
-              </a:rPr>
-              <a:t>           </a:t>
-            </a:r>
-            <a:r>
-              <a:rPr>
-                <a:solidFill>
-                  <a:srgbClr val="657422"/>
-                </a:solidFill>
-                <a:latin typeface="Courier"/>
-              </a:rPr>
-              <a:t>type =</a:t>
-            </a:r>
-            <a:r>
-              <a:rPr>
-                <a:solidFill>
-                  <a:srgbClr val="003B4F"/>
-                </a:solidFill>
-                <a:latin typeface="Courier"/>
-              </a:rPr>
-              <a:t> </a:t>
-            </a:r>
-            <a:r>
-              <a:rPr>
-                <a:solidFill>
-                  <a:srgbClr val="20794D"/>
-                </a:solidFill>
-                <a:latin typeface="Courier"/>
-              </a:rPr>
-              <a:t>"two.sample"</a:t>
-            </a:r>
-            <a:r>
-              <a:rPr>
-                <a:solidFill>
-                  <a:srgbClr val="003B4F"/>
-                </a:solidFill>
-                <a:latin typeface="Courier"/>
-              </a:rPr>
               <a:t>)</a:t>
             </a:r>
           </a:p>
@@ -9804,15 +7769,15 @@
               <a:buNone/>
             </a:pPr>
             <a:r>
-              <a:rPr>
+              <a:rPr sz="2000">
                 <a:latin typeface="Courier"/>
               </a:rPr>
               <a:t>
      Two-sample t test power calculation 
-              n = 20
-              d = 0.5
+              n = 23.60467
+              d = 0.8333333
       sig.level = 0.05
-          power = 0.337939
+          power = 0.8
     alternative = two.sided
 NOTE: n is number in *each* group</a:t>
             </a:r>
@@ -9866,7 +7831,7 @@
             </a:pPr>
             <a:r>
               <a:rPr/>
-              <a:t>Activity 6: Power Analysis for Pine Needle Experiment</a:t>
+              <a:t>Activity 6: Power Curve Visualization</a:t>
             </a:r>
           </a:p>
         </p:txBody>
@@ -9904,431 +7869,44 @@
             </a:r>
           </a:p>
           <a:p>
-            <a:pPr lvl="0" indent="0">
-              <a:buNone/>
-            </a:pPr>
-            <a:r>
-              <a:rPr>
-                <a:solidFill>
-                  <a:srgbClr val="5E5E5E"/>
-                </a:solidFill>
-                <a:latin typeface="Courier"/>
-              </a:rPr>
-              <a:t># Based on pilot data, we have these estimates:</a:t>
-            </a:r>
-            <a:br/>
-            <a:r>
-              <a:rPr>
-                <a:solidFill>
-                  <a:srgbClr val="003B4F"/>
-                </a:solidFill>
-                <a:latin typeface="Courier"/>
-              </a:rPr>
-              <a:t>exposed_mean &lt;- </a:t>
-            </a:r>
-            <a:r>
-              <a:rPr>
-                <a:solidFill>
-                  <a:srgbClr val="AD0000"/>
-                </a:solidFill>
-                <a:latin typeface="Courier"/>
-              </a:rPr>
-              <a:t>75</a:t>
-            </a:r>
-            <a:r>
-              <a:rPr>
-                <a:solidFill>
-                  <a:srgbClr val="003B4F"/>
-                </a:solidFill>
-                <a:latin typeface="Courier"/>
-              </a:rPr>
-              <a:t>    </a:t>
-            </a:r>
-            <a:r>
-              <a:rPr>
-                <a:solidFill>
-                  <a:srgbClr val="5E5E5E"/>
-                </a:solidFill>
-                <a:latin typeface="Courier"/>
-              </a:rPr>
-              <a:t># mm</a:t>
-            </a:r>
-            <a:br/>
-            <a:r>
-              <a:rPr>
-                <a:solidFill>
-                  <a:srgbClr val="003B4F"/>
-                </a:solidFill>
-                <a:latin typeface="Courier"/>
-              </a:rPr>
-              <a:t>sheltered_mean &lt;- </a:t>
-            </a:r>
-            <a:r>
-              <a:rPr>
-                <a:solidFill>
-                  <a:srgbClr val="AD0000"/>
-                </a:solidFill>
-                <a:latin typeface="Courier"/>
-              </a:rPr>
-              <a:t>85</a:t>
-            </a:r>
-            <a:r>
-              <a:rPr>
-                <a:solidFill>
-                  <a:srgbClr val="003B4F"/>
-                </a:solidFill>
-                <a:latin typeface="Courier"/>
-              </a:rPr>
-              <a:t>  </a:t>
-            </a:r>
-            <a:r>
-              <a:rPr>
-                <a:solidFill>
-                  <a:srgbClr val="5E5E5E"/>
-                </a:solidFill>
-                <a:latin typeface="Courier"/>
-              </a:rPr>
-              <a:t># mm</a:t>
-            </a:r>
-            <a:br/>
-            <a:r>
-              <a:rPr>
-                <a:solidFill>
-                  <a:srgbClr val="003B4F"/>
-                </a:solidFill>
-                <a:latin typeface="Courier"/>
-              </a:rPr>
-              <a:t>pooled_sd &lt;- </a:t>
-            </a:r>
-            <a:r>
-              <a:rPr>
-                <a:solidFill>
-                  <a:srgbClr val="AD0000"/>
-                </a:solidFill>
-                <a:latin typeface="Courier"/>
-              </a:rPr>
-              <a:t>12</a:t>
-            </a:r>
-            <a:r>
-              <a:rPr>
-                <a:solidFill>
-                  <a:srgbClr val="003B4F"/>
-                </a:solidFill>
-                <a:latin typeface="Courier"/>
-              </a:rPr>
-              <a:t>       </a:t>
-            </a:r>
-            <a:r>
-              <a:rPr>
-                <a:solidFill>
-                  <a:srgbClr val="5E5E5E"/>
-                </a:solidFill>
-                <a:latin typeface="Courier"/>
-              </a:rPr>
-              <a:t># mm</a:t>
-            </a:r>
-            <a:br/>
-            <a:br/>
-            <a:r>
-              <a:rPr>
-                <a:solidFill>
-                  <a:srgbClr val="5E5E5E"/>
-                </a:solidFill>
-                <a:latin typeface="Courier"/>
-              </a:rPr>
-              <a:t># Calculate Cohen's d effect size</a:t>
-            </a:r>
-            <a:br/>
-            <a:r>
-              <a:rPr>
-                <a:solidFill>
-                  <a:srgbClr val="003B4F"/>
-                </a:solidFill>
-                <a:latin typeface="Courier"/>
-              </a:rPr>
-              <a:t>effect_size &lt;- </a:t>
-            </a:r>
-            <a:r>
-              <a:rPr>
-                <a:solidFill>
-                  <a:srgbClr val="4758AB"/>
-                </a:solidFill>
-                <a:latin typeface="Courier"/>
-              </a:rPr>
-              <a:t>abs</a:t>
-            </a:r>
-            <a:r>
-              <a:rPr>
-                <a:solidFill>
-                  <a:srgbClr val="003B4F"/>
-                </a:solidFill>
-                <a:latin typeface="Courier"/>
-              </a:rPr>
-              <a:t>(exposed_mean </a:t>
-            </a:r>
-            <a:r>
-              <a:rPr>
-                <a:solidFill>
-                  <a:srgbClr val="5E5E5E"/>
-                </a:solidFill>
-                <a:latin typeface="Courier"/>
-              </a:rPr>
-              <a:t>-</a:t>
-            </a:r>
-            <a:r>
-              <a:rPr>
-                <a:solidFill>
-                  <a:srgbClr val="003B4F"/>
-                </a:solidFill>
-                <a:latin typeface="Courier"/>
-              </a:rPr>
-              <a:t> sheltered_mean) </a:t>
-            </a:r>
-            <a:r>
-              <a:rPr>
-                <a:solidFill>
-                  <a:srgbClr val="5E5E5E"/>
-                </a:solidFill>
-                <a:latin typeface="Courier"/>
-              </a:rPr>
-              <a:t>/</a:t>
-            </a:r>
-            <a:r>
-              <a:rPr>
-                <a:solidFill>
-                  <a:srgbClr val="003B4F"/>
-                </a:solidFill>
-                <a:latin typeface="Courier"/>
-              </a:rPr>
-              <a:t> pooled_sd</a:t>
-            </a:r>
-            <a:br/>
-            <a:r>
-              <a:rPr>
-                <a:solidFill>
-                  <a:srgbClr val="003B4F"/>
-                </a:solidFill>
-                <a:latin typeface="Courier"/>
-              </a:rPr>
-              <a:t>effect_size</a:t>
-            </a:r>
-          </a:p>
-          <a:p>
-            <a:pPr lvl="0" indent="0">
-              <a:buNone/>
-            </a:pPr>
-            <a:r>
-              <a:rPr sz="2000">
-                <a:latin typeface="Courier"/>
-              </a:rPr>
-              <a:t>[1] 0.8333333</a:t>
-            </a:r>
-          </a:p>
-          <a:p>
-            <a:pPr lvl="0" indent="0">
-              <a:buNone/>
-            </a:pPr>
-            <a:r>
-              <a:rPr>
-                <a:solidFill>
-                  <a:srgbClr val="5E5E5E"/>
-                </a:solidFill>
-                <a:latin typeface="Courier"/>
-              </a:rPr>
-              <a:t># A priori power analysis</a:t>
-            </a:r>
-            <a:br/>
-            <a:r>
-              <a:rPr>
-                <a:solidFill>
-                  <a:srgbClr val="4758AB"/>
-                </a:solidFill>
-                <a:latin typeface="Courier"/>
-              </a:rPr>
-              <a:t>pwr.t.test</a:t>
-            </a:r>
-            <a:r>
-              <a:rPr>
-                <a:solidFill>
-                  <a:srgbClr val="003B4F"/>
-                </a:solidFill>
-                <a:latin typeface="Courier"/>
-              </a:rPr>
-              <a:t>(</a:t>
-            </a:r>
-            <a:r>
-              <a:rPr>
-                <a:solidFill>
-                  <a:srgbClr val="657422"/>
-                </a:solidFill>
-                <a:latin typeface="Courier"/>
-              </a:rPr>
-              <a:t>d =</a:t>
-            </a:r>
-            <a:r>
-              <a:rPr>
-                <a:solidFill>
-                  <a:srgbClr val="003B4F"/>
-                </a:solidFill>
-                <a:latin typeface="Courier"/>
-              </a:rPr>
-              <a:t> effect_size,</a:t>
-            </a:r>
-            <a:br/>
-            <a:r>
-              <a:rPr>
-                <a:solidFill>
-                  <a:srgbClr val="003B4F"/>
-                </a:solidFill>
-                <a:latin typeface="Courier"/>
-              </a:rPr>
-              <a:t>           </a:t>
-            </a:r>
-            <a:r>
-              <a:rPr>
-                <a:solidFill>
-                  <a:srgbClr val="657422"/>
-                </a:solidFill>
-                <a:latin typeface="Courier"/>
-              </a:rPr>
-              <a:t>sig.level =</a:t>
-            </a:r>
-            <a:r>
-              <a:rPr>
-                <a:solidFill>
-                  <a:srgbClr val="003B4F"/>
-                </a:solidFill>
-                <a:latin typeface="Courier"/>
-              </a:rPr>
-              <a:t> </a:t>
-            </a:r>
-            <a:r>
-              <a:rPr>
-                <a:solidFill>
-                  <a:srgbClr val="AD0000"/>
-                </a:solidFill>
-                <a:latin typeface="Courier"/>
-              </a:rPr>
-              <a:t>0.05</a:t>
-            </a:r>
-            <a:r>
-              <a:rPr>
-                <a:solidFill>
-                  <a:srgbClr val="003B4F"/>
-                </a:solidFill>
-                <a:latin typeface="Courier"/>
-              </a:rPr>
-              <a:t>,</a:t>
-            </a:r>
-            <a:br/>
-            <a:r>
-              <a:rPr>
-                <a:solidFill>
-                  <a:srgbClr val="003B4F"/>
-                </a:solidFill>
-                <a:latin typeface="Courier"/>
-              </a:rPr>
-              <a:t>           </a:t>
-            </a:r>
-            <a:r>
-              <a:rPr>
-                <a:solidFill>
-                  <a:srgbClr val="657422"/>
-                </a:solidFill>
-                <a:latin typeface="Courier"/>
-              </a:rPr>
-              <a:t>power =</a:t>
-            </a:r>
-            <a:r>
-              <a:rPr>
-                <a:solidFill>
-                  <a:srgbClr val="003B4F"/>
-                </a:solidFill>
-                <a:latin typeface="Courier"/>
-              </a:rPr>
-              <a:t> </a:t>
-            </a:r>
-            <a:r>
-              <a:rPr>
-                <a:solidFill>
-                  <a:srgbClr val="AD0000"/>
-                </a:solidFill>
-                <a:latin typeface="Courier"/>
-              </a:rPr>
-              <a:t>0.8</a:t>
-            </a:r>
-            <a:r>
-              <a:rPr>
-                <a:solidFill>
-                  <a:srgbClr val="003B4F"/>
-                </a:solidFill>
-                <a:latin typeface="Courier"/>
-              </a:rPr>
-              <a:t>,</a:t>
-            </a:r>
-            <a:br/>
-            <a:r>
-              <a:rPr>
-                <a:solidFill>
-                  <a:srgbClr val="003B4F"/>
-                </a:solidFill>
-                <a:latin typeface="Courier"/>
-              </a:rPr>
-              <a:t>           </a:t>
-            </a:r>
-            <a:r>
-              <a:rPr>
-                <a:solidFill>
-                  <a:srgbClr val="657422"/>
-                </a:solidFill>
-                <a:latin typeface="Courier"/>
-              </a:rPr>
-              <a:t>type =</a:t>
-            </a:r>
-            <a:r>
-              <a:rPr>
-                <a:solidFill>
-                  <a:srgbClr val="003B4F"/>
-                </a:solidFill>
-                <a:latin typeface="Courier"/>
-              </a:rPr>
-              <a:t> </a:t>
-            </a:r>
-            <a:r>
-              <a:rPr>
-                <a:solidFill>
-                  <a:srgbClr val="20794D"/>
-                </a:solidFill>
-                <a:latin typeface="Courier"/>
-              </a:rPr>
-              <a:t>"two.sample"</a:t>
-            </a:r>
-            <a:r>
-              <a:rPr>
-                <a:solidFill>
-                  <a:srgbClr val="003B4F"/>
-                </a:solidFill>
-                <a:latin typeface="Courier"/>
-              </a:rPr>
-              <a:t>)</a:t>
-            </a:r>
-          </a:p>
-          <a:p>
-            <a:pPr lvl="0" indent="0">
-              <a:buNone/>
-            </a:pPr>
-            <a:r>
-              <a:rPr sz="2000">
-                <a:latin typeface="Courier"/>
-              </a:rPr>
-              <a:t>
-     Two-sample t test power calculation 
-              n = 23.60467
-              d = 0.8333333
-      sig.level = 0.05
-          power = 0.8
-    alternative = two.sided
-NOTE: n is number in *each* group</a:t>
+            <a:pPr lvl="0" indent="0" marL="1270000">
+              <a:buNone/>
+            </a:pPr>
+          </a:p>
+          <a:p>
+            <a:pPr lvl="0" indent="0" marL="1270000">
+              <a:buNone/>
+            </a:pPr>
+            <a:r>
+              <a:rPr sz="2000"/>
+              <a:t>Questions:</a:t>
+            </a:r>
+          </a:p>
+          <a:p>
+            <a:pPr lvl="0" indent="-342900" marL="342900">
+              <a:buAutoNum type="arabicPeriod"/>
+            </a:pPr>
+            <a:r>
+              <a:rPr sz="2000"/>
+              <a:t>How many trees should we sample to achieve 80% power?</a:t>
+            </a:r>
+          </a:p>
+          <a:p>
+            <a:pPr lvl="0" indent="-342900" marL="342900">
+              <a:buAutoNum type="arabicPeriod"/>
+            </a:pPr>
+            <a:r>
+              <a:rPr sz="2000"/>
+              <a:t>If we can only sample 5 trees per group, what is our power?</a:t>
+            </a:r>
+          </a:p>
+          <a:p>
+            <a:pPr lvl="0" indent="-342900" marL="342900">
+              <a:buAutoNum type="arabicPeriod"/>
+            </a:pPr>
+            <a:r>
+              <a:rPr sz="2000"/>
+              <a:t>How would increasing variability (SD) affect our sample size requirements?</a:t>
             </a:r>
           </a:p>
         </p:txBody>
@@ -10339,1140 +7917,6 @@
 </file>
 
 <file path=ppt/slides/slide32.xml><?xml version="1.0" encoding="utf-8"?>
-<p:sld xmlns:a="http://schemas.openxmlformats.org/drawingml/2006/main" xmlns:r="http://schemas.openxmlformats.org/officeDocument/2006/relationships" xmlns:p="http://schemas.openxmlformats.org/presentationml/2006/main">
-  <p:cSld>
-    <p:spTree>
-      <p:nvGrpSpPr>
-        <p:cNvPr id="1" name=""/>
-        <p:cNvGrpSpPr/>
-        <p:nvPr/>
-      </p:nvGrpSpPr>
-      <p:grpSpPr>
-        <a:xfrm>
-          <a:off x="0" y="0"/>
-          <a:ext cx="0" cy="0"/>
-          <a:chOff x="0" y="0"/>
-          <a:chExt cx="0" cy="0"/>
-        </a:xfrm>
-      </p:grpSpPr>
-      <p:sp>
-        <p:nvSpPr>
-          <p:cNvPr id="2" name="Title 1"/>
-          <p:cNvSpPr>
-            <a:spLocks noGrp="1"/>
-          </p:cNvSpPr>
-          <p:nvPr>
-            <p:ph type="title"/>
-          </p:nvPr>
-        </p:nvSpPr>
-        <p:spPr>
-          <a:xfrm>
-            <a:off x="0" y="0"/>
-            <a:ext cx="9144000" cy="582780"/>
-          </a:xfrm>
-        </p:spPr>
-        <p:txBody>
-          <a:bodyPr/>
-          <a:lstStyle/>
-          <a:p>
-            <a:pPr lvl="0" indent="0" marL="0">
-              <a:buNone/>
-            </a:pPr>
-            <a:r>
-              <a:rPr/>
-              <a:t>Activity 6: Power Curve Visualization</a:t>
-            </a:r>
-          </a:p>
-        </p:txBody>
-      </p:sp>
-      <p:sp>
-        <p:nvSpPr>
-          <p:cNvPr id="3" name="Content Placeholder 2"/>
-          <p:cNvSpPr>
-            <a:spLocks noGrp="1"/>
-          </p:cNvSpPr>
-          <p:nvPr>
-            <p:ph idx="1"/>
-          </p:nvPr>
-        </p:nvSpPr>
-        <p:spPr/>
-        <p:txBody>
-          <a:bodyPr/>
-          <a:lstStyle/>
-          <a:p>
-            <a:pPr lvl="0" indent="0" marL="1270000">
-              <a:buNone/>
-            </a:pPr>
-            <a:r>
-              <a:rPr sz="2000" b="1"/>
-              <a:t>Activity 6: Power Analysis for Pine Needle Experiment</a:t>
-            </a:r>
-          </a:p>
-          <a:p>
-            <a:pPr lvl="0" indent="0" marL="1270000">
-              <a:buNone/>
-            </a:pPr>
-            <a:r>
-              <a:rPr sz="2000"/>
-              <a:t>Let’s design a study to compare needle lengths between exposed and sheltered pine trees:</a:t>
-            </a:r>
-          </a:p>
-          <a:p>
-            <a:pPr lvl="0" indent="0">
-              <a:buNone/>
-            </a:pPr>
-            <a:r>
-              <a:rPr>
-                <a:solidFill>
-                  <a:srgbClr val="5E5E5E"/>
-                </a:solidFill>
-                <a:latin typeface="Courier"/>
-              </a:rPr>
-              <a:t># Visualize the power curve</a:t>
-            </a:r>
-            <a:br/>
-            <a:r>
-              <a:rPr>
-                <a:solidFill>
-                  <a:srgbClr val="003B4F"/>
-                </a:solidFill>
-                <a:latin typeface="Courier"/>
-              </a:rPr>
-              <a:t>sample_sizes &lt;- </a:t>
-            </a:r>
-            <a:r>
-              <a:rPr>
-                <a:solidFill>
-                  <a:srgbClr val="4758AB"/>
-                </a:solidFill>
-                <a:latin typeface="Courier"/>
-              </a:rPr>
-              <a:t>seq</a:t>
-            </a:r>
-            <a:r>
-              <a:rPr>
-                <a:solidFill>
-                  <a:srgbClr val="003B4F"/>
-                </a:solidFill>
-                <a:latin typeface="Courier"/>
-              </a:rPr>
-              <a:t>(</a:t>
-            </a:r>
-            <a:r>
-              <a:rPr>
-                <a:solidFill>
-                  <a:srgbClr val="AD0000"/>
-                </a:solidFill>
-                <a:latin typeface="Courier"/>
-              </a:rPr>
-              <a:t>5</a:t>
-            </a:r>
-            <a:r>
-              <a:rPr>
-                <a:solidFill>
-                  <a:srgbClr val="003B4F"/>
-                </a:solidFill>
-                <a:latin typeface="Courier"/>
-              </a:rPr>
-              <a:t>, </a:t>
-            </a:r>
-            <a:r>
-              <a:rPr>
-                <a:solidFill>
-                  <a:srgbClr val="AD0000"/>
-                </a:solidFill>
-                <a:latin typeface="Courier"/>
-              </a:rPr>
-              <a:t>30</a:t>
-            </a:r>
-            <a:r>
-              <a:rPr>
-                <a:solidFill>
-                  <a:srgbClr val="003B4F"/>
-                </a:solidFill>
-                <a:latin typeface="Courier"/>
-              </a:rPr>
-              <a:t>, </a:t>
-            </a:r>
-            <a:r>
-              <a:rPr>
-                <a:solidFill>
-                  <a:srgbClr val="657422"/>
-                </a:solidFill>
-                <a:latin typeface="Courier"/>
-              </a:rPr>
-              <a:t>by =</a:t>
-            </a:r>
-            <a:r>
-              <a:rPr>
-                <a:solidFill>
-                  <a:srgbClr val="003B4F"/>
-                </a:solidFill>
-                <a:latin typeface="Courier"/>
-              </a:rPr>
-              <a:t> </a:t>
-            </a:r>
-            <a:r>
-              <a:rPr>
-                <a:solidFill>
-                  <a:srgbClr val="AD0000"/>
-                </a:solidFill>
-                <a:latin typeface="Courier"/>
-              </a:rPr>
-              <a:t>1</a:t>
-            </a:r>
-            <a:r>
-              <a:rPr>
-                <a:solidFill>
-                  <a:srgbClr val="003B4F"/>
-                </a:solidFill>
-                <a:latin typeface="Courier"/>
-              </a:rPr>
-              <a:t>)</a:t>
-            </a:r>
-            <a:br/>
-            <a:r>
-              <a:rPr>
-                <a:solidFill>
-                  <a:srgbClr val="003B4F"/>
-                </a:solidFill>
-                <a:latin typeface="Courier"/>
-              </a:rPr>
-              <a:t>power_values &lt;- </a:t>
-            </a:r>
-            <a:r>
-              <a:rPr>
-                <a:solidFill>
-                  <a:srgbClr val="4758AB"/>
-                </a:solidFill>
-                <a:latin typeface="Courier"/>
-              </a:rPr>
-              <a:t>sapply</a:t>
-            </a:r>
-            <a:r>
-              <a:rPr>
-                <a:solidFill>
-                  <a:srgbClr val="003B4F"/>
-                </a:solidFill>
-                <a:latin typeface="Courier"/>
-              </a:rPr>
-              <a:t>(sample_sizes, </a:t>
-            </a:r>
-            <a:r>
-              <a:rPr b="1">
-                <a:solidFill>
-                  <a:srgbClr val="003B4F"/>
-                </a:solidFill>
-                <a:latin typeface="Courier"/>
-              </a:rPr>
-              <a:t>function</a:t>
-            </a:r>
-            <a:r>
-              <a:rPr>
-                <a:solidFill>
-                  <a:srgbClr val="003B4F"/>
-                </a:solidFill>
-                <a:latin typeface="Courier"/>
-              </a:rPr>
-              <a:t>(n) {</a:t>
-            </a:r>
-            <a:br/>
-            <a:r>
-              <a:rPr>
-                <a:solidFill>
-                  <a:srgbClr val="003B4F"/>
-                </a:solidFill>
-                <a:latin typeface="Courier"/>
-              </a:rPr>
-              <a:t>  power &lt;- </a:t>
-            </a:r>
-            <a:r>
-              <a:rPr>
-                <a:solidFill>
-                  <a:srgbClr val="4758AB"/>
-                </a:solidFill>
-                <a:latin typeface="Courier"/>
-              </a:rPr>
-              <a:t>pwr.t.test</a:t>
-            </a:r>
-            <a:r>
-              <a:rPr>
-                <a:solidFill>
-                  <a:srgbClr val="003B4F"/>
-                </a:solidFill>
-                <a:latin typeface="Courier"/>
-              </a:rPr>
-              <a:t>(</a:t>
-            </a:r>
-            <a:r>
-              <a:rPr>
-                <a:solidFill>
-                  <a:srgbClr val="657422"/>
-                </a:solidFill>
-                <a:latin typeface="Courier"/>
-              </a:rPr>
-              <a:t>n =</a:t>
-            </a:r>
-            <a:r>
-              <a:rPr>
-                <a:solidFill>
-                  <a:srgbClr val="003B4F"/>
-                </a:solidFill>
-                <a:latin typeface="Courier"/>
-              </a:rPr>
-              <a:t> n,</a:t>
-            </a:r>
-            <a:br/>
-            <a:r>
-              <a:rPr>
-                <a:solidFill>
-                  <a:srgbClr val="003B4F"/>
-                </a:solidFill>
-                <a:latin typeface="Courier"/>
-              </a:rPr>
-              <a:t>                     </a:t>
-            </a:r>
-            <a:r>
-              <a:rPr>
-                <a:solidFill>
-                  <a:srgbClr val="657422"/>
-                </a:solidFill>
-                <a:latin typeface="Courier"/>
-              </a:rPr>
-              <a:t>d =</a:t>
-            </a:r>
-            <a:r>
-              <a:rPr>
-                <a:solidFill>
-                  <a:srgbClr val="003B4F"/>
-                </a:solidFill>
-                <a:latin typeface="Courier"/>
-              </a:rPr>
-              <a:t> effect_size,</a:t>
-            </a:r>
-            <a:br/>
-            <a:r>
-              <a:rPr>
-                <a:solidFill>
-                  <a:srgbClr val="003B4F"/>
-                </a:solidFill>
-                <a:latin typeface="Courier"/>
-              </a:rPr>
-              <a:t>                     </a:t>
-            </a:r>
-            <a:r>
-              <a:rPr>
-                <a:solidFill>
-                  <a:srgbClr val="657422"/>
-                </a:solidFill>
-                <a:latin typeface="Courier"/>
-              </a:rPr>
-              <a:t>sig.level =</a:t>
-            </a:r>
-            <a:r>
-              <a:rPr>
-                <a:solidFill>
-                  <a:srgbClr val="003B4F"/>
-                </a:solidFill>
-                <a:latin typeface="Courier"/>
-              </a:rPr>
-              <a:t> </a:t>
-            </a:r>
-            <a:r>
-              <a:rPr>
-                <a:solidFill>
-                  <a:srgbClr val="AD0000"/>
-                </a:solidFill>
-                <a:latin typeface="Courier"/>
-              </a:rPr>
-              <a:t>0.05</a:t>
-            </a:r>
-            <a:r>
-              <a:rPr>
-                <a:solidFill>
-                  <a:srgbClr val="003B4F"/>
-                </a:solidFill>
-                <a:latin typeface="Courier"/>
-              </a:rPr>
-              <a:t>,</a:t>
-            </a:r>
-            <a:br/>
-            <a:r>
-              <a:rPr>
-                <a:solidFill>
-                  <a:srgbClr val="003B4F"/>
-                </a:solidFill>
-                <a:latin typeface="Courier"/>
-              </a:rPr>
-              <a:t>                     </a:t>
-            </a:r>
-            <a:r>
-              <a:rPr>
-                <a:solidFill>
-                  <a:srgbClr val="657422"/>
-                </a:solidFill>
-                <a:latin typeface="Courier"/>
-              </a:rPr>
-              <a:t>type =</a:t>
-            </a:r>
-            <a:r>
-              <a:rPr>
-                <a:solidFill>
-                  <a:srgbClr val="003B4F"/>
-                </a:solidFill>
-                <a:latin typeface="Courier"/>
-              </a:rPr>
-              <a:t> </a:t>
-            </a:r>
-            <a:r>
-              <a:rPr>
-                <a:solidFill>
-                  <a:srgbClr val="20794D"/>
-                </a:solidFill>
-                <a:latin typeface="Courier"/>
-              </a:rPr>
-              <a:t>"two.sample"</a:t>
-            </a:r>
-            <a:r>
-              <a:rPr>
-                <a:solidFill>
-                  <a:srgbClr val="003B4F"/>
-                </a:solidFill>
-                <a:latin typeface="Courier"/>
-              </a:rPr>
-              <a:t>)</a:t>
-            </a:r>
-            <a:r>
-              <a:rPr>
-                <a:solidFill>
-                  <a:srgbClr val="5E5E5E"/>
-                </a:solidFill>
-                <a:latin typeface="Courier"/>
-              </a:rPr>
-              <a:t>$</a:t>
-            </a:r>
-            <a:r>
-              <a:rPr>
-                <a:solidFill>
-                  <a:srgbClr val="003B4F"/>
-                </a:solidFill>
-                <a:latin typeface="Courier"/>
-              </a:rPr>
-              <a:t>power</a:t>
-            </a:r>
-            <a:br/>
-            <a:r>
-              <a:rPr>
-                <a:solidFill>
-                  <a:srgbClr val="003B4F"/>
-                </a:solidFill>
-                <a:latin typeface="Courier"/>
-              </a:rPr>
-              <a:t>  </a:t>
-            </a:r>
-            <a:r>
-              <a:rPr>
-                <a:solidFill>
-                  <a:srgbClr val="4758AB"/>
-                </a:solidFill>
-                <a:latin typeface="Courier"/>
-              </a:rPr>
-              <a:t>return</a:t>
-            </a:r>
-            <a:r>
-              <a:rPr>
-                <a:solidFill>
-                  <a:srgbClr val="003B4F"/>
-                </a:solidFill>
-                <a:latin typeface="Courier"/>
-              </a:rPr>
-              <a:t>(power)</a:t>
-            </a:r>
-            <a:br/>
-            <a:r>
-              <a:rPr>
-                <a:solidFill>
-                  <a:srgbClr val="003B4F"/>
-                </a:solidFill>
-                <a:latin typeface="Courier"/>
-              </a:rPr>
-              <a:t>})</a:t>
-            </a:r>
-            <a:br/>
-            <a:br/>
-            <a:r>
-              <a:rPr>
-                <a:solidFill>
-                  <a:srgbClr val="003B4F"/>
-                </a:solidFill>
-                <a:latin typeface="Courier"/>
-              </a:rPr>
-              <a:t>power_df &lt;- </a:t>
-            </a:r>
-            <a:r>
-              <a:rPr>
-                <a:solidFill>
-                  <a:srgbClr val="4758AB"/>
-                </a:solidFill>
-                <a:latin typeface="Courier"/>
-              </a:rPr>
-              <a:t>data.frame</a:t>
-            </a:r>
-            <a:r>
-              <a:rPr>
-                <a:solidFill>
-                  <a:srgbClr val="003B4F"/>
-                </a:solidFill>
-                <a:latin typeface="Courier"/>
-              </a:rPr>
-              <a:t>(</a:t>
-            </a:r>
-            <a:br/>
-            <a:r>
-              <a:rPr>
-                <a:solidFill>
-                  <a:srgbClr val="003B4F"/>
-                </a:solidFill>
-                <a:latin typeface="Courier"/>
-              </a:rPr>
-              <a:t>  </a:t>
-            </a:r>
-            <a:r>
-              <a:rPr>
-                <a:solidFill>
-                  <a:srgbClr val="657422"/>
-                </a:solidFill>
-                <a:latin typeface="Courier"/>
-              </a:rPr>
-              <a:t>sample_size =</a:t>
-            </a:r>
-            <a:r>
-              <a:rPr>
-                <a:solidFill>
-                  <a:srgbClr val="003B4F"/>
-                </a:solidFill>
-                <a:latin typeface="Courier"/>
-              </a:rPr>
-              <a:t> sample_sizes,</a:t>
-            </a:r>
-            <a:br/>
-            <a:r>
-              <a:rPr>
-                <a:solidFill>
-                  <a:srgbClr val="003B4F"/>
-                </a:solidFill>
-                <a:latin typeface="Courier"/>
-              </a:rPr>
-              <a:t>  </a:t>
-            </a:r>
-            <a:r>
-              <a:rPr>
-                <a:solidFill>
-                  <a:srgbClr val="657422"/>
-                </a:solidFill>
-                <a:latin typeface="Courier"/>
-              </a:rPr>
-              <a:t>power =</a:t>
-            </a:r>
-            <a:r>
-              <a:rPr>
-                <a:solidFill>
-                  <a:srgbClr val="003B4F"/>
-                </a:solidFill>
-                <a:latin typeface="Courier"/>
-              </a:rPr>
-              <a:t> power_values</a:t>
-            </a:r>
-            <a:br/>
-            <a:r>
-              <a:rPr>
-                <a:solidFill>
-                  <a:srgbClr val="003B4F"/>
-                </a:solidFill>
-                <a:latin typeface="Courier"/>
-              </a:rPr>
-              <a:t>)</a:t>
-            </a:r>
-            <a:br/>
-            <a:br/>
-            <a:r>
-              <a:rPr>
-                <a:solidFill>
-                  <a:srgbClr val="4758AB"/>
-                </a:solidFill>
-                <a:latin typeface="Courier"/>
-              </a:rPr>
-              <a:t>ggplot</a:t>
-            </a:r>
-            <a:r>
-              <a:rPr>
-                <a:solidFill>
-                  <a:srgbClr val="003B4F"/>
-                </a:solidFill>
-                <a:latin typeface="Courier"/>
-              </a:rPr>
-              <a:t>(power_df, </a:t>
-            </a:r>
-            <a:r>
-              <a:rPr>
-                <a:solidFill>
-                  <a:srgbClr val="4758AB"/>
-                </a:solidFill>
-                <a:latin typeface="Courier"/>
-              </a:rPr>
-              <a:t>aes</a:t>
-            </a:r>
-            <a:r>
-              <a:rPr>
-                <a:solidFill>
-                  <a:srgbClr val="003B4F"/>
-                </a:solidFill>
-                <a:latin typeface="Courier"/>
-              </a:rPr>
-              <a:t>(</a:t>
-            </a:r>
-            <a:r>
-              <a:rPr>
-                <a:solidFill>
-                  <a:srgbClr val="657422"/>
-                </a:solidFill>
-                <a:latin typeface="Courier"/>
-              </a:rPr>
-              <a:t>x =</a:t>
-            </a:r>
-            <a:r>
-              <a:rPr>
-                <a:solidFill>
-                  <a:srgbClr val="003B4F"/>
-                </a:solidFill>
-                <a:latin typeface="Courier"/>
-              </a:rPr>
-              <a:t> sample_size, </a:t>
-            </a:r>
-            <a:r>
-              <a:rPr>
-                <a:solidFill>
-                  <a:srgbClr val="657422"/>
-                </a:solidFill>
-                <a:latin typeface="Courier"/>
-              </a:rPr>
-              <a:t>y =</a:t>
-            </a:r>
-            <a:r>
-              <a:rPr>
-                <a:solidFill>
-                  <a:srgbClr val="003B4F"/>
-                </a:solidFill>
-                <a:latin typeface="Courier"/>
-              </a:rPr>
-              <a:t> power)) </a:t>
-            </a:r>
-            <a:r>
-              <a:rPr>
-                <a:solidFill>
-                  <a:srgbClr val="5E5E5E"/>
-                </a:solidFill>
-                <a:latin typeface="Courier"/>
-              </a:rPr>
-              <a:t>+</a:t>
-            </a:r>
-            <a:br/>
-            <a:r>
-              <a:rPr>
-                <a:solidFill>
-                  <a:srgbClr val="003B4F"/>
-                </a:solidFill>
-                <a:latin typeface="Courier"/>
-              </a:rPr>
-              <a:t>  </a:t>
-            </a:r>
-            <a:r>
-              <a:rPr>
-                <a:solidFill>
-                  <a:srgbClr val="4758AB"/>
-                </a:solidFill>
-                <a:latin typeface="Courier"/>
-              </a:rPr>
-              <a:t>geom_line</a:t>
-            </a:r>
-            <a:r>
-              <a:rPr>
-                <a:solidFill>
-                  <a:srgbClr val="003B4F"/>
-                </a:solidFill>
-                <a:latin typeface="Courier"/>
-              </a:rPr>
-              <a:t>(</a:t>
-            </a:r>
-            <a:r>
-              <a:rPr>
-                <a:solidFill>
-                  <a:srgbClr val="657422"/>
-                </a:solidFill>
-                <a:latin typeface="Courier"/>
-              </a:rPr>
-              <a:t>color =</a:t>
-            </a:r>
-            <a:r>
-              <a:rPr>
-                <a:solidFill>
-                  <a:srgbClr val="003B4F"/>
-                </a:solidFill>
-                <a:latin typeface="Courier"/>
-              </a:rPr>
-              <a:t> </a:t>
-            </a:r>
-            <a:r>
-              <a:rPr>
-                <a:solidFill>
-                  <a:srgbClr val="20794D"/>
-                </a:solidFill>
-                <a:latin typeface="Courier"/>
-              </a:rPr>
-              <a:t>"blue"</a:t>
-            </a:r>
-            <a:r>
-              <a:rPr>
-                <a:solidFill>
-                  <a:srgbClr val="003B4F"/>
-                </a:solidFill>
-                <a:latin typeface="Courier"/>
-              </a:rPr>
-              <a:t>, </a:t>
-            </a:r>
-            <a:r>
-              <a:rPr>
-                <a:solidFill>
-                  <a:srgbClr val="657422"/>
-                </a:solidFill>
-                <a:latin typeface="Courier"/>
-              </a:rPr>
-              <a:t>size =</a:t>
-            </a:r>
-            <a:r>
-              <a:rPr>
-                <a:solidFill>
-                  <a:srgbClr val="003B4F"/>
-                </a:solidFill>
-                <a:latin typeface="Courier"/>
-              </a:rPr>
-              <a:t> </a:t>
-            </a:r>
-            <a:r>
-              <a:rPr>
-                <a:solidFill>
-                  <a:srgbClr val="AD0000"/>
-                </a:solidFill>
-                <a:latin typeface="Courier"/>
-              </a:rPr>
-              <a:t>1</a:t>
-            </a:r>
-            <a:r>
-              <a:rPr>
-                <a:solidFill>
-                  <a:srgbClr val="003B4F"/>
-                </a:solidFill>
-                <a:latin typeface="Courier"/>
-              </a:rPr>
-              <a:t>) </a:t>
-            </a:r>
-            <a:r>
-              <a:rPr>
-                <a:solidFill>
-                  <a:srgbClr val="5E5E5E"/>
-                </a:solidFill>
-                <a:latin typeface="Courier"/>
-              </a:rPr>
-              <a:t>+</a:t>
-            </a:r>
-            <a:br/>
-            <a:r>
-              <a:rPr>
-                <a:solidFill>
-                  <a:srgbClr val="003B4F"/>
-                </a:solidFill>
-                <a:latin typeface="Courier"/>
-              </a:rPr>
-              <a:t>  </a:t>
-            </a:r>
-            <a:r>
-              <a:rPr>
-                <a:solidFill>
-                  <a:srgbClr val="4758AB"/>
-                </a:solidFill>
-                <a:latin typeface="Courier"/>
-              </a:rPr>
-              <a:t>geom_hline</a:t>
-            </a:r>
-            <a:r>
-              <a:rPr>
-                <a:solidFill>
-                  <a:srgbClr val="003B4F"/>
-                </a:solidFill>
-                <a:latin typeface="Courier"/>
-              </a:rPr>
-              <a:t>(</a:t>
-            </a:r>
-            <a:r>
-              <a:rPr>
-                <a:solidFill>
-                  <a:srgbClr val="657422"/>
-                </a:solidFill>
-                <a:latin typeface="Courier"/>
-              </a:rPr>
-              <a:t>yintercept =</a:t>
-            </a:r>
-            <a:r>
-              <a:rPr>
-                <a:solidFill>
-                  <a:srgbClr val="003B4F"/>
-                </a:solidFill>
-                <a:latin typeface="Courier"/>
-              </a:rPr>
-              <a:t> </a:t>
-            </a:r>
-            <a:r>
-              <a:rPr>
-                <a:solidFill>
-                  <a:srgbClr val="AD0000"/>
-                </a:solidFill>
-                <a:latin typeface="Courier"/>
-              </a:rPr>
-              <a:t>0.8</a:t>
-            </a:r>
-            <a:r>
-              <a:rPr>
-                <a:solidFill>
-                  <a:srgbClr val="003B4F"/>
-                </a:solidFill>
-                <a:latin typeface="Courier"/>
-              </a:rPr>
-              <a:t>, </a:t>
-            </a:r>
-            <a:r>
-              <a:rPr>
-                <a:solidFill>
-                  <a:srgbClr val="657422"/>
-                </a:solidFill>
-                <a:latin typeface="Courier"/>
-              </a:rPr>
-              <a:t>linetype =</a:t>
-            </a:r>
-            <a:r>
-              <a:rPr>
-                <a:solidFill>
-                  <a:srgbClr val="003B4F"/>
-                </a:solidFill>
-                <a:latin typeface="Courier"/>
-              </a:rPr>
-              <a:t> </a:t>
-            </a:r>
-            <a:r>
-              <a:rPr>
-                <a:solidFill>
-                  <a:srgbClr val="20794D"/>
-                </a:solidFill>
-                <a:latin typeface="Courier"/>
-              </a:rPr>
-              <a:t>"dashed"</a:t>
-            </a:r>
-            <a:r>
-              <a:rPr>
-                <a:solidFill>
-                  <a:srgbClr val="003B4F"/>
-                </a:solidFill>
-                <a:latin typeface="Courier"/>
-              </a:rPr>
-              <a:t>, </a:t>
-            </a:r>
-            <a:r>
-              <a:rPr>
-                <a:solidFill>
-                  <a:srgbClr val="657422"/>
-                </a:solidFill>
-                <a:latin typeface="Courier"/>
-              </a:rPr>
-              <a:t>color =</a:t>
-            </a:r>
-            <a:r>
-              <a:rPr>
-                <a:solidFill>
-                  <a:srgbClr val="003B4F"/>
-                </a:solidFill>
-                <a:latin typeface="Courier"/>
-              </a:rPr>
-              <a:t> </a:t>
-            </a:r>
-            <a:r>
-              <a:rPr>
-                <a:solidFill>
-                  <a:srgbClr val="20794D"/>
-                </a:solidFill>
-                <a:latin typeface="Courier"/>
-              </a:rPr>
-              <a:t>"red"</a:t>
-            </a:r>
-            <a:r>
-              <a:rPr>
-                <a:solidFill>
-                  <a:srgbClr val="003B4F"/>
-                </a:solidFill>
-                <a:latin typeface="Courier"/>
-              </a:rPr>
-              <a:t>) </a:t>
-            </a:r>
-            <a:r>
-              <a:rPr>
-                <a:solidFill>
-                  <a:srgbClr val="5E5E5E"/>
-                </a:solidFill>
-                <a:latin typeface="Courier"/>
-              </a:rPr>
-              <a:t>+</a:t>
-            </a:r>
-            <a:br/>
-            <a:r>
-              <a:rPr>
-                <a:solidFill>
-                  <a:srgbClr val="003B4F"/>
-                </a:solidFill>
-                <a:latin typeface="Courier"/>
-              </a:rPr>
-              <a:t>  </a:t>
-            </a:r>
-            <a:r>
-              <a:rPr>
-                <a:solidFill>
-                  <a:srgbClr val="4758AB"/>
-                </a:solidFill>
-                <a:latin typeface="Courier"/>
-              </a:rPr>
-              <a:t>theme_minimal</a:t>
-            </a:r>
-            <a:r>
-              <a:rPr>
-                <a:solidFill>
-                  <a:srgbClr val="003B4F"/>
-                </a:solidFill>
-                <a:latin typeface="Courier"/>
-              </a:rPr>
-              <a:t>() </a:t>
-            </a:r>
-            <a:r>
-              <a:rPr>
-                <a:solidFill>
-                  <a:srgbClr val="5E5E5E"/>
-                </a:solidFill>
-                <a:latin typeface="Courier"/>
-              </a:rPr>
-              <a:t>+</a:t>
-            </a:r>
-            <a:br/>
-            <a:r>
-              <a:rPr>
-                <a:solidFill>
-                  <a:srgbClr val="003B4F"/>
-                </a:solidFill>
-                <a:latin typeface="Courier"/>
-              </a:rPr>
-              <a:t>  </a:t>
-            </a:r>
-            <a:r>
-              <a:rPr>
-                <a:solidFill>
-                  <a:srgbClr val="4758AB"/>
-                </a:solidFill>
-                <a:latin typeface="Courier"/>
-              </a:rPr>
-              <a:t>labs</a:t>
-            </a:r>
-            <a:r>
-              <a:rPr>
-                <a:solidFill>
-                  <a:srgbClr val="003B4F"/>
-                </a:solidFill>
-                <a:latin typeface="Courier"/>
-              </a:rPr>
-              <a:t>(</a:t>
-            </a:r>
-            <a:r>
-              <a:rPr>
-                <a:solidFill>
-                  <a:srgbClr val="657422"/>
-                </a:solidFill>
-                <a:latin typeface="Courier"/>
-              </a:rPr>
-              <a:t>title =</a:t>
-            </a:r>
-            <a:r>
-              <a:rPr>
-                <a:solidFill>
-                  <a:srgbClr val="003B4F"/>
-                </a:solidFill>
-                <a:latin typeface="Courier"/>
-              </a:rPr>
-              <a:t> </a:t>
-            </a:r>
-            <a:r>
-              <a:rPr>
-                <a:solidFill>
-                  <a:srgbClr val="20794D"/>
-                </a:solidFill>
-                <a:latin typeface="Courier"/>
-              </a:rPr>
-              <a:t>"Power Analysis for Pine Needle Study"</a:t>
-            </a:r>
-            <a:r>
-              <a:rPr>
-                <a:solidFill>
-                  <a:srgbClr val="003B4F"/>
-                </a:solidFill>
-                <a:latin typeface="Courier"/>
-              </a:rPr>
-              <a:t>,</a:t>
-            </a:r>
-            <a:br/>
-            <a:r>
-              <a:rPr>
-                <a:solidFill>
-                  <a:srgbClr val="003B4F"/>
-                </a:solidFill>
-                <a:latin typeface="Courier"/>
-              </a:rPr>
-              <a:t>       </a:t>
-            </a:r>
-            <a:r>
-              <a:rPr>
-                <a:solidFill>
-                  <a:srgbClr val="657422"/>
-                </a:solidFill>
-                <a:latin typeface="Courier"/>
-              </a:rPr>
-              <a:t>x =</a:t>
-            </a:r>
-            <a:r>
-              <a:rPr>
-                <a:solidFill>
-                  <a:srgbClr val="003B4F"/>
-                </a:solidFill>
-                <a:latin typeface="Courier"/>
-              </a:rPr>
-              <a:t> </a:t>
-            </a:r>
-            <a:r>
-              <a:rPr>
-                <a:solidFill>
-                  <a:srgbClr val="20794D"/>
-                </a:solidFill>
-                <a:latin typeface="Courier"/>
-              </a:rPr>
-              <a:t>"Sample Size (per group)"</a:t>
-            </a:r>
-            <a:r>
-              <a:rPr>
-                <a:solidFill>
-                  <a:srgbClr val="003B4F"/>
-                </a:solidFill>
-                <a:latin typeface="Courier"/>
-              </a:rPr>
-              <a:t>,</a:t>
-            </a:r>
-            <a:br/>
-            <a:r>
-              <a:rPr>
-                <a:solidFill>
-                  <a:srgbClr val="003B4F"/>
-                </a:solidFill>
-                <a:latin typeface="Courier"/>
-              </a:rPr>
-              <a:t>       </a:t>
-            </a:r>
-            <a:r>
-              <a:rPr>
-                <a:solidFill>
-                  <a:srgbClr val="657422"/>
-                </a:solidFill>
-                <a:latin typeface="Courier"/>
-              </a:rPr>
-              <a:t>y =</a:t>
-            </a:r>
-            <a:r>
-              <a:rPr>
-                <a:solidFill>
-                  <a:srgbClr val="003B4F"/>
-                </a:solidFill>
-                <a:latin typeface="Courier"/>
-              </a:rPr>
-              <a:t> </a:t>
-            </a:r>
-            <a:r>
-              <a:rPr>
-                <a:solidFill>
-                  <a:srgbClr val="20794D"/>
-                </a:solidFill>
-                <a:latin typeface="Courier"/>
-              </a:rPr>
-              <a:t>"Statistical Power"</a:t>
-            </a:r>
-            <a:r>
-              <a:rPr>
-                <a:solidFill>
-                  <a:srgbClr val="003B4F"/>
-                </a:solidFill>
-                <a:latin typeface="Courier"/>
-              </a:rPr>
-              <a:t>)</a:t>
-            </a:r>
-          </a:p>
-          <a:p>
-            <a:pPr lvl="0" indent="0" marL="1270000">
-              <a:buNone/>
-            </a:pPr>
-          </a:p>
-          <a:p>
-            <a:pPr lvl="0" indent="0" marL="1270000">
-              <a:buNone/>
-            </a:pPr>
-            <a:r>
-              <a:rPr sz="2000"/>
-              <a:t>Questions:</a:t>
-            </a:r>
-          </a:p>
-          <a:p>
-            <a:pPr lvl="0" indent="-342900" marL="342900">
-              <a:buAutoNum type="arabicPeriod"/>
-            </a:pPr>
-            <a:r>
-              <a:rPr sz="2000"/>
-              <a:t>How many trees should we sample to achieve 80% power?</a:t>
-            </a:r>
-          </a:p>
-          <a:p>
-            <a:pPr lvl="0" indent="-342900" marL="342900">
-              <a:buAutoNum type="arabicPeriod"/>
-            </a:pPr>
-            <a:r>
-              <a:rPr sz="2000"/>
-              <a:t>If we can only sample 5 trees per group, what is our power?</a:t>
-            </a:r>
-          </a:p>
-          <a:p>
-            <a:pPr lvl="0" indent="-342900" marL="342900">
-              <a:buAutoNum type="arabicPeriod"/>
-            </a:pPr>
-            <a:r>
-              <a:rPr sz="2000"/>
-              <a:t>How would increasing variability (SD) affect our sample size requirements?</a:t>
-            </a:r>
-          </a:p>
-        </p:txBody>
-      </p:sp>
-    </p:spTree>
-  </p:cSld>
-</p:sld>
-</file>
-
-<file path=ppt/slides/slide33.xml><?xml version="1.0" encoding="utf-8"?>
 <p:sld xmlns:a="http://schemas.openxmlformats.org/drawingml/2006/main" xmlns:r="http://schemas.openxmlformats.org/officeDocument/2006/relationships" xmlns:p="http://schemas.openxmlformats.org/presentationml/2006/main">
   <p:cSld>
     <p:spTree>
@@ -11608,7 +8052,7 @@
 </p:sld>
 </file>
 
-<file path=ppt/slides/slide34.xml><?xml version="1.0" encoding="utf-8"?>
+<file path=ppt/slides/slide33.xml><?xml version="1.0" encoding="utf-8"?>
 <p:sld xmlns:a="http://schemas.openxmlformats.org/drawingml/2006/main" xmlns:r="http://schemas.openxmlformats.org/officeDocument/2006/relationships" xmlns:p="http://schemas.openxmlformats.org/presentationml/2006/main">
   <p:cSld>
     <p:spTree>
@@ -11837,7 +8281,7 @@
 </p:sld>
 </file>
 
-<file path=ppt/slides/slide35.xml><?xml version="1.0" encoding="utf-8"?>
+<file path=ppt/slides/slide34.xml><?xml version="1.0" encoding="utf-8"?>
 <p:sld xmlns:a="http://schemas.openxmlformats.org/drawingml/2006/main" xmlns:r="http://schemas.openxmlformats.org/officeDocument/2006/relationships" xmlns:p="http://schemas.openxmlformats.org/presentationml/2006/main">
   <p:cSld>
     <p:spTree>
